--- a/A1_Current/UUse_A1_6_Slides.pptx
+++ b/A1_Current/UUse_A1_6_Slides.pptx
@@ -2,18 +2,18 @@
 <file path=ppt/presentation.xml><?xml version="1.0" encoding="utf-8"?>
 <p:presentation xmlns:p="http://schemas.openxmlformats.org/presentationml/2006/main">
   <p:sldMasterIdLst>
-    <p:sldMasterId xmlns:r="http://schemas.openxmlformats.org/officeDocument/2006/relationships" id="2147483648" r:id="R4f37e6d40cec4b9e"/>
+    <p:sldMasterId xmlns:r="http://schemas.openxmlformats.org/officeDocument/2006/relationships" id="2147483648" r:id="R6017096b5aa24f3d"/>
   </p:sldMasterIdLst>
   <p:notesMasterIdLst>
-    <p:notesMasterId xmlns:r="http://schemas.openxmlformats.org/officeDocument/2006/relationships" r:id="R1db02184b32c47cc"/>
+    <p:notesMasterId xmlns:r="http://schemas.openxmlformats.org/officeDocument/2006/relationships" r:id="Rf78ad1f8880a4fd9"/>
   </p:notesMasterIdLst>
   <p:sldIdLst>
-    <p:sldId xmlns:r="http://schemas.openxmlformats.org/officeDocument/2006/relationships" id="256" r:id="Raa00fefcf8df48a1"/>
-    <p:sldId xmlns:r="http://schemas.openxmlformats.org/officeDocument/2006/relationships" id="257" r:id="R89bfe6ec1e584c59"/>
-    <p:sldId xmlns:r="http://schemas.openxmlformats.org/officeDocument/2006/relationships" id="258" r:id="R613287d5426d4811"/>
-    <p:sldId xmlns:r="http://schemas.openxmlformats.org/officeDocument/2006/relationships" id="259" r:id="R780ed1e5ae264fb4"/>
-    <p:sldId xmlns:r="http://schemas.openxmlformats.org/officeDocument/2006/relationships" id="260" r:id="R1f50c8920cf44e75"/>
-    <p:sldId xmlns:r="http://schemas.openxmlformats.org/officeDocument/2006/relationships" id="261" r:id="Ra758724d97d34de3"/>
+    <p:sldId xmlns:r="http://schemas.openxmlformats.org/officeDocument/2006/relationships" id="256" r:id="R3d39cba8553a475b"/>
+    <p:sldId xmlns:r="http://schemas.openxmlformats.org/officeDocument/2006/relationships" id="257" r:id="R3fb10efd8c234b84"/>
+    <p:sldId xmlns:r="http://schemas.openxmlformats.org/officeDocument/2006/relationships" id="258" r:id="R79a81a3ae88947ca"/>
+    <p:sldId xmlns:r="http://schemas.openxmlformats.org/officeDocument/2006/relationships" id="259" r:id="Rdd987e874c3d4db8"/>
+    <p:sldId xmlns:r="http://schemas.openxmlformats.org/officeDocument/2006/relationships" id="260" r:id="Rc74abe09f7864bf2"/>
+    <p:sldId xmlns:r="http://schemas.openxmlformats.org/officeDocument/2006/relationships" id="261" r:id="R6978056c9b8c4652"/>
   </p:sldIdLst>
   <p:sldSz cx="12192000" cy="6858000"/>
   <p:notesSz cx="6858000" cy="9144000"/>
@@ -460,6 +460,36 @@
               <a:t>Actual U Use local prototype screenshots from the 6 October 2026 support build. All displayed inventory, needs and accounts are synthetic demonstration data. The screenshots do not establish adoption, supply or demand.</a:t>
             </a:r>
           </a:p>
+          <a:p xmlns:a="http://schemas.openxmlformats.org/drawingml/2006/main">
+            <a:r>
+              <a:t/>
+            </a:r>
+          </a:p>
+          <a:p xmlns:a="http://schemas.openxmlformats.org/drawingml/2006/main">
+            <a:r>
+              <a:t>Version update, 19 October 2026: the feature set is now frozen for course demonstrations and real user tests. The cover image remains an actual prototype screenshot with synthetic demonstration inventory. It does not show adoption or committed supply.</a:t>
+            </a:r>
+          </a:p>
+          <a:p xmlns:a="http://schemas.openxmlformats.org/drawingml/2006/main">
+            <a:r>
+              <a:t>Engineering baseline: code commit cbb28a683bc9d73f128fbb980a8e0a05abbb90fb. Acceptance window 18-19 October 2026. Six business regression groups, TypeScript, isolated production build, production-mode API integration, the actual reference-image OCR regression and missing-input failure checks passed. GitHub CI passed, including isolated PostgreSQL integration. These are engineering checks using isolated databases, a local SMTP simulator and synthetic QA accounts, not a user-study sample or completed real trades.</a:t>
+            </a:r>
+          </a:p>
+          <a:p xmlns:a="http://schemas.openxmlformats.org/drawingml/2006/main">
+            <a:r>
+              <a:t>Acceptance report: https://github.com/Rita020903/U-Use/blob/cbb28a683bc9d73f128fbb980a8e0a05abbb90fb/xjtlu-market-app/RELEASE_ACCEPTANCE.md</a:t>
+            </a:r>
+          </a:p>
+          <a:p xmlns:a="http://schemas.openxmlformats.org/drawingml/2006/main">
+            <a:r>
+              <a:t>CI: https://github.com/Rita020903/U-Use/actions/runs/39146950790</a:t>
+            </a:r>
+          </a:p>
+          <a:p xmlns:a="http://schemas.openxmlformats.org/drawingml/2006/main">
+            <a:r>
+              <a:t>The code is suitable for course demonstrations and the next user-validation stage within the tested scope. This does not certify a public launch or universal absence of defects. Real school-email delivery, physical devices, Safari and other browsers, actual campus GPS/network conditions, and the project's production environment and recovery remain to be accepted.</a:t>
+            </a:r>
+          </a:p>
         </p:txBody>
       </p:sp>
       <p:sp>
@@ -727,32 +757,47 @@
           <a:lstStyle xmlns:a="http://schemas.openxmlformats.org/drawingml/2006/main"/>
           <a:p xmlns:a="http://schemas.openxmlformats.org/drawingml/2006/main">
             <a:r>
-              <a:t>Three concepts differ in their operating model. A manual bulletin coordinates messages but owns no inventory. A managed pool holds or manages shared stock and carries storage/inspection responsibility. U Use lets students retain their own items and manage dated requests and bookings.</a:t>
+              <a:t>The product now demonstrates two concrete forms of coordination. A requester posts the needed dates and budget, and an owner can privately recommend an item. A recommendation does not create a booking. Separately, each person may import their own timetable from an image or PDF, correct and confirm each class, and enable suggestions for mutual free time. The supplied seven-class timetable is only an OCR regression example. Neither the product nor the pilot assumes the same timetable, number of classes, semester dates or teaching weeks for everyone. Manual booking remains available without import. A suggested time still requires an explicit booking and owner acceptance.</a:t>
             </a:r>
           </a:p>
           <a:p xmlns:a="http://schemas.openxmlformats.org/drawingml/2006/main">
             <a:r>
-              <a:t>Provisional 1-5 planning scores, not participant ratings: criteria scheduling fit 30%, low operating burden 25%, technical feasibility 25%, privacy 10%, supply acquisition 10%. A scores 2/5/5/2/3, B 4/1/2/4/2, C 4/4/4/4/2. Weighted results A 3.60, B 2.55, C 3.80. Each criterion is a team-review proposal. No claim says observed demand is clearer for C.</a:t>
+              <a:t>The map is secondary and collapsed by default. Users can choose a public XEC or SIP handoff without location sharing. Full timetables and raw OCR are not shared with other users. The screenshot comes from the local 19 October QA run. It shows a synthetic QA account and request rather than a real participant or market outcome.</a:t>
             </a:r>
           </a:p>
           <a:p xmlns:a="http://schemas.openxmlformats.org/drawingml/2006/main">
             <a:r>
-              <a:t>The result is sensitive. Move 15 percentage points from scheduling fit to low operating burden and A rises to 4.05 while C stays 3.80. If usage or supply is too low, a manual bulletin is a credible alternative. Avoid treating an already-built prototype as proof of a viable business.</a:t>
+              <a:t>Three concepts use different operating models. A manual bulletin coordinates messages without holding stock. A managed item pool takes storage and inspection responsibility. U Use leaves items with their owners and adds dated requests and bookings.</a:t>
             </a:r>
           </a:p>
           <a:p xmlns:a="http://schemas.openxmlformats.org/drawingml/2006/main">
             <a:r>
-              <a:t>The existing code includes date-aware discovery, a needs board, explicit booking acceptance/confirmation, optional maps and user-reviewed timetable import. OCR is fallible. Email verification confirms mailbox access, not university SSO or a guarantee of behaviour. Deposits and payments remain offline. No platform escrow, insurance or automatic compensation exists.</a:t>
+              <a:t>The weighted matrix remains a planning judgment, not user ratings: scheduling 30%, operating burden 25%, feasibility 25%, privacy 10%, supply acquisition 10%. Scores out of five are 3.60, 2.55 and 3.80. Moving 15 percentage points from scheduling to operating burden makes the manual bulletin score 4.05 and U Use stay at 3.80. Low use or weak supply can therefore justify a simpler bulletin.</a:t>
             </a:r>
           </a:p>
           <a:p xmlns:a="http://schemas.openxmlformats.org/drawingml/2006/main">
             <a:r>
-              <a:t>Sources: Local product code commit 7aa3b02, 10 October 2026. Recorded checks cover six business test groups, types, production build and isolated API/browser tests. Engineering checks are not participant tests or production acceptance.</a:t>
+              <a:t>The browser run exercised two independent accounts, request recommendations, booking messages, bilateral handoff/return, different timetable imports and mutual suggestions, account export/logout and both campus maps. It used responsive viewports, not four physical devices. OCR remains fallible and requires review. Email verification demonstrates mailbox access, not university SSO. Payments and deposits remain offline records, with no platform escrow or insurance.</a:t>
             </a:r>
           </a:p>
           <a:p xmlns:a="http://schemas.openxmlformats.org/drawingml/2006/main">
             <a:r>
-              <a:t>Actual U Use local prototype screenshots from the 6 October 2026 support build. All displayed inventory, needs and accounts are synthetic demonstration data. The screenshots do not establish adoption, supply or demand.</a:t>
+              <a:t>Engineering baseline: code commit cbb28a683bc9d73f128fbb980a8e0a05abbb90fb. Acceptance window 18-19 October 2026. Six business regression groups, TypeScript, isolated production build, production-mode API integration, the actual reference-image OCR regression and missing-input failure checks passed. GitHub CI passed, including isolated PostgreSQL integration. These are engineering checks using isolated databases, a local SMTP simulator and synthetic QA accounts, not a user-study sample or completed real trades.</a:t>
+            </a:r>
+          </a:p>
+          <a:p xmlns:a="http://schemas.openxmlformats.org/drawingml/2006/main">
+            <a:r>
+              <a:t>Acceptance report: https://github.com/Rita020903/U-Use/blob/cbb28a683bc9d73f128fbb980a8e0a05abbb90fb/xjtlu-market-app/RELEASE_ACCEPTANCE.md</a:t>
+            </a:r>
+          </a:p>
+          <a:p xmlns:a="http://schemas.openxmlformats.org/drawingml/2006/main">
+            <a:r>
+              <a:t>CI: https://github.com/Rita020903/U-Use/actions/runs/39146950790</a:t>
+            </a:r>
+          </a:p>
+          <a:p xmlns:a="http://schemas.openxmlformats.org/drawingml/2006/main">
+            <a:r>
+              <a:t>The code is suitable for course demonstrations and the next user-validation stage within the tested scope. This does not certify a public launch or universal absence of defects. Real school-email delivery, physical devices, Safari and other browsers, actual campus GPS/network conditions, and the project's production environment and recovery remain to be accepted.</a:t>
             </a:r>
           </a:p>
         </p:txBody>
@@ -912,27 +957,57 @@
           <a:lstStyle xmlns:a="http://schemas.openxmlformats.org/drawingml/2006/main"/>
           <a:p xmlns:a="http://schemas.openxmlformats.org/drawingml/2006/main">
             <a:r>
-              <a:t>The seven roles follow the allocation agreed by Rita. They describe responsibility, not work already completed. Each member needs to be able to explain the evidence, calculations and product decisions.</a:t>
+              <a:t>The seven roles follow Rita's agreed allocation and describe responsibility, not completed contribution. Every member should understand the evidence and planning assumptions.</a:t>
             </a:r>
           </a:p>
           <a:p xmlns:a="http://schemas.openxmlformats.org/drawingml/2006/main">
             <a:r>
-              <a:t>Week 6 runs from 19 to 25 October. We will connect the interview insights to design decisions and complete the research source trail. Week 7 runs from 26 October to 1 November. We will review the concept weighting and test whether people understand dates, fees and privacy settings. In Week 8 we will finalise the six-slide deck and sources, then submit through LMO by 6 November at 23:59.</a:t>
+              <a:t>As of 19 October, the course-demonstration code has passed the scoped engineering acceptance. Freeze new features and large refactors. Fix observed defects and rerun affected checks. Real user observations should now guide changes instead of speculative development.</a:t>
             </a:r>
           </a:p>
           <a:p xmlns:a="http://schemas.openxmlformats.org/drawingml/2006/main">
             <a:r>
-              <a:t>The follow-on four-week pilot aims for two genuine completed requests without a severe privacy or loss incident. That is a proposed learning goal, not traction already achieved or proof of viability. Low usage or inadequate supply can justify a manual bulletin instead.</a:t>
+              <a:t>Week 6, 19-25 October: connect at least three traceable interview insights to the persona, journey and design choices. Complete the actual dates, consent and privately stored source-record links for the fifteen team-provided summaries. Record the reason to persevere or adjust.</a:t>
             </a:r>
           </a:p>
           <a:p xmlns:a="http://schemas.openxmlformats.org/drawingml/2006/main">
             <a:r>
-              <a:t>Keep signed team documents, contribution records and the university-approved AI disclosure with the submission evidence. Handbook p.5 mentions both submission receipts without defining the pair, so the team must confirm this in LMO or with the supervisor.</a:t>
+              <a:t>Week 7, 26 October-1 November: compare all three concepts and review the weighting. Observe real participants using their own differing timetables and understanding fees, dates, owner confirmation and privacy. Record actual task outcomes and problems, then retest fixes. Do not substitute engineering fixtures or the 100-person synthetic practice data for participant results.</a:t>
             </a:r>
           </a:p>
           <a:p xmlns:a="http://schemas.openxmlformats.org/drawingml/2006/main">
             <a:r>
-              <a:t>User-supplied ENT303TC 2026/27 Module Handbook, pp. 3-6. Separate brief takes precedence.</a:t>
+              <a:t>Week 8, 2-6 November: verify all nine BMC blocks and the claim-to-evidence map, rehearse the six-slide explanation, confirm the portal's file and AI-disclosure requirements, and submit by 6 November 2026 at 23:59 through LMO. Rita approves and Huang Yuxuan archives the actual receipt. GitHub synchronization is not LMO submission. Keep the signed charter, baseline where applicable and real contributions as separate evidence. The handbook mentions both submission receipts without identifying them, so check the portal rather than inventing a second upload.</a:t>
+            </a:r>
+          </a:p>
+          <a:p xmlns:a="http://schemas.openxmlformats.org/drawingml/2006/main">
+            <a:r>
+              <a:t>A proposed later four-week pilot targets two genuine completed requests without a severe privacy or loss incident. This is a learning gate, not completed traction, a handbook rule or proof of viability. The eight DTS classes are the recruitment boundary, with actual headcounts and permission still to confirm. Low use or inadequate supply may justify a manual bulletin.</a:t>
+            </a:r>
+          </a:p>
+          <a:p xmlns:a="http://schemas.openxmlformats.org/drawingml/2006/main">
+            <a:r>
+              <a:t>AI drafting and code assistance require the university-approved disclosure. The supplied ENT303TC 2026/27 handbook is the current basis for exactly six A1 slides including cover, no appendix, with any newer independent brief taking precedence.</a:t>
+            </a:r>
+          </a:p>
+          <a:p xmlns:a="http://schemas.openxmlformats.org/drawingml/2006/main">
+            <a:r>
+              <a:t>Engineering baseline: code commit cbb28a683bc9d73f128fbb980a8e0a05abbb90fb. Acceptance window 18-19 October 2026. Six business regression groups, TypeScript, isolated production build, production-mode API integration, the actual reference-image OCR regression and missing-input failure checks passed. GitHub CI passed, including isolated PostgreSQL integration. These are engineering checks using isolated databases, a local SMTP simulator and synthetic QA accounts, not a user-study sample or completed real trades.</a:t>
+            </a:r>
+          </a:p>
+          <a:p xmlns:a="http://schemas.openxmlformats.org/drawingml/2006/main">
+            <a:r>
+              <a:t>Acceptance report: https://github.com/Rita020903/U-Use/blob/cbb28a683bc9d73f128fbb980a8e0a05abbb90fb/xjtlu-market-app/RELEASE_ACCEPTANCE.md</a:t>
+            </a:r>
+          </a:p>
+          <a:p xmlns:a="http://schemas.openxmlformats.org/drawingml/2006/main">
+            <a:r>
+              <a:t>CI: https://github.com/Rita020903/U-Use/actions/runs/39146950790</a:t>
+            </a:r>
+          </a:p>
+          <a:p xmlns:a="http://schemas.openxmlformats.org/drawingml/2006/main">
+            <a:r>
+              <a:t>The code is suitable for course demonstrations and the next user-validation stage within the tested scope. This does not certify a public launch or universal absence of defects. Real school-email delivery, physical devices, Safari and other browsers, actual campus GPS/network conditions, and the project's production environment and recovery remain to be accepted.</a:t>
             </a:r>
           </a:p>
         </p:txBody>
@@ -3375,12 +3450,12 @@
   </p:cSld>
   <p:clrMap bg1="lt1" tx1="dk1" bg2="lt2" tx2="dk2" accent1="accent1" accent2="accent2" accent3="accent3" accent4="accent4" accent5="accent5" accent6="accent6" hlink="hlink" folHlink="folHlink"/>
   <p:sldLayoutIdLst>
-    <p:sldLayoutId xmlns:r="http://schemas.openxmlformats.org/officeDocument/2006/relationships" id="2147483649" r:id="Rb44eb8bbf5254aaa"/>
-    <p:sldLayoutId xmlns:r="http://schemas.openxmlformats.org/officeDocument/2006/relationships" id="2147483650" r:id="Rb57c761b3176405e"/>
-    <p:sldLayoutId xmlns:r="http://schemas.openxmlformats.org/officeDocument/2006/relationships" id="2147483651" r:id="R08d8898844fe4ade"/>
-    <p:sldLayoutId xmlns:r="http://schemas.openxmlformats.org/officeDocument/2006/relationships" id="2147483652" r:id="Reb6db8e5e7754dca"/>
-    <p:sldLayoutId xmlns:r="http://schemas.openxmlformats.org/officeDocument/2006/relationships" id="2147483653" r:id="R554bea9daf7a41bc"/>
-    <p:sldLayoutId xmlns:r="http://schemas.openxmlformats.org/officeDocument/2006/relationships" id="2147483654" r:id="R395dbb390b8d4809"/>
+    <p:sldLayoutId xmlns:r="http://schemas.openxmlformats.org/officeDocument/2006/relationships" id="2147483649" r:id="R81d37cfcab744fee"/>
+    <p:sldLayoutId xmlns:r="http://schemas.openxmlformats.org/officeDocument/2006/relationships" id="2147483650" r:id="R49ee661213d9400e"/>
+    <p:sldLayoutId xmlns:r="http://schemas.openxmlformats.org/officeDocument/2006/relationships" id="2147483651" r:id="R246500799afd4184"/>
+    <p:sldLayoutId xmlns:r="http://schemas.openxmlformats.org/officeDocument/2006/relationships" id="2147483652" r:id="Rd2d3bd63f60148b1"/>
+    <p:sldLayoutId xmlns:r="http://schemas.openxmlformats.org/officeDocument/2006/relationships" id="2147483653" r:id="Re370411ee9cc422f"/>
+    <p:sldLayoutId xmlns:r="http://schemas.openxmlformats.org/officeDocument/2006/relationships" id="2147483654" r:id="R6c6a32f9b77b49cc"/>
   </p:sldLayoutIdLst>
   <p:txStyles>
     <p:titleStyle>
@@ -3969,6 +4044,7 @@
               </a:defRPr>
             </a:defPPr>
             <a:lvl1pPr>
+              <a:buNone/>
               <a:defRPr sz="1650" b="0">
                 <a:solidFill>
                   <a:srgbClr val="58635E"/>
@@ -3979,6 +4055,7 @@
               </a:defRPr>
             </a:lvl1pPr>
             <a:lvl2pPr>
+              <a:buNone/>
               <a:defRPr sz="1650" b="0">
                 <a:solidFill>
                   <a:srgbClr val="58635E"/>
@@ -3989,6 +4066,7 @@
               </a:defRPr>
             </a:lvl2pPr>
             <a:lvl3pPr>
+              <a:buNone/>
               <a:defRPr sz="1650" b="0">
                 <a:solidFill>
                   <a:srgbClr val="58635E"/>
@@ -3999,6 +4077,7 @@
               </a:defRPr>
             </a:lvl3pPr>
             <a:lvl4pPr>
+              <a:buNone/>
               <a:defRPr sz="1650" b="0">
                 <a:solidFill>
                   <a:srgbClr val="58635E"/>
@@ -4009,6 +4088,7 @@
               </a:defRPr>
             </a:lvl4pPr>
             <a:lvl5pPr>
+              <a:buNone/>
               <a:defRPr sz="1650" b="0">
                 <a:solidFill>
                   <a:srgbClr val="58635E"/>
@@ -4019,6 +4099,7 @@
               </a:defRPr>
             </a:lvl5pPr>
             <a:lvl6pPr>
+              <a:buNone/>
               <a:defRPr sz="1650" b="0">
                 <a:solidFill>
                   <a:srgbClr val="58635E"/>
@@ -4029,6 +4110,7 @@
               </a:defRPr>
             </a:lvl6pPr>
             <a:lvl7pPr>
+              <a:buNone/>
               <a:defRPr sz="1650" b="0">
                 <a:solidFill>
                   <a:srgbClr val="58635E"/>
@@ -4039,6 +4121,7 @@
               </a:defRPr>
             </a:lvl7pPr>
             <a:lvl8pPr>
+              <a:buNone/>
               <a:defRPr sz="1650" b="0">
                 <a:solidFill>
                   <a:srgbClr val="58635E"/>
@@ -4049,6 +4132,7 @@
               </a:defRPr>
             </a:lvl8pPr>
             <a:lvl9pPr>
+              <a:buNone/>
               <a:defRPr sz="1650" b="0">
                 <a:solidFill>
                   <a:srgbClr val="58635E"/>
@@ -4061,6 +4145,7 @@
           </a:lstStyle>
           <a:p xmlns:a="http://schemas.openxmlformats.org/drawingml/2006/main">
             <a:pPr>
+              <a:buNone/>
               <a:defRPr sz="1650" b="0">
                 <a:solidFill>
                   <a:srgbClr val="58635E"/>
@@ -4127,6 +4212,7 @@
               </a:defRPr>
             </a:defPPr>
             <a:lvl1pPr>
+              <a:buNone/>
               <a:defRPr sz="8850" b="1">
                 <a:solidFill>
                   <a:srgbClr val="28634E"/>
@@ -4137,6 +4223,7 @@
               </a:defRPr>
             </a:lvl1pPr>
             <a:lvl2pPr>
+              <a:buNone/>
               <a:defRPr sz="8850" b="1">
                 <a:solidFill>
                   <a:srgbClr val="28634E"/>
@@ -4147,6 +4234,7 @@
               </a:defRPr>
             </a:lvl2pPr>
             <a:lvl3pPr>
+              <a:buNone/>
               <a:defRPr sz="8850" b="1">
                 <a:solidFill>
                   <a:srgbClr val="28634E"/>
@@ -4157,6 +4245,7 @@
               </a:defRPr>
             </a:lvl3pPr>
             <a:lvl4pPr>
+              <a:buNone/>
               <a:defRPr sz="8850" b="1">
                 <a:solidFill>
                   <a:srgbClr val="28634E"/>
@@ -4167,6 +4256,7 @@
               </a:defRPr>
             </a:lvl4pPr>
             <a:lvl5pPr>
+              <a:buNone/>
               <a:defRPr sz="8850" b="1">
                 <a:solidFill>
                   <a:srgbClr val="28634E"/>
@@ -4177,6 +4267,7 @@
               </a:defRPr>
             </a:lvl5pPr>
             <a:lvl6pPr>
+              <a:buNone/>
               <a:defRPr sz="8850" b="1">
                 <a:solidFill>
                   <a:srgbClr val="28634E"/>
@@ -4187,6 +4278,7 @@
               </a:defRPr>
             </a:lvl6pPr>
             <a:lvl7pPr>
+              <a:buNone/>
               <a:defRPr sz="8850" b="1">
                 <a:solidFill>
                   <a:srgbClr val="28634E"/>
@@ -4197,6 +4289,7 @@
               </a:defRPr>
             </a:lvl7pPr>
             <a:lvl8pPr>
+              <a:buNone/>
               <a:defRPr sz="8850" b="1">
                 <a:solidFill>
                   <a:srgbClr val="28634E"/>
@@ -4207,6 +4300,7 @@
               </a:defRPr>
             </a:lvl8pPr>
             <a:lvl9pPr>
+              <a:buNone/>
               <a:defRPr sz="8850" b="1">
                 <a:solidFill>
                   <a:srgbClr val="28634E"/>
@@ -4219,6 +4313,7 @@
           </a:lstStyle>
           <a:p xmlns:a="http://schemas.openxmlformats.org/drawingml/2006/main">
             <a:pPr>
+              <a:buNone/>
               <a:defRPr sz="8850" b="1">
                 <a:solidFill>
                   <a:srgbClr val="28634E"/>
@@ -4285,6 +4380,7 @@
               </a:defRPr>
             </a:defPPr>
             <a:lvl1pPr>
+              <a:buNone/>
               <a:defRPr sz="3300" b="1">
                 <a:solidFill>
                   <a:srgbClr val="20322B"/>
@@ -4295,6 +4391,7 @@
               </a:defRPr>
             </a:lvl1pPr>
             <a:lvl2pPr>
+              <a:buNone/>
               <a:defRPr sz="3300" b="1">
                 <a:solidFill>
                   <a:srgbClr val="20322B"/>
@@ -4305,6 +4402,7 @@
               </a:defRPr>
             </a:lvl2pPr>
             <a:lvl3pPr>
+              <a:buNone/>
               <a:defRPr sz="3300" b="1">
                 <a:solidFill>
                   <a:srgbClr val="20322B"/>
@@ -4315,6 +4413,7 @@
               </a:defRPr>
             </a:lvl3pPr>
             <a:lvl4pPr>
+              <a:buNone/>
               <a:defRPr sz="3300" b="1">
                 <a:solidFill>
                   <a:srgbClr val="20322B"/>
@@ -4325,6 +4424,7 @@
               </a:defRPr>
             </a:lvl4pPr>
             <a:lvl5pPr>
+              <a:buNone/>
               <a:defRPr sz="3300" b="1">
                 <a:solidFill>
                   <a:srgbClr val="20322B"/>
@@ -4335,6 +4435,7 @@
               </a:defRPr>
             </a:lvl5pPr>
             <a:lvl6pPr>
+              <a:buNone/>
               <a:defRPr sz="3300" b="1">
                 <a:solidFill>
                   <a:srgbClr val="20322B"/>
@@ -4345,6 +4446,7 @@
               </a:defRPr>
             </a:lvl6pPr>
             <a:lvl7pPr>
+              <a:buNone/>
               <a:defRPr sz="3300" b="1">
                 <a:solidFill>
                   <a:srgbClr val="20322B"/>
@@ -4355,6 +4457,7 @@
               </a:defRPr>
             </a:lvl7pPr>
             <a:lvl8pPr>
+              <a:buNone/>
               <a:defRPr sz="3300" b="1">
                 <a:solidFill>
                   <a:srgbClr val="20322B"/>
@@ -4365,6 +4468,7 @@
               </a:defRPr>
             </a:lvl8pPr>
             <a:lvl9pPr>
+              <a:buNone/>
               <a:defRPr sz="3300" b="1">
                 <a:solidFill>
                   <a:srgbClr val="20322B"/>
@@ -4377,6 +4481,7 @@
           </a:lstStyle>
           <a:p xmlns:a="http://schemas.openxmlformats.org/drawingml/2006/main">
             <a:pPr>
+              <a:buNone/>
               <a:defRPr sz="3300" b="1">
                 <a:solidFill>
                   <a:srgbClr val="20322B"/>
@@ -4443,6 +4548,7 @@
               </a:defRPr>
             </a:defPPr>
             <a:lvl1pPr>
+              <a:buNone/>
               <a:defRPr sz="2250" b="0">
                 <a:solidFill>
                   <a:srgbClr val="20322B"/>
@@ -4453,6 +4559,7 @@
               </a:defRPr>
             </a:lvl1pPr>
             <a:lvl2pPr>
+              <a:buNone/>
               <a:defRPr sz="2250" b="0">
                 <a:solidFill>
                   <a:srgbClr val="20322B"/>
@@ -4463,6 +4570,7 @@
               </a:defRPr>
             </a:lvl2pPr>
             <a:lvl3pPr>
+              <a:buNone/>
               <a:defRPr sz="2250" b="0">
                 <a:solidFill>
                   <a:srgbClr val="20322B"/>
@@ -4473,6 +4581,7 @@
               </a:defRPr>
             </a:lvl3pPr>
             <a:lvl4pPr>
+              <a:buNone/>
               <a:defRPr sz="2250" b="0">
                 <a:solidFill>
                   <a:srgbClr val="20322B"/>
@@ -4483,6 +4592,7 @@
               </a:defRPr>
             </a:lvl4pPr>
             <a:lvl5pPr>
+              <a:buNone/>
               <a:defRPr sz="2250" b="0">
                 <a:solidFill>
                   <a:srgbClr val="20322B"/>
@@ -4493,6 +4603,7 @@
               </a:defRPr>
             </a:lvl5pPr>
             <a:lvl6pPr>
+              <a:buNone/>
               <a:defRPr sz="2250" b="0">
                 <a:solidFill>
                   <a:srgbClr val="20322B"/>
@@ -4503,6 +4614,7 @@
               </a:defRPr>
             </a:lvl6pPr>
             <a:lvl7pPr>
+              <a:buNone/>
               <a:defRPr sz="2250" b="0">
                 <a:solidFill>
                   <a:srgbClr val="20322B"/>
@@ -4513,6 +4625,7 @@
               </a:defRPr>
             </a:lvl7pPr>
             <a:lvl8pPr>
+              <a:buNone/>
               <a:defRPr sz="2250" b="0">
                 <a:solidFill>
                   <a:srgbClr val="20322B"/>
@@ -4523,6 +4636,7 @@
               </a:defRPr>
             </a:lvl8pPr>
             <a:lvl9pPr>
+              <a:buNone/>
               <a:defRPr sz="2250" b="0">
                 <a:solidFill>
                   <a:srgbClr val="20322B"/>
@@ -4535,6 +4649,7 @@
           </a:lstStyle>
           <a:p xmlns:a="http://schemas.openxmlformats.org/drawingml/2006/main">
             <a:pPr>
+              <a:buNone/>
               <a:defRPr sz="2250" b="0">
                 <a:solidFill>
                   <a:srgbClr val="20322B"/>
@@ -4601,6 +4716,7 @@
               </a:defRPr>
             </a:defPPr>
             <a:lvl1pPr>
+              <a:buNone/>
               <a:defRPr sz="1800" b="1">
                 <a:solidFill>
                   <a:srgbClr val="28634E"/>
@@ -4611,6 +4727,7 @@
               </a:defRPr>
             </a:lvl1pPr>
             <a:lvl2pPr>
+              <a:buNone/>
               <a:defRPr sz="1800" b="1">
                 <a:solidFill>
                   <a:srgbClr val="28634E"/>
@@ -4621,6 +4738,7 @@
               </a:defRPr>
             </a:lvl2pPr>
             <a:lvl3pPr>
+              <a:buNone/>
               <a:defRPr sz="1800" b="1">
                 <a:solidFill>
                   <a:srgbClr val="28634E"/>
@@ -4631,6 +4749,7 @@
               </a:defRPr>
             </a:lvl3pPr>
             <a:lvl4pPr>
+              <a:buNone/>
               <a:defRPr sz="1800" b="1">
                 <a:solidFill>
                   <a:srgbClr val="28634E"/>
@@ -4641,6 +4760,7 @@
               </a:defRPr>
             </a:lvl4pPr>
             <a:lvl5pPr>
+              <a:buNone/>
               <a:defRPr sz="1800" b="1">
                 <a:solidFill>
                   <a:srgbClr val="28634E"/>
@@ -4651,6 +4771,7 @@
               </a:defRPr>
             </a:lvl5pPr>
             <a:lvl6pPr>
+              <a:buNone/>
               <a:defRPr sz="1800" b="1">
                 <a:solidFill>
                   <a:srgbClr val="28634E"/>
@@ -4661,6 +4782,7 @@
               </a:defRPr>
             </a:lvl6pPr>
             <a:lvl7pPr>
+              <a:buNone/>
               <a:defRPr sz="1800" b="1">
                 <a:solidFill>
                   <a:srgbClr val="28634E"/>
@@ -4671,6 +4793,7 @@
               </a:defRPr>
             </a:lvl7pPr>
             <a:lvl8pPr>
+              <a:buNone/>
               <a:defRPr sz="1800" b="1">
                 <a:solidFill>
                   <a:srgbClr val="28634E"/>
@@ -4681,6 +4804,7 @@
               </a:defRPr>
             </a:lvl8pPr>
             <a:lvl9pPr>
+              <a:buNone/>
               <a:defRPr sz="1800" b="1">
                 <a:solidFill>
                   <a:srgbClr val="28634E"/>
@@ -4693,6 +4817,7 @@
           </a:lstStyle>
           <a:p xmlns:a="http://schemas.openxmlformats.org/drawingml/2006/main">
             <a:pPr>
+              <a:buNone/>
               <a:defRPr sz="1800" b="1">
                 <a:solidFill>
                   <a:srgbClr val="28634E"/>
@@ -4759,6 +4884,7 @@
               </a:defRPr>
             </a:defPPr>
             <a:lvl1pPr>
+              <a:buNone/>
               <a:defRPr sz="1800" b="0">
                 <a:solidFill>
                   <a:srgbClr val="58635E"/>
@@ -4769,6 +4895,7 @@
               </a:defRPr>
             </a:lvl1pPr>
             <a:lvl2pPr>
+              <a:buNone/>
               <a:defRPr sz="1800" b="0">
                 <a:solidFill>
                   <a:srgbClr val="58635E"/>
@@ -4779,6 +4906,7 @@
               </a:defRPr>
             </a:lvl2pPr>
             <a:lvl3pPr>
+              <a:buNone/>
               <a:defRPr sz="1800" b="0">
                 <a:solidFill>
                   <a:srgbClr val="58635E"/>
@@ -4789,6 +4917,7 @@
               </a:defRPr>
             </a:lvl3pPr>
             <a:lvl4pPr>
+              <a:buNone/>
               <a:defRPr sz="1800" b="0">
                 <a:solidFill>
                   <a:srgbClr val="58635E"/>
@@ -4799,6 +4928,7 @@
               </a:defRPr>
             </a:lvl4pPr>
             <a:lvl5pPr>
+              <a:buNone/>
               <a:defRPr sz="1800" b="0">
                 <a:solidFill>
                   <a:srgbClr val="58635E"/>
@@ -4809,6 +4939,7 @@
               </a:defRPr>
             </a:lvl5pPr>
             <a:lvl6pPr>
+              <a:buNone/>
               <a:defRPr sz="1800" b="0">
                 <a:solidFill>
                   <a:srgbClr val="58635E"/>
@@ -4819,6 +4950,7 @@
               </a:defRPr>
             </a:lvl6pPr>
             <a:lvl7pPr>
+              <a:buNone/>
               <a:defRPr sz="1800" b="0">
                 <a:solidFill>
                   <a:srgbClr val="58635E"/>
@@ -4829,6 +4961,7 @@
               </a:defRPr>
             </a:lvl7pPr>
             <a:lvl8pPr>
+              <a:buNone/>
               <a:defRPr sz="1800" b="0">
                 <a:solidFill>
                   <a:srgbClr val="58635E"/>
@@ -4839,6 +4972,7 @@
               </a:defRPr>
             </a:lvl8pPr>
             <a:lvl9pPr>
+              <a:buNone/>
               <a:defRPr sz="1800" b="0">
                 <a:solidFill>
                   <a:srgbClr val="58635E"/>
@@ -4851,6 +4985,7 @@
           </a:lstStyle>
           <a:p xmlns:a="http://schemas.openxmlformats.org/drawingml/2006/main">
             <a:pPr>
+              <a:buNone/>
               <a:defRPr sz="1800" b="0">
                 <a:solidFill>
                   <a:srgbClr val="58635E"/>
@@ -4917,6 +5052,7 @@
               </a:defRPr>
             </a:defPPr>
             <a:lvl1pPr>
+              <a:buNone/>
               <a:defRPr sz="1500" b="0">
                 <a:solidFill>
                   <a:srgbClr val="58635E"/>
@@ -4927,6 +5063,7 @@
               </a:defRPr>
             </a:lvl1pPr>
             <a:lvl2pPr>
+              <a:buNone/>
               <a:defRPr sz="1500" b="0">
                 <a:solidFill>
                   <a:srgbClr val="58635E"/>
@@ -4937,6 +5074,7 @@
               </a:defRPr>
             </a:lvl2pPr>
             <a:lvl3pPr>
+              <a:buNone/>
               <a:defRPr sz="1500" b="0">
                 <a:solidFill>
                   <a:srgbClr val="58635E"/>
@@ -4947,6 +5085,7 @@
               </a:defRPr>
             </a:lvl3pPr>
             <a:lvl4pPr>
+              <a:buNone/>
               <a:defRPr sz="1500" b="0">
                 <a:solidFill>
                   <a:srgbClr val="58635E"/>
@@ -4957,6 +5096,7 @@
               </a:defRPr>
             </a:lvl4pPr>
             <a:lvl5pPr>
+              <a:buNone/>
               <a:defRPr sz="1500" b="0">
                 <a:solidFill>
                   <a:srgbClr val="58635E"/>
@@ -4967,6 +5107,7 @@
               </a:defRPr>
             </a:lvl5pPr>
             <a:lvl6pPr>
+              <a:buNone/>
               <a:defRPr sz="1500" b="0">
                 <a:solidFill>
                   <a:srgbClr val="58635E"/>
@@ -4977,6 +5118,7 @@
               </a:defRPr>
             </a:lvl6pPr>
             <a:lvl7pPr>
+              <a:buNone/>
               <a:defRPr sz="1500" b="0">
                 <a:solidFill>
                   <a:srgbClr val="58635E"/>
@@ -4987,6 +5129,7 @@
               </a:defRPr>
             </a:lvl7pPr>
             <a:lvl8pPr>
+              <a:buNone/>
               <a:defRPr sz="1500" b="0">
                 <a:solidFill>
                   <a:srgbClr val="58635E"/>
@@ -4997,6 +5140,7 @@
               </a:defRPr>
             </a:lvl8pPr>
             <a:lvl9pPr>
+              <a:buNone/>
               <a:defRPr sz="1500" b="0">
                 <a:solidFill>
                   <a:srgbClr val="58635E"/>
@@ -5009,6 +5153,7 @@
           </a:lstStyle>
           <a:p xmlns:a="http://schemas.openxmlformats.org/drawingml/2006/main">
             <a:pPr>
+              <a:buNone/>
               <a:defRPr sz="1500" b="0">
                 <a:solidFill>
                   <a:srgbClr val="58635E"/>
@@ -5027,7 +5172,7 @@
                 <a:ea typeface="Arial"/>
                 <a:cs typeface="Arial"/>
               </a:rPr>
-              <a:t>18 October 2026</a:t>
+              <a:t>19 October 2026</a:t>
             </a:r>
           </a:p>
         </p:txBody>
@@ -5037,7 +5182,7 @@
           <p:cNvPr id="8" name="">
             <a:extLst xmlns:a="http://schemas.openxmlformats.org/drawingml/2006/main">
               <a:ext uri="{FF2B5EF4-FFF2-40B4-BE49-F238E27FC236}">
-                <a16:creationId xmlns:a16="http://schemas.microsoft.com/office/drawing/2014/main" id="{9F407AE7-837B-4851-9083-0EA997335D79}"/>
+                <a16:creationId xmlns:a16="http://schemas.microsoft.com/office/drawing/2014/main" id="{A6722693-B7AB-4255-B01A-BA59BFF79CDA}"/>
               </a:ext>
             </a:extLst>
           </p:cNvPr>
@@ -5047,7 +5192,7 @@
           <p:nvPr/>
         </p:nvPicPr>
         <p:blipFill>
-          <a:blip xmlns:r="http://schemas.openxmlformats.org/officeDocument/2006/relationships" xmlns:a="http://schemas.openxmlformats.org/drawingml/2006/main" r:embed="R1a4b5be03bd0404a"/>
+          <a:blip xmlns:r="http://schemas.openxmlformats.org/officeDocument/2006/relationships" xmlns:a="http://schemas.openxmlformats.org/drawingml/2006/main" r:embed="R42c67f4cbd3d4bd8"/>
           <a:stretch xmlns:a="http://schemas.openxmlformats.org/drawingml/2006/main"/>
         </p:blipFill>
         <p:spPr>
@@ -5103,6 +5248,7 @@
               </a:defRPr>
             </a:defPPr>
             <a:lvl1pPr>
+              <a:buNone/>
               <a:defRPr sz="1425" b="0">
                 <a:solidFill>
                   <a:srgbClr val="58635E"/>
@@ -5113,6 +5259,7 @@
               </a:defRPr>
             </a:lvl1pPr>
             <a:lvl2pPr>
+              <a:buNone/>
               <a:defRPr sz="1425" b="0">
                 <a:solidFill>
                   <a:srgbClr val="58635E"/>
@@ -5123,6 +5270,7 @@
               </a:defRPr>
             </a:lvl2pPr>
             <a:lvl3pPr>
+              <a:buNone/>
               <a:defRPr sz="1425" b="0">
                 <a:solidFill>
                   <a:srgbClr val="58635E"/>
@@ -5133,6 +5281,7 @@
               </a:defRPr>
             </a:lvl3pPr>
             <a:lvl4pPr>
+              <a:buNone/>
               <a:defRPr sz="1425" b="0">
                 <a:solidFill>
                   <a:srgbClr val="58635E"/>
@@ -5143,6 +5292,7 @@
               </a:defRPr>
             </a:lvl4pPr>
             <a:lvl5pPr>
+              <a:buNone/>
               <a:defRPr sz="1425" b="0">
                 <a:solidFill>
                   <a:srgbClr val="58635E"/>
@@ -5153,6 +5303,7 @@
               </a:defRPr>
             </a:lvl5pPr>
             <a:lvl6pPr>
+              <a:buNone/>
               <a:defRPr sz="1425" b="0">
                 <a:solidFill>
                   <a:srgbClr val="58635E"/>
@@ -5163,6 +5314,7 @@
               </a:defRPr>
             </a:lvl6pPr>
             <a:lvl7pPr>
+              <a:buNone/>
               <a:defRPr sz="1425" b="0">
                 <a:solidFill>
                   <a:srgbClr val="58635E"/>
@@ -5173,6 +5325,7 @@
               </a:defRPr>
             </a:lvl7pPr>
             <a:lvl8pPr>
+              <a:buNone/>
               <a:defRPr sz="1425" b="0">
                 <a:solidFill>
                   <a:srgbClr val="58635E"/>
@@ -5183,6 +5336,7 @@
               </a:defRPr>
             </a:lvl8pPr>
             <a:lvl9pPr>
+              <a:buNone/>
               <a:defRPr sz="1425" b="0">
                 <a:solidFill>
                   <a:srgbClr val="58635E"/>
@@ -5195,6 +5349,7 @@
           </a:lstStyle>
           <a:p xmlns:a="http://schemas.openxmlformats.org/drawingml/2006/main">
             <a:pPr>
+              <a:buNone/>
               <a:defRPr sz="1425" b="0">
                 <a:solidFill>
                   <a:srgbClr val="58635E"/>
@@ -5213,7 +5368,7 @@
                 <a:ea typeface="Arial"/>
                 <a:cs typeface="Arial"/>
               </a:rPr>
-              <a:t>Local prototype. Demonstration inventory.</a:t>
+              <a:t>Demo inventory. Features frozen for user tests.</a:t>
             </a:r>
           </a:p>
         </p:txBody>
@@ -5261,6 +5416,7 @@
               </a:defRPr>
             </a:defPPr>
             <a:lvl1pPr>
+              <a:buNone/>
               <a:defRPr sz="1350" b="0">
                 <a:solidFill>
                   <a:srgbClr val="58635E"/>
@@ -5271,6 +5427,7 @@
               </a:defRPr>
             </a:lvl1pPr>
             <a:lvl2pPr>
+              <a:buNone/>
               <a:defRPr sz="1350" b="0">
                 <a:solidFill>
                   <a:srgbClr val="58635E"/>
@@ -5281,6 +5438,7 @@
               </a:defRPr>
             </a:lvl2pPr>
             <a:lvl3pPr>
+              <a:buNone/>
               <a:defRPr sz="1350" b="0">
                 <a:solidFill>
                   <a:srgbClr val="58635E"/>
@@ -5291,6 +5449,7 @@
               </a:defRPr>
             </a:lvl3pPr>
             <a:lvl4pPr>
+              <a:buNone/>
               <a:defRPr sz="1350" b="0">
                 <a:solidFill>
                   <a:srgbClr val="58635E"/>
@@ -5301,6 +5460,7 @@
               </a:defRPr>
             </a:lvl4pPr>
             <a:lvl5pPr>
+              <a:buNone/>
               <a:defRPr sz="1350" b="0">
                 <a:solidFill>
                   <a:srgbClr val="58635E"/>
@@ -5311,6 +5471,7 @@
               </a:defRPr>
             </a:lvl5pPr>
             <a:lvl6pPr>
+              <a:buNone/>
               <a:defRPr sz="1350" b="0">
                 <a:solidFill>
                   <a:srgbClr val="58635E"/>
@@ -5321,6 +5482,7 @@
               </a:defRPr>
             </a:lvl6pPr>
             <a:lvl7pPr>
+              <a:buNone/>
               <a:defRPr sz="1350" b="0">
                 <a:solidFill>
                   <a:srgbClr val="58635E"/>
@@ -5331,6 +5493,7 @@
               </a:defRPr>
             </a:lvl7pPr>
             <a:lvl8pPr>
+              <a:buNone/>
               <a:defRPr sz="1350" b="0">
                 <a:solidFill>
                   <a:srgbClr val="58635E"/>
@@ -5341,6 +5504,7 @@
               </a:defRPr>
             </a:lvl8pPr>
             <a:lvl9pPr>
+              <a:buNone/>
               <a:defRPr sz="1350" b="0">
                 <a:solidFill>
                   <a:srgbClr val="58635E"/>
@@ -5353,6 +5517,7 @@
           </a:lstStyle>
           <a:p xmlns:a="http://schemas.openxmlformats.org/drawingml/2006/main">
             <a:pPr>
+              <a:buNone/>
               <a:defRPr sz="1350" b="0">
                 <a:solidFill>
                   <a:srgbClr val="58635E"/>
@@ -5448,6 +5613,7 @@
               </a:defRPr>
             </a:defPPr>
             <a:lvl1pPr>
+              <a:buNone/>
               <a:defRPr sz="1500" b="1">
                 <a:solidFill>
                   <a:srgbClr val="28634E"/>
@@ -5458,6 +5624,7 @@
               </a:defRPr>
             </a:lvl1pPr>
             <a:lvl2pPr>
+              <a:buNone/>
               <a:defRPr sz="1500" b="1">
                 <a:solidFill>
                   <a:srgbClr val="28634E"/>
@@ -5468,6 +5635,7 @@
               </a:defRPr>
             </a:lvl2pPr>
             <a:lvl3pPr>
+              <a:buNone/>
               <a:defRPr sz="1500" b="1">
                 <a:solidFill>
                   <a:srgbClr val="28634E"/>
@@ -5478,6 +5646,7 @@
               </a:defRPr>
             </a:lvl3pPr>
             <a:lvl4pPr>
+              <a:buNone/>
               <a:defRPr sz="1500" b="1">
                 <a:solidFill>
                   <a:srgbClr val="28634E"/>
@@ -5488,6 +5657,7 @@
               </a:defRPr>
             </a:lvl4pPr>
             <a:lvl5pPr>
+              <a:buNone/>
               <a:defRPr sz="1500" b="1">
                 <a:solidFill>
                   <a:srgbClr val="28634E"/>
@@ -5498,6 +5668,7 @@
               </a:defRPr>
             </a:lvl5pPr>
             <a:lvl6pPr>
+              <a:buNone/>
               <a:defRPr sz="1500" b="1">
                 <a:solidFill>
                   <a:srgbClr val="28634E"/>
@@ -5508,6 +5679,7 @@
               </a:defRPr>
             </a:lvl6pPr>
             <a:lvl7pPr>
+              <a:buNone/>
               <a:defRPr sz="1500" b="1">
                 <a:solidFill>
                   <a:srgbClr val="28634E"/>
@@ -5518,6 +5690,7 @@
               </a:defRPr>
             </a:lvl7pPr>
             <a:lvl8pPr>
+              <a:buNone/>
               <a:defRPr sz="1500" b="1">
                 <a:solidFill>
                   <a:srgbClr val="28634E"/>
@@ -5528,6 +5701,7 @@
               </a:defRPr>
             </a:lvl8pPr>
             <a:lvl9pPr>
+              <a:buNone/>
               <a:defRPr sz="1500" b="1">
                 <a:solidFill>
                   <a:srgbClr val="28634E"/>
@@ -5540,6 +5714,7 @@
           </a:lstStyle>
           <a:p xmlns:a="http://schemas.openxmlformats.org/drawingml/2006/main">
             <a:pPr>
+              <a:buNone/>
               <a:defRPr sz="1500" b="1">
                 <a:solidFill>
                   <a:srgbClr val="28634E"/>
@@ -5606,6 +5781,7 @@
               </a:defRPr>
             </a:defPPr>
             <a:lvl1pPr>
+              <a:buNone/>
               <a:defRPr sz="3450" b="1">
                 <a:solidFill>
                   <a:srgbClr val="20322B"/>
@@ -5616,6 +5792,7 @@
               </a:defRPr>
             </a:lvl1pPr>
             <a:lvl2pPr>
+              <a:buNone/>
               <a:defRPr sz="3450" b="1">
                 <a:solidFill>
                   <a:srgbClr val="20322B"/>
@@ -5626,6 +5803,7 @@
               </a:defRPr>
             </a:lvl2pPr>
             <a:lvl3pPr>
+              <a:buNone/>
               <a:defRPr sz="3450" b="1">
                 <a:solidFill>
                   <a:srgbClr val="20322B"/>
@@ -5636,6 +5814,7 @@
               </a:defRPr>
             </a:lvl3pPr>
             <a:lvl4pPr>
+              <a:buNone/>
               <a:defRPr sz="3450" b="1">
                 <a:solidFill>
                   <a:srgbClr val="20322B"/>
@@ -5646,6 +5825,7 @@
               </a:defRPr>
             </a:lvl4pPr>
             <a:lvl5pPr>
+              <a:buNone/>
               <a:defRPr sz="3450" b="1">
                 <a:solidFill>
                   <a:srgbClr val="20322B"/>
@@ -5656,6 +5836,7 @@
               </a:defRPr>
             </a:lvl5pPr>
             <a:lvl6pPr>
+              <a:buNone/>
               <a:defRPr sz="3450" b="1">
                 <a:solidFill>
                   <a:srgbClr val="20322B"/>
@@ -5666,6 +5847,7 @@
               </a:defRPr>
             </a:lvl6pPr>
             <a:lvl7pPr>
+              <a:buNone/>
               <a:defRPr sz="3450" b="1">
                 <a:solidFill>
                   <a:srgbClr val="20322B"/>
@@ -5676,6 +5858,7 @@
               </a:defRPr>
             </a:lvl7pPr>
             <a:lvl8pPr>
+              <a:buNone/>
               <a:defRPr sz="3450" b="1">
                 <a:solidFill>
                   <a:srgbClr val="20322B"/>
@@ -5686,6 +5869,7 @@
               </a:defRPr>
             </a:lvl8pPr>
             <a:lvl9pPr>
+              <a:buNone/>
               <a:defRPr sz="3450" b="1">
                 <a:solidFill>
                   <a:srgbClr val="20322B"/>
@@ -5698,6 +5882,7 @@
           </a:lstStyle>
           <a:p xmlns:a="http://schemas.openxmlformats.org/drawingml/2006/main">
             <a:pPr>
+              <a:buNone/>
               <a:defRPr sz="3450" b="1">
                 <a:solidFill>
                   <a:srgbClr val="20322B"/>
@@ -5764,6 +5949,7 @@
               </a:defRPr>
             </a:defPPr>
             <a:lvl1pPr>
+              <a:buNone/>
               <a:defRPr sz="1350" b="0">
                 <a:solidFill>
                   <a:srgbClr val="58635E"/>
@@ -5774,6 +5960,7 @@
               </a:defRPr>
             </a:lvl1pPr>
             <a:lvl2pPr>
+              <a:buNone/>
               <a:defRPr sz="1350" b="0">
                 <a:solidFill>
                   <a:srgbClr val="58635E"/>
@@ -5784,6 +5971,7 @@
               </a:defRPr>
             </a:lvl2pPr>
             <a:lvl3pPr>
+              <a:buNone/>
               <a:defRPr sz="1350" b="0">
                 <a:solidFill>
                   <a:srgbClr val="58635E"/>
@@ -5794,6 +5982,7 @@
               </a:defRPr>
             </a:lvl3pPr>
             <a:lvl4pPr>
+              <a:buNone/>
               <a:defRPr sz="1350" b="0">
                 <a:solidFill>
                   <a:srgbClr val="58635E"/>
@@ -5804,6 +5993,7 @@
               </a:defRPr>
             </a:lvl4pPr>
             <a:lvl5pPr>
+              <a:buNone/>
               <a:defRPr sz="1350" b="0">
                 <a:solidFill>
                   <a:srgbClr val="58635E"/>
@@ -5814,6 +6004,7 @@
               </a:defRPr>
             </a:lvl5pPr>
             <a:lvl6pPr>
+              <a:buNone/>
               <a:defRPr sz="1350" b="0">
                 <a:solidFill>
                   <a:srgbClr val="58635E"/>
@@ -5824,6 +6015,7 @@
               </a:defRPr>
             </a:lvl6pPr>
             <a:lvl7pPr>
+              <a:buNone/>
               <a:defRPr sz="1350" b="0">
                 <a:solidFill>
                   <a:srgbClr val="58635E"/>
@@ -5834,6 +6026,7 @@
               </a:defRPr>
             </a:lvl7pPr>
             <a:lvl8pPr>
+              <a:buNone/>
               <a:defRPr sz="1350" b="0">
                 <a:solidFill>
                   <a:srgbClr val="58635E"/>
@@ -5844,6 +6037,7 @@
               </a:defRPr>
             </a:lvl8pPr>
             <a:lvl9pPr>
+              <a:buNone/>
               <a:defRPr sz="1350" b="0">
                 <a:solidFill>
                   <a:srgbClr val="58635E"/>
@@ -5856,6 +6050,7 @@
           </a:lstStyle>
           <a:p xmlns:a="http://schemas.openxmlformats.org/drawingml/2006/main">
             <a:pPr>
+              <a:buNone/>
               <a:defRPr sz="1350" b="0">
                 <a:solidFill>
                   <a:srgbClr val="58635E"/>
@@ -5922,6 +6117,7 @@
               </a:defRPr>
             </a:defPPr>
             <a:lvl1pPr>
+              <a:buNone/>
               <a:defRPr sz="2175" b="1">
                 <a:solidFill>
                   <a:srgbClr val="20322B"/>
@@ -5932,6 +6128,7 @@
               </a:defRPr>
             </a:lvl1pPr>
             <a:lvl2pPr>
+              <a:buNone/>
               <a:defRPr sz="2175" b="1">
                 <a:solidFill>
                   <a:srgbClr val="20322B"/>
@@ -5942,6 +6139,7 @@
               </a:defRPr>
             </a:lvl2pPr>
             <a:lvl3pPr>
+              <a:buNone/>
               <a:defRPr sz="2175" b="1">
                 <a:solidFill>
                   <a:srgbClr val="20322B"/>
@@ -5952,6 +6150,7 @@
               </a:defRPr>
             </a:lvl3pPr>
             <a:lvl4pPr>
+              <a:buNone/>
               <a:defRPr sz="2175" b="1">
                 <a:solidFill>
                   <a:srgbClr val="20322B"/>
@@ -5962,6 +6161,7 @@
               </a:defRPr>
             </a:lvl4pPr>
             <a:lvl5pPr>
+              <a:buNone/>
               <a:defRPr sz="2175" b="1">
                 <a:solidFill>
                   <a:srgbClr val="20322B"/>
@@ -5972,6 +6172,7 @@
               </a:defRPr>
             </a:lvl5pPr>
             <a:lvl6pPr>
+              <a:buNone/>
               <a:defRPr sz="2175" b="1">
                 <a:solidFill>
                   <a:srgbClr val="20322B"/>
@@ -5982,6 +6183,7 @@
               </a:defRPr>
             </a:lvl6pPr>
             <a:lvl7pPr>
+              <a:buNone/>
               <a:defRPr sz="2175" b="1">
                 <a:solidFill>
                   <a:srgbClr val="20322B"/>
@@ -5992,6 +6194,7 @@
               </a:defRPr>
             </a:lvl7pPr>
             <a:lvl8pPr>
+              <a:buNone/>
               <a:defRPr sz="2175" b="1">
                 <a:solidFill>
                   <a:srgbClr val="20322B"/>
@@ -6002,6 +6205,7 @@
               </a:defRPr>
             </a:lvl8pPr>
             <a:lvl9pPr>
+              <a:buNone/>
               <a:defRPr sz="2175" b="1">
                 <a:solidFill>
                   <a:srgbClr val="20322B"/>
@@ -6014,6 +6218,7 @@
           </a:lstStyle>
           <a:p xmlns:a="http://schemas.openxmlformats.org/drawingml/2006/main">
             <a:pPr>
+              <a:buNone/>
               <a:defRPr sz="2175" b="1">
                 <a:solidFill>
                   <a:srgbClr val="20322B"/>
@@ -6080,6 +6285,7 @@
               </a:defRPr>
             </a:defPPr>
             <a:lvl1pPr>
+              <a:buNone/>
               <a:defRPr sz="1875" b="0">
                 <a:solidFill>
                   <a:srgbClr val="20322B"/>
@@ -6090,6 +6296,7 @@
               </a:defRPr>
             </a:lvl1pPr>
             <a:lvl2pPr>
+              <a:buNone/>
               <a:defRPr sz="1875" b="0">
                 <a:solidFill>
                   <a:srgbClr val="20322B"/>
@@ -6100,6 +6307,7 @@
               </a:defRPr>
             </a:lvl2pPr>
             <a:lvl3pPr>
+              <a:buNone/>
               <a:defRPr sz="1875" b="0">
                 <a:solidFill>
                   <a:srgbClr val="20322B"/>
@@ -6110,6 +6318,7 @@
               </a:defRPr>
             </a:lvl3pPr>
             <a:lvl4pPr>
+              <a:buNone/>
               <a:defRPr sz="1875" b="0">
                 <a:solidFill>
                   <a:srgbClr val="20322B"/>
@@ -6120,6 +6329,7 @@
               </a:defRPr>
             </a:lvl4pPr>
             <a:lvl5pPr>
+              <a:buNone/>
               <a:defRPr sz="1875" b="0">
                 <a:solidFill>
                   <a:srgbClr val="20322B"/>
@@ -6130,6 +6340,7 @@
               </a:defRPr>
             </a:lvl5pPr>
             <a:lvl6pPr>
+              <a:buNone/>
               <a:defRPr sz="1875" b="0">
                 <a:solidFill>
                   <a:srgbClr val="20322B"/>
@@ -6140,6 +6351,7 @@
               </a:defRPr>
             </a:lvl6pPr>
             <a:lvl7pPr>
+              <a:buNone/>
               <a:defRPr sz="1875" b="0">
                 <a:solidFill>
                   <a:srgbClr val="20322B"/>
@@ -6150,6 +6362,7 @@
               </a:defRPr>
             </a:lvl7pPr>
             <a:lvl8pPr>
+              <a:buNone/>
               <a:defRPr sz="1875" b="0">
                 <a:solidFill>
                   <a:srgbClr val="20322B"/>
@@ -6160,6 +6373,7 @@
               </a:defRPr>
             </a:lvl8pPr>
             <a:lvl9pPr>
+              <a:buNone/>
               <a:defRPr sz="1875" b="0">
                 <a:solidFill>
                   <a:srgbClr val="20322B"/>
@@ -6172,6 +6386,7 @@
           </a:lstStyle>
           <a:p xmlns:a="http://schemas.openxmlformats.org/drawingml/2006/main">
             <a:pPr>
+              <a:buNone/>
               <a:defRPr sz="1875" b="0">
                 <a:solidFill>
                   <a:srgbClr val="20322B"/>
@@ -6238,6 +6453,7 @@
               </a:defRPr>
             </a:defPPr>
             <a:lvl1pPr>
+              <a:buNone/>
               <a:defRPr sz="1350" b="0">
                 <a:solidFill>
                   <a:srgbClr val="58635E"/>
@@ -6248,6 +6464,7 @@
               </a:defRPr>
             </a:lvl1pPr>
             <a:lvl2pPr>
+              <a:buNone/>
               <a:defRPr sz="1350" b="0">
                 <a:solidFill>
                   <a:srgbClr val="58635E"/>
@@ -6258,6 +6475,7 @@
               </a:defRPr>
             </a:lvl2pPr>
             <a:lvl3pPr>
+              <a:buNone/>
               <a:defRPr sz="1350" b="0">
                 <a:solidFill>
                   <a:srgbClr val="58635E"/>
@@ -6268,6 +6486,7 @@
               </a:defRPr>
             </a:lvl3pPr>
             <a:lvl4pPr>
+              <a:buNone/>
               <a:defRPr sz="1350" b="0">
                 <a:solidFill>
                   <a:srgbClr val="58635E"/>
@@ -6278,6 +6497,7 @@
               </a:defRPr>
             </a:lvl4pPr>
             <a:lvl5pPr>
+              <a:buNone/>
               <a:defRPr sz="1350" b="0">
                 <a:solidFill>
                   <a:srgbClr val="58635E"/>
@@ -6288,6 +6508,7 @@
               </a:defRPr>
             </a:lvl5pPr>
             <a:lvl6pPr>
+              <a:buNone/>
               <a:defRPr sz="1350" b="0">
                 <a:solidFill>
                   <a:srgbClr val="58635E"/>
@@ -6298,6 +6519,7 @@
               </a:defRPr>
             </a:lvl6pPr>
             <a:lvl7pPr>
+              <a:buNone/>
               <a:defRPr sz="1350" b="0">
                 <a:solidFill>
                   <a:srgbClr val="58635E"/>
@@ -6308,6 +6530,7 @@
               </a:defRPr>
             </a:lvl7pPr>
             <a:lvl8pPr>
+              <a:buNone/>
               <a:defRPr sz="1350" b="0">
                 <a:solidFill>
                   <a:srgbClr val="58635E"/>
@@ -6318,6 +6541,7 @@
               </a:defRPr>
             </a:lvl8pPr>
             <a:lvl9pPr>
+              <a:buNone/>
               <a:defRPr sz="1350" b="0">
                 <a:solidFill>
                   <a:srgbClr val="58635E"/>
@@ -6330,6 +6554,7 @@
           </a:lstStyle>
           <a:p xmlns:a="http://schemas.openxmlformats.org/drawingml/2006/main">
             <a:pPr>
+              <a:buNone/>
               <a:defRPr sz="1350" b="0">
                 <a:solidFill>
                   <a:srgbClr val="58635E"/>
@@ -6396,6 +6621,7 @@
               </a:defRPr>
             </a:defPPr>
             <a:lvl1pPr>
+              <a:buNone/>
               <a:defRPr sz="2175" b="1">
                 <a:solidFill>
                   <a:srgbClr val="20322B"/>
@@ -6406,6 +6632,7 @@
               </a:defRPr>
             </a:lvl1pPr>
             <a:lvl2pPr>
+              <a:buNone/>
               <a:defRPr sz="2175" b="1">
                 <a:solidFill>
                   <a:srgbClr val="20322B"/>
@@ -6416,6 +6643,7 @@
               </a:defRPr>
             </a:lvl2pPr>
             <a:lvl3pPr>
+              <a:buNone/>
               <a:defRPr sz="2175" b="1">
                 <a:solidFill>
                   <a:srgbClr val="20322B"/>
@@ -6426,6 +6654,7 @@
               </a:defRPr>
             </a:lvl3pPr>
             <a:lvl4pPr>
+              <a:buNone/>
               <a:defRPr sz="2175" b="1">
                 <a:solidFill>
                   <a:srgbClr val="20322B"/>
@@ -6436,6 +6665,7 @@
               </a:defRPr>
             </a:lvl4pPr>
             <a:lvl5pPr>
+              <a:buNone/>
               <a:defRPr sz="2175" b="1">
                 <a:solidFill>
                   <a:srgbClr val="20322B"/>
@@ -6446,6 +6676,7 @@
               </a:defRPr>
             </a:lvl5pPr>
             <a:lvl6pPr>
+              <a:buNone/>
               <a:defRPr sz="2175" b="1">
                 <a:solidFill>
                   <a:srgbClr val="20322B"/>
@@ -6456,6 +6687,7 @@
               </a:defRPr>
             </a:lvl6pPr>
             <a:lvl7pPr>
+              <a:buNone/>
               <a:defRPr sz="2175" b="1">
                 <a:solidFill>
                   <a:srgbClr val="20322B"/>
@@ -6466,6 +6698,7 @@
               </a:defRPr>
             </a:lvl7pPr>
             <a:lvl8pPr>
+              <a:buNone/>
               <a:defRPr sz="2175" b="1">
                 <a:solidFill>
                   <a:srgbClr val="20322B"/>
@@ -6476,6 +6709,7 @@
               </a:defRPr>
             </a:lvl8pPr>
             <a:lvl9pPr>
+              <a:buNone/>
               <a:defRPr sz="2175" b="1">
                 <a:solidFill>
                   <a:srgbClr val="20322B"/>
@@ -6488,6 +6722,7 @@
           </a:lstStyle>
           <a:p xmlns:a="http://schemas.openxmlformats.org/drawingml/2006/main">
             <a:pPr>
+              <a:buNone/>
               <a:defRPr sz="2175" b="1">
                 <a:solidFill>
                   <a:srgbClr val="20322B"/>
@@ -6554,6 +6789,7 @@
               </a:defRPr>
             </a:defPPr>
             <a:lvl1pPr>
+              <a:buNone/>
               <a:defRPr sz="1875" b="0">
                 <a:solidFill>
                   <a:srgbClr val="20322B"/>
@@ -6564,6 +6800,7 @@
               </a:defRPr>
             </a:lvl1pPr>
             <a:lvl2pPr>
+              <a:buNone/>
               <a:defRPr sz="1875" b="0">
                 <a:solidFill>
                   <a:srgbClr val="20322B"/>
@@ -6574,6 +6811,7 @@
               </a:defRPr>
             </a:lvl2pPr>
             <a:lvl3pPr>
+              <a:buNone/>
               <a:defRPr sz="1875" b="0">
                 <a:solidFill>
                   <a:srgbClr val="20322B"/>
@@ -6584,6 +6822,7 @@
               </a:defRPr>
             </a:lvl3pPr>
             <a:lvl4pPr>
+              <a:buNone/>
               <a:defRPr sz="1875" b="0">
                 <a:solidFill>
                   <a:srgbClr val="20322B"/>
@@ -6594,6 +6833,7 @@
               </a:defRPr>
             </a:lvl4pPr>
             <a:lvl5pPr>
+              <a:buNone/>
               <a:defRPr sz="1875" b="0">
                 <a:solidFill>
                   <a:srgbClr val="20322B"/>
@@ -6604,6 +6844,7 @@
               </a:defRPr>
             </a:lvl5pPr>
             <a:lvl6pPr>
+              <a:buNone/>
               <a:defRPr sz="1875" b="0">
                 <a:solidFill>
                   <a:srgbClr val="20322B"/>
@@ -6614,6 +6855,7 @@
               </a:defRPr>
             </a:lvl6pPr>
             <a:lvl7pPr>
+              <a:buNone/>
               <a:defRPr sz="1875" b="0">
                 <a:solidFill>
                   <a:srgbClr val="20322B"/>
@@ -6624,6 +6866,7 @@
               </a:defRPr>
             </a:lvl7pPr>
             <a:lvl8pPr>
+              <a:buNone/>
               <a:defRPr sz="1875" b="0">
                 <a:solidFill>
                   <a:srgbClr val="20322B"/>
@@ -6634,6 +6877,7 @@
               </a:defRPr>
             </a:lvl8pPr>
             <a:lvl9pPr>
+              <a:buNone/>
               <a:defRPr sz="1875" b="0">
                 <a:solidFill>
                   <a:srgbClr val="20322B"/>
@@ -6646,6 +6890,7 @@
           </a:lstStyle>
           <a:p xmlns:a="http://schemas.openxmlformats.org/drawingml/2006/main">
             <a:pPr>
+              <a:buNone/>
               <a:defRPr sz="1875" b="0">
                 <a:solidFill>
                   <a:srgbClr val="20322B"/>
@@ -6712,6 +6957,7 @@
               </a:defRPr>
             </a:defPPr>
             <a:lvl1pPr>
+              <a:buNone/>
               <a:defRPr sz="1350" b="0">
                 <a:solidFill>
                   <a:srgbClr val="58635E"/>
@@ -6722,6 +6968,7 @@
               </a:defRPr>
             </a:lvl1pPr>
             <a:lvl2pPr>
+              <a:buNone/>
               <a:defRPr sz="1350" b="0">
                 <a:solidFill>
                   <a:srgbClr val="58635E"/>
@@ -6732,6 +6979,7 @@
               </a:defRPr>
             </a:lvl2pPr>
             <a:lvl3pPr>
+              <a:buNone/>
               <a:defRPr sz="1350" b="0">
                 <a:solidFill>
                   <a:srgbClr val="58635E"/>
@@ -6742,6 +6990,7 @@
               </a:defRPr>
             </a:lvl3pPr>
             <a:lvl4pPr>
+              <a:buNone/>
               <a:defRPr sz="1350" b="0">
                 <a:solidFill>
                   <a:srgbClr val="58635E"/>
@@ -6752,6 +7001,7 @@
               </a:defRPr>
             </a:lvl4pPr>
             <a:lvl5pPr>
+              <a:buNone/>
               <a:defRPr sz="1350" b="0">
                 <a:solidFill>
                   <a:srgbClr val="58635E"/>
@@ -6762,6 +7012,7 @@
               </a:defRPr>
             </a:lvl5pPr>
             <a:lvl6pPr>
+              <a:buNone/>
               <a:defRPr sz="1350" b="0">
                 <a:solidFill>
                   <a:srgbClr val="58635E"/>
@@ -6772,6 +7023,7 @@
               </a:defRPr>
             </a:lvl6pPr>
             <a:lvl7pPr>
+              <a:buNone/>
               <a:defRPr sz="1350" b="0">
                 <a:solidFill>
                   <a:srgbClr val="58635E"/>
@@ -6782,6 +7034,7 @@
               </a:defRPr>
             </a:lvl7pPr>
             <a:lvl8pPr>
+              <a:buNone/>
               <a:defRPr sz="1350" b="0">
                 <a:solidFill>
                   <a:srgbClr val="58635E"/>
@@ -6792,6 +7045,7 @@
               </a:defRPr>
             </a:lvl8pPr>
             <a:lvl9pPr>
+              <a:buNone/>
               <a:defRPr sz="1350" b="0">
                 <a:solidFill>
                   <a:srgbClr val="58635E"/>
@@ -6804,6 +7058,7 @@
           </a:lstStyle>
           <a:p xmlns:a="http://schemas.openxmlformats.org/drawingml/2006/main">
             <a:pPr>
+              <a:buNone/>
               <a:defRPr sz="1350" b="0">
                 <a:solidFill>
                   <a:srgbClr val="58635E"/>
@@ -6870,6 +7125,7 @@
               </a:defRPr>
             </a:defPPr>
             <a:lvl1pPr>
+              <a:buNone/>
               <a:defRPr sz="2175" b="1">
                 <a:solidFill>
                   <a:srgbClr val="20322B"/>
@@ -6880,6 +7136,7 @@
               </a:defRPr>
             </a:lvl1pPr>
             <a:lvl2pPr>
+              <a:buNone/>
               <a:defRPr sz="2175" b="1">
                 <a:solidFill>
                   <a:srgbClr val="20322B"/>
@@ -6890,6 +7147,7 @@
               </a:defRPr>
             </a:lvl2pPr>
             <a:lvl3pPr>
+              <a:buNone/>
               <a:defRPr sz="2175" b="1">
                 <a:solidFill>
                   <a:srgbClr val="20322B"/>
@@ -6900,6 +7158,7 @@
               </a:defRPr>
             </a:lvl3pPr>
             <a:lvl4pPr>
+              <a:buNone/>
               <a:defRPr sz="2175" b="1">
                 <a:solidFill>
                   <a:srgbClr val="20322B"/>
@@ -6910,6 +7169,7 @@
               </a:defRPr>
             </a:lvl4pPr>
             <a:lvl5pPr>
+              <a:buNone/>
               <a:defRPr sz="2175" b="1">
                 <a:solidFill>
                   <a:srgbClr val="20322B"/>
@@ -6920,6 +7180,7 @@
               </a:defRPr>
             </a:lvl5pPr>
             <a:lvl6pPr>
+              <a:buNone/>
               <a:defRPr sz="2175" b="1">
                 <a:solidFill>
                   <a:srgbClr val="20322B"/>
@@ -6930,6 +7191,7 @@
               </a:defRPr>
             </a:lvl6pPr>
             <a:lvl7pPr>
+              <a:buNone/>
               <a:defRPr sz="2175" b="1">
                 <a:solidFill>
                   <a:srgbClr val="20322B"/>
@@ -6940,6 +7202,7 @@
               </a:defRPr>
             </a:lvl7pPr>
             <a:lvl8pPr>
+              <a:buNone/>
               <a:defRPr sz="2175" b="1">
                 <a:solidFill>
                   <a:srgbClr val="20322B"/>
@@ -6950,6 +7213,7 @@
               </a:defRPr>
             </a:lvl8pPr>
             <a:lvl9pPr>
+              <a:buNone/>
               <a:defRPr sz="2175" b="1">
                 <a:solidFill>
                   <a:srgbClr val="20322B"/>
@@ -6962,6 +7226,7 @@
           </a:lstStyle>
           <a:p xmlns:a="http://schemas.openxmlformats.org/drawingml/2006/main">
             <a:pPr>
+              <a:buNone/>
               <a:defRPr sz="2175" b="1">
                 <a:solidFill>
                   <a:srgbClr val="20322B"/>
@@ -7028,6 +7293,7 @@
               </a:defRPr>
             </a:defPPr>
             <a:lvl1pPr>
+              <a:buNone/>
               <a:defRPr sz="1875" b="0">
                 <a:solidFill>
                   <a:srgbClr val="20322B"/>
@@ -7038,6 +7304,7 @@
               </a:defRPr>
             </a:lvl1pPr>
             <a:lvl2pPr>
+              <a:buNone/>
               <a:defRPr sz="1875" b="0">
                 <a:solidFill>
                   <a:srgbClr val="20322B"/>
@@ -7048,6 +7315,7 @@
               </a:defRPr>
             </a:lvl2pPr>
             <a:lvl3pPr>
+              <a:buNone/>
               <a:defRPr sz="1875" b="0">
                 <a:solidFill>
                   <a:srgbClr val="20322B"/>
@@ -7058,6 +7326,7 @@
               </a:defRPr>
             </a:lvl3pPr>
             <a:lvl4pPr>
+              <a:buNone/>
               <a:defRPr sz="1875" b="0">
                 <a:solidFill>
                   <a:srgbClr val="20322B"/>
@@ -7068,6 +7337,7 @@
               </a:defRPr>
             </a:lvl4pPr>
             <a:lvl5pPr>
+              <a:buNone/>
               <a:defRPr sz="1875" b="0">
                 <a:solidFill>
                   <a:srgbClr val="20322B"/>
@@ -7078,6 +7348,7 @@
               </a:defRPr>
             </a:lvl5pPr>
             <a:lvl6pPr>
+              <a:buNone/>
               <a:defRPr sz="1875" b="0">
                 <a:solidFill>
                   <a:srgbClr val="20322B"/>
@@ -7088,6 +7359,7 @@
               </a:defRPr>
             </a:lvl6pPr>
             <a:lvl7pPr>
+              <a:buNone/>
               <a:defRPr sz="1875" b="0">
                 <a:solidFill>
                   <a:srgbClr val="20322B"/>
@@ -7098,6 +7370,7 @@
               </a:defRPr>
             </a:lvl7pPr>
             <a:lvl8pPr>
+              <a:buNone/>
               <a:defRPr sz="1875" b="0">
                 <a:solidFill>
                   <a:srgbClr val="20322B"/>
@@ -7108,6 +7381,7 @@
               </a:defRPr>
             </a:lvl8pPr>
             <a:lvl9pPr>
+              <a:buNone/>
               <a:defRPr sz="1875" b="0">
                 <a:solidFill>
                   <a:srgbClr val="20322B"/>
@@ -7120,6 +7394,7 @@
           </a:lstStyle>
           <a:p xmlns:a="http://schemas.openxmlformats.org/drawingml/2006/main">
             <a:pPr>
+              <a:buNone/>
               <a:defRPr sz="1875" b="0">
                 <a:solidFill>
                   <a:srgbClr val="20322B"/>
@@ -7186,6 +7461,7 @@
               </a:defRPr>
             </a:defPPr>
             <a:lvl1pPr>
+              <a:buNone/>
               <a:defRPr sz="1350" b="0">
                 <a:solidFill>
                   <a:srgbClr val="58635E"/>
@@ -7196,6 +7472,7 @@
               </a:defRPr>
             </a:lvl1pPr>
             <a:lvl2pPr>
+              <a:buNone/>
               <a:defRPr sz="1350" b="0">
                 <a:solidFill>
                   <a:srgbClr val="58635E"/>
@@ -7206,6 +7483,7 @@
               </a:defRPr>
             </a:lvl2pPr>
             <a:lvl3pPr>
+              <a:buNone/>
               <a:defRPr sz="1350" b="0">
                 <a:solidFill>
                   <a:srgbClr val="58635E"/>
@@ -7216,6 +7494,7 @@
               </a:defRPr>
             </a:lvl3pPr>
             <a:lvl4pPr>
+              <a:buNone/>
               <a:defRPr sz="1350" b="0">
                 <a:solidFill>
                   <a:srgbClr val="58635E"/>
@@ -7226,6 +7505,7 @@
               </a:defRPr>
             </a:lvl4pPr>
             <a:lvl5pPr>
+              <a:buNone/>
               <a:defRPr sz="1350" b="0">
                 <a:solidFill>
                   <a:srgbClr val="58635E"/>
@@ -7236,6 +7516,7 @@
               </a:defRPr>
             </a:lvl5pPr>
             <a:lvl6pPr>
+              <a:buNone/>
               <a:defRPr sz="1350" b="0">
                 <a:solidFill>
                   <a:srgbClr val="58635E"/>
@@ -7246,6 +7527,7 @@
               </a:defRPr>
             </a:lvl6pPr>
             <a:lvl7pPr>
+              <a:buNone/>
               <a:defRPr sz="1350" b="0">
                 <a:solidFill>
                   <a:srgbClr val="58635E"/>
@@ -7256,6 +7538,7 @@
               </a:defRPr>
             </a:lvl7pPr>
             <a:lvl8pPr>
+              <a:buNone/>
               <a:defRPr sz="1350" b="0">
                 <a:solidFill>
                   <a:srgbClr val="58635E"/>
@@ -7266,6 +7549,7 @@
               </a:defRPr>
             </a:lvl8pPr>
             <a:lvl9pPr>
+              <a:buNone/>
               <a:defRPr sz="1350" b="0">
                 <a:solidFill>
                   <a:srgbClr val="58635E"/>
@@ -7278,6 +7562,7 @@
           </a:lstStyle>
           <a:p xmlns:a="http://schemas.openxmlformats.org/drawingml/2006/main">
             <a:pPr>
+              <a:buNone/>
               <a:defRPr sz="1350" b="0">
                 <a:solidFill>
                   <a:srgbClr val="58635E"/>
@@ -7344,6 +7629,7 @@
               </a:defRPr>
             </a:defPPr>
             <a:lvl1pPr>
+              <a:buNone/>
               <a:defRPr sz="2100" b="1">
                 <a:solidFill>
                   <a:srgbClr val="28634E"/>
@@ -7354,6 +7640,7 @@
               </a:defRPr>
             </a:lvl1pPr>
             <a:lvl2pPr>
+              <a:buNone/>
               <a:defRPr sz="2100" b="1">
                 <a:solidFill>
                   <a:srgbClr val="28634E"/>
@@ -7364,6 +7651,7 @@
               </a:defRPr>
             </a:lvl2pPr>
             <a:lvl3pPr>
+              <a:buNone/>
               <a:defRPr sz="2100" b="1">
                 <a:solidFill>
                   <a:srgbClr val="28634E"/>
@@ -7374,6 +7662,7 @@
               </a:defRPr>
             </a:lvl3pPr>
             <a:lvl4pPr>
+              <a:buNone/>
               <a:defRPr sz="2100" b="1">
                 <a:solidFill>
                   <a:srgbClr val="28634E"/>
@@ -7384,6 +7673,7 @@
               </a:defRPr>
             </a:lvl4pPr>
             <a:lvl5pPr>
+              <a:buNone/>
               <a:defRPr sz="2100" b="1">
                 <a:solidFill>
                   <a:srgbClr val="28634E"/>
@@ -7394,6 +7684,7 @@
               </a:defRPr>
             </a:lvl5pPr>
             <a:lvl6pPr>
+              <a:buNone/>
               <a:defRPr sz="2100" b="1">
                 <a:solidFill>
                   <a:srgbClr val="28634E"/>
@@ -7404,6 +7695,7 @@
               </a:defRPr>
             </a:lvl6pPr>
             <a:lvl7pPr>
+              <a:buNone/>
               <a:defRPr sz="2100" b="1">
                 <a:solidFill>
                   <a:srgbClr val="28634E"/>
@@ -7414,6 +7706,7 @@
               </a:defRPr>
             </a:lvl7pPr>
             <a:lvl8pPr>
+              <a:buNone/>
               <a:defRPr sz="2100" b="1">
                 <a:solidFill>
                   <a:srgbClr val="28634E"/>
@@ -7424,6 +7717,7 @@
               </a:defRPr>
             </a:lvl8pPr>
             <a:lvl9pPr>
+              <a:buNone/>
               <a:defRPr sz="2100" b="1">
                 <a:solidFill>
                   <a:srgbClr val="28634E"/>
@@ -7436,6 +7730,7 @@
           </a:lstStyle>
           <a:p xmlns:a="http://schemas.openxmlformats.org/drawingml/2006/main">
             <a:pPr>
+              <a:buNone/>
               <a:defRPr sz="2100" b="1">
                 <a:solidFill>
                   <a:srgbClr val="28634E"/>
@@ -7502,6 +7797,7 @@
               </a:defRPr>
             </a:defPPr>
             <a:lvl1pPr>
+              <a:buNone/>
               <a:defRPr sz="2025" b="0">
                 <a:solidFill>
                   <a:srgbClr val="20322B"/>
@@ -7512,6 +7808,7 @@
               </a:defRPr>
             </a:lvl1pPr>
             <a:lvl2pPr>
+              <a:buNone/>
               <a:defRPr sz="2025" b="0">
                 <a:solidFill>
                   <a:srgbClr val="20322B"/>
@@ -7522,6 +7819,7 @@
               </a:defRPr>
             </a:lvl2pPr>
             <a:lvl3pPr>
+              <a:buNone/>
               <a:defRPr sz="2025" b="0">
                 <a:solidFill>
                   <a:srgbClr val="20322B"/>
@@ -7532,6 +7830,7 @@
               </a:defRPr>
             </a:lvl3pPr>
             <a:lvl4pPr>
+              <a:buNone/>
               <a:defRPr sz="2025" b="0">
                 <a:solidFill>
                   <a:srgbClr val="20322B"/>
@@ -7542,6 +7841,7 @@
               </a:defRPr>
             </a:lvl4pPr>
             <a:lvl5pPr>
+              <a:buNone/>
               <a:defRPr sz="2025" b="0">
                 <a:solidFill>
                   <a:srgbClr val="20322B"/>
@@ -7552,6 +7852,7 @@
               </a:defRPr>
             </a:lvl5pPr>
             <a:lvl6pPr>
+              <a:buNone/>
               <a:defRPr sz="2025" b="0">
                 <a:solidFill>
                   <a:srgbClr val="20322B"/>
@@ -7562,6 +7863,7 @@
               </a:defRPr>
             </a:lvl6pPr>
             <a:lvl7pPr>
+              <a:buNone/>
               <a:defRPr sz="2025" b="0">
                 <a:solidFill>
                   <a:srgbClr val="20322B"/>
@@ -7572,6 +7874,7 @@
               </a:defRPr>
             </a:lvl7pPr>
             <a:lvl8pPr>
+              <a:buNone/>
               <a:defRPr sz="2025" b="0">
                 <a:solidFill>
                   <a:srgbClr val="20322B"/>
@@ -7582,6 +7885,7 @@
               </a:defRPr>
             </a:lvl8pPr>
             <a:lvl9pPr>
+              <a:buNone/>
               <a:defRPr sz="2025" b="0">
                 <a:solidFill>
                   <a:srgbClr val="20322B"/>
@@ -7594,6 +7898,7 @@
           </a:lstStyle>
           <a:p xmlns:a="http://schemas.openxmlformats.org/drawingml/2006/main">
             <a:pPr>
+              <a:buNone/>
               <a:defRPr sz="2025" b="0">
                 <a:solidFill>
                   <a:srgbClr val="20322B"/>
@@ -7660,6 +7965,7 @@
               </a:defRPr>
             </a:defPPr>
             <a:lvl1pPr>
+              <a:buNone/>
               <a:defRPr sz="2025" b="1">
                 <a:solidFill>
                   <a:srgbClr val="28634E"/>
@@ -7670,6 +7976,7 @@
               </a:defRPr>
             </a:lvl1pPr>
             <a:lvl2pPr>
+              <a:buNone/>
               <a:defRPr sz="2025" b="1">
                 <a:solidFill>
                   <a:srgbClr val="28634E"/>
@@ -7680,6 +7987,7 @@
               </a:defRPr>
             </a:lvl2pPr>
             <a:lvl3pPr>
+              <a:buNone/>
               <a:defRPr sz="2025" b="1">
                 <a:solidFill>
                   <a:srgbClr val="28634E"/>
@@ -7690,6 +7998,7 @@
               </a:defRPr>
             </a:lvl3pPr>
             <a:lvl4pPr>
+              <a:buNone/>
               <a:defRPr sz="2025" b="1">
                 <a:solidFill>
                   <a:srgbClr val="28634E"/>
@@ -7700,6 +8009,7 @@
               </a:defRPr>
             </a:lvl4pPr>
             <a:lvl5pPr>
+              <a:buNone/>
               <a:defRPr sz="2025" b="1">
                 <a:solidFill>
                   <a:srgbClr val="28634E"/>
@@ -7710,6 +8020,7 @@
               </a:defRPr>
             </a:lvl5pPr>
             <a:lvl6pPr>
+              <a:buNone/>
               <a:defRPr sz="2025" b="1">
                 <a:solidFill>
                   <a:srgbClr val="28634E"/>
@@ -7720,6 +8031,7 @@
               </a:defRPr>
             </a:lvl6pPr>
             <a:lvl7pPr>
+              <a:buNone/>
               <a:defRPr sz="2025" b="1">
                 <a:solidFill>
                   <a:srgbClr val="28634E"/>
@@ -7730,6 +8042,7 @@
               </a:defRPr>
             </a:lvl7pPr>
             <a:lvl8pPr>
+              <a:buNone/>
               <a:defRPr sz="2025" b="1">
                 <a:solidFill>
                   <a:srgbClr val="28634E"/>
@@ -7740,6 +8053,7 @@
               </a:defRPr>
             </a:lvl8pPr>
             <a:lvl9pPr>
+              <a:buNone/>
               <a:defRPr sz="2025" b="1">
                 <a:solidFill>
                   <a:srgbClr val="28634E"/>
@@ -7752,6 +8066,7 @@
           </a:lstStyle>
           <a:p xmlns:a="http://schemas.openxmlformats.org/drawingml/2006/main">
             <a:pPr>
+              <a:buNone/>
               <a:defRPr sz="2025" b="1">
                 <a:solidFill>
                   <a:srgbClr val="28634E"/>
@@ -7818,6 +8133,7 @@
               </a:defRPr>
             </a:defPPr>
             <a:lvl1pPr>
+              <a:buNone/>
               <a:defRPr sz="1800" b="0">
                 <a:solidFill>
                   <a:srgbClr val="20322B"/>
@@ -7828,6 +8144,7 @@
               </a:defRPr>
             </a:lvl1pPr>
             <a:lvl2pPr>
+              <a:buNone/>
               <a:defRPr sz="1800" b="0">
                 <a:solidFill>
                   <a:srgbClr val="20322B"/>
@@ -7838,6 +8155,7 @@
               </a:defRPr>
             </a:lvl2pPr>
             <a:lvl3pPr>
+              <a:buNone/>
               <a:defRPr sz="1800" b="0">
                 <a:solidFill>
                   <a:srgbClr val="20322B"/>
@@ -7848,6 +8166,7 @@
               </a:defRPr>
             </a:lvl3pPr>
             <a:lvl4pPr>
+              <a:buNone/>
               <a:defRPr sz="1800" b="0">
                 <a:solidFill>
                   <a:srgbClr val="20322B"/>
@@ -7858,6 +8177,7 @@
               </a:defRPr>
             </a:lvl4pPr>
             <a:lvl5pPr>
+              <a:buNone/>
               <a:defRPr sz="1800" b="0">
                 <a:solidFill>
                   <a:srgbClr val="20322B"/>
@@ -7868,6 +8188,7 @@
               </a:defRPr>
             </a:lvl5pPr>
             <a:lvl6pPr>
+              <a:buNone/>
               <a:defRPr sz="1800" b="0">
                 <a:solidFill>
                   <a:srgbClr val="20322B"/>
@@ -7878,6 +8199,7 @@
               </a:defRPr>
             </a:lvl6pPr>
             <a:lvl7pPr>
+              <a:buNone/>
               <a:defRPr sz="1800" b="0">
                 <a:solidFill>
                   <a:srgbClr val="20322B"/>
@@ -7888,6 +8210,7 @@
               </a:defRPr>
             </a:lvl7pPr>
             <a:lvl8pPr>
+              <a:buNone/>
               <a:defRPr sz="1800" b="0">
                 <a:solidFill>
                   <a:srgbClr val="20322B"/>
@@ -7898,6 +8221,7 @@
               </a:defRPr>
             </a:lvl8pPr>
             <a:lvl9pPr>
+              <a:buNone/>
               <a:defRPr sz="1800" b="0">
                 <a:solidFill>
                   <a:srgbClr val="20322B"/>
@@ -7910,6 +8234,7 @@
           </a:lstStyle>
           <a:p xmlns:a="http://schemas.openxmlformats.org/drawingml/2006/main">
             <a:pPr>
+              <a:buNone/>
               <a:defRPr sz="1800" b="0">
                 <a:solidFill>
                   <a:srgbClr val="20322B"/>
@@ -7933,6 +8258,7 @@
           </a:p>
           <a:p xmlns:a="http://schemas.openxmlformats.org/drawingml/2006/main">
             <a:pPr>
+              <a:buNone/>
               <a:defRPr sz="1800" b="0">
                 <a:solidFill>
                   <a:srgbClr val="20322B"/>
@@ -7956,6 +8282,7 @@
           </a:p>
           <a:p xmlns:a="http://schemas.openxmlformats.org/drawingml/2006/main">
             <a:pPr>
+              <a:buNone/>
               <a:defRPr sz="1800" b="0">
                 <a:solidFill>
                   <a:srgbClr val="20322B"/>
@@ -7979,6 +8306,7 @@
           </a:p>
           <a:p xmlns:a="http://schemas.openxmlformats.org/drawingml/2006/main">
             <a:pPr>
+              <a:buNone/>
               <a:defRPr sz="1800" b="0">
                 <a:solidFill>
                   <a:srgbClr val="20322B"/>
@@ -8045,6 +8373,7 @@
               </a:defRPr>
             </a:defPPr>
             <a:lvl1pPr>
+              <a:buNone/>
               <a:defRPr sz="1350" b="0">
                 <a:solidFill>
                   <a:srgbClr val="58635E"/>
@@ -8055,6 +8384,7 @@
               </a:defRPr>
             </a:lvl1pPr>
             <a:lvl2pPr>
+              <a:buNone/>
               <a:defRPr sz="1350" b="0">
                 <a:solidFill>
                   <a:srgbClr val="58635E"/>
@@ -8065,6 +8395,7 @@
               </a:defRPr>
             </a:lvl2pPr>
             <a:lvl3pPr>
+              <a:buNone/>
               <a:defRPr sz="1350" b="0">
                 <a:solidFill>
                   <a:srgbClr val="58635E"/>
@@ -8075,6 +8406,7 @@
               </a:defRPr>
             </a:lvl3pPr>
             <a:lvl4pPr>
+              <a:buNone/>
               <a:defRPr sz="1350" b="0">
                 <a:solidFill>
                   <a:srgbClr val="58635E"/>
@@ -8085,6 +8417,7 @@
               </a:defRPr>
             </a:lvl4pPr>
             <a:lvl5pPr>
+              <a:buNone/>
               <a:defRPr sz="1350" b="0">
                 <a:solidFill>
                   <a:srgbClr val="58635E"/>
@@ -8095,6 +8428,7 @@
               </a:defRPr>
             </a:lvl5pPr>
             <a:lvl6pPr>
+              <a:buNone/>
               <a:defRPr sz="1350" b="0">
                 <a:solidFill>
                   <a:srgbClr val="58635E"/>
@@ -8105,6 +8439,7 @@
               </a:defRPr>
             </a:lvl6pPr>
             <a:lvl7pPr>
+              <a:buNone/>
               <a:defRPr sz="1350" b="0">
                 <a:solidFill>
                   <a:srgbClr val="58635E"/>
@@ -8115,6 +8450,7 @@
               </a:defRPr>
             </a:lvl7pPr>
             <a:lvl8pPr>
+              <a:buNone/>
               <a:defRPr sz="1350" b="0">
                 <a:solidFill>
                   <a:srgbClr val="58635E"/>
@@ -8125,6 +8461,7 @@
               </a:defRPr>
             </a:lvl8pPr>
             <a:lvl9pPr>
+              <a:buNone/>
               <a:defRPr sz="1350" b="0">
                 <a:solidFill>
                   <a:srgbClr val="58635E"/>
@@ -8137,6 +8474,7 @@
           </a:lstStyle>
           <a:p xmlns:a="http://schemas.openxmlformats.org/drawingml/2006/main">
             <a:pPr>
+              <a:buNone/>
               <a:defRPr sz="1350" b="0">
                 <a:solidFill>
                   <a:srgbClr val="58635E"/>
@@ -8232,6 +8570,7 @@
               </a:defRPr>
             </a:defPPr>
             <a:lvl1pPr>
+              <a:buNone/>
               <a:defRPr sz="1500" b="1">
                 <a:solidFill>
                   <a:srgbClr val="28634E"/>
@@ -8242,6 +8581,7 @@
               </a:defRPr>
             </a:lvl1pPr>
             <a:lvl2pPr>
+              <a:buNone/>
               <a:defRPr sz="1500" b="1">
                 <a:solidFill>
                   <a:srgbClr val="28634E"/>
@@ -8252,6 +8592,7 @@
               </a:defRPr>
             </a:lvl2pPr>
             <a:lvl3pPr>
+              <a:buNone/>
               <a:defRPr sz="1500" b="1">
                 <a:solidFill>
                   <a:srgbClr val="28634E"/>
@@ -8262,6 +8603,7 @@
               </a:defRPr>
             </a:lvl3pPr>
             <a:lvl4pPr>
+              <a:buNone/>
               <a:defRPr sz="1500" b="1">
                 <a:solidFill>
                   <a:srgbClr val="28634E"/>
@@ -8272,6 +8614,7 @@
               </a:defRPr>
             </a:lvl4pPr>
             <a:lvl5pPr>
+              <a:buNone/>
               <a:defRPr sz="1500" b="1">
                 <a:solidFill>
                   <a:srgbClr val="28634E"/>
@@ -8282,6 +8625,7 @@
               </a:defRPr>
             </a:lvl5pPr>
             <a:lvl6pPr>
+              <a:buNone/>
               <a:defRPr sz="1500" b="1">
                 <a:solidFill>
                   <a:srgbClr val="28634E"/>
@@ -8292,6 +8636,7 @@
               </a:defRPr>
             </a:lvl6pPr>
             <a:lvl7pPr>
+              <a:buNone/>
               <a:defRPr sz="1500" b="1">
                 <a:solidFill>
                   <a:srgbClr val="28634E"/>
@@ -8302,6 +8647,7 @@
               </a:defRPr>
             </a:lvl7pPr>
             <a:lvl8pPr>
+              <a:buNone/>
               <a:defRPr sz="1500" b="1">
                 <a:solidFill>
                   <a:srgbClr val="28634E"/>
@@ -8312,6 +8658,7 @@
               </a:defRPr>
             </a:lvl8pPr>
             <a:lvl9pPr>
+              <a:buNone/>
               <a:defRPr sz="1500" b="1">
                 <a:solidFill>
                   <a:srgbClr val="28634E"/>
@@ -8324,6 +8671,7 @@
           </a:lstStyle>
           <a:p xmlns:a="http://schemas.openxmlformats.org/drawingml/2006/main">
             <a:pPr>
+              <a:buNone/>
               <a:defRPr sz="1500" b="1">
                 <a:solidFill>
                   <a:srgbClr val="28634E"/>
@@ -8390,6 +8738,7 @@
               </a:defRPr>
             </a:defPPr>
             <a:lvl1pPr>
+              <a:buNone/>
               <a:defRPr sz="3450" b="1">
                 <a:solidFill>
                   <a:srgbClr val="20322B"/>
@@ -8400,6 +8749,7 @@
               </a:defRPr>
             </a:lvl1pPr>
             <a:lvl2pPr>
+              <a:buNone/>
               <a:defRPr sz="3450" b="1">
                 <a:solidFill>
                   <a:srgbClr val="20322B"/>
@@ -8410,6 +8760,7 @@
               </a:defRPr>
             </a:lvl2pPr>
             <a:lvl3pPr>
+              <a:buNone/>
               <a:defRPr sz="3450" b="1">
                 <a:solidFill>
                   <a:srgbClr val="20322B"/>
@@ -8420,6 +8771,7 @@
               </a:defRPr>
             </a:lvl3pPr>
             <a:lvl4pPr>
+              <a:buNone/>
               <a:defRPr sz="3450" b="1">
                 <a:solidFill>
                   <a:srgbClr val="20322B"/>
@@ -8430,6 +8782,7 @@
               </a:defRPr>
             </a:lvl4pPr>
             <a:lvl5pPr>
+              <a:buNone/>
               <a:defRPr sz="3450" b="1">
                 <a:solidFill>
                   <a:srgbClr val="20322B"/>
@@ -8440,6 +8793,7 @@
               </a:defRPr>
             </a:lvl5pPr>
             <a:lvl6pPr>
+              <a:buNone/>
               <a:defRPr sz="3450" b="1">
                 <a:solidFill>
                   <a:srgbClr val="20322B"/>
@@ -8450,6 +8804,7 @@
               </a:defRPr>
             </a:lvl6pPr>
             <a:lvl7pPr>
+              <a:buNone/>
               <a:defRPr sz="3450" b="1">
                 <a:solidFill>
                   <a:srgbClr val="20322B"/>
@@ -8460,6 +8815,7 @@
               </a:defRPr>
             </a:lvl7pPr>
             <a:lvl8pPr>
+              <a:buNone/>
               <a:defRPr sz="3450" b="1">
                 <a:solidFill>
                   <a:srgbClr val="20322B"/>
@@ -8470,6 +8826,7 @@
               </a:defRPr>
             </a:lvl8pPr>
             <a:lvl9pPr>
+              <a:buNone/>
               <a:defRPr sz="3450" b="1">
                 <a:solidFill>
                   <a:srgbClr val="20322B"/>
@@ -8482,6 +8839,7 @@
           </a:lstStyle>
           <a:p xmlns:a="http://schemas.openxmlformats.org/drawingml/2006/main">
             <a:pPr>
+              <a:buNone/>
               <a:defRPr sz="3450" b="1">
                 <a:solidFill>
                   <a:srgbClr val="20322B"/>
@@ -8548,6 +8906,7 @@
               </a:defRPr>
             </a:defPPr>
             <a:lvl1pPr>
+              <a:buNone/>
               <a:defRPr sz="1350" b="0">
                 <a:solidFill>
                   <a:srgbClr val="58635E"/>
@@ -8558,6 +8917,7 @@
               </a:defRPr>
             </a:lvl1pPr>
             <a:lvl2pPr>
+              <a:buNone/>
               <a:defRPr sz="1350" b="0">
                 <a:solidFill>
                   <a:srgbClr val="58635E"/>
@@ -8568,6 +8928,7 @@
               </a:defRPr>
             </a:lvl2pPr>
             <a:lvl3pPr>
+              <a:buNone/>
               <a:defRPr sz="1350" b="0">
                 <a:solidFill>
                   <a:srgbClr val="58635E"/>
@@ -8578,6 +8939,7 @@
               </a:defRPr>
             </a:lvl3pPr>
             <a:lvl4pPr>
+              <a:buNone/>
               <a:defRPr sz="1350" b="0">
                 <a:solidFill>
                   <a:srgbClr val="58635E"/>
@@ -8588,6 +8950,7 @@
               </a:defRPr>
             </a:lvl4pPr>
             <a:lvl5pPr>
+              <a:buNone/>
               <a:defRPr sz="1350" b="0">
                 <a:solidFill>
                   <a:srgbClr val="58635E"/>
@@ -8598,6 +8961,7 @@
               </a:defRPr>
             </a:lvl5pPr>
             <a:lvl6pPr>
+              <a:buNone/>
               <a:defRPr sz="1350" b="0">
                 <a:solidFill>
                   <a:srgbClr val="58635E"/>
@@ -8608,6 +8972,7 @@
               </a:defRPr>
             </a:lvl6pPr>
             <a:lvl7pPr>
+              <a:buNone/>
               <a:defRPr sz="1350" b="0">
                 <a:solidFill>
                   <a:srgbClr val="58635E"/>
@@ -8618,6 +8983,7 @@
               </a:defRPr>
             </a:lvl7pPr>
             <a:lvl8pPr>
+              <a:buNone/>
               <a:defRPr sz="1350" b="0">
                 <a:solidFill>
                   <a:srgbClr val="58635E"/>
@@ -8628,6 +8994,7 @@
               </a:defRPr>
             </a:lvl8pPr>
             <a:lvl9pPr>
+              <a:buNone/>
               <a:defRPr sz="1350" b="0">
                 <a:solidFill>
                   <a:srgbClr val="58635E"/>
@@ -8640,6 +9007,7 @@
           </a:lstStyle>
           <a:p xmlns:a="http://schemas.openxmlformats.org/drawingml/2006/main">
             <a:pPr>
+              <a:buNone/>
               <a:defRPr sz="1350" b="0">
                 <a:solidFill>
                   <a:srgbClr val="58635E"/>
@@ -8706,6 +9074,7 @@
               </a:defRPr>
             </a:defPPr>
             <a:lvl1pPr>
+              <a:buNone/>
               <a:defRPr sz="1875" b="1">
                 <a:solidFill>
                   <a:srgbClr val="28634E"/>
@@ -8716,6 +9085,7 @@
               </a:defRPr>
             </a:lvl1pPr>
             <a:lvl2pPr>
+              <a:buNone/>
               <a:defRPr sz="1875" b="1">
                 <a:solidFill>
                   <a:srgbClr val="28634E"/>
@@ -8726,6 +9096,7 @@
               </a:defRPr>
             </a:lvl2pPr>
             <a:lvl3pPr>
+              <a:buNone/>
               <a:defRPr sz="1875" b="1">
                 <a:solidFill>
                   <a:srgbClr val="28634E"/>
@@ -8736,6 +9107,7 @@
               </a:defRPr>
             </a:lvl3pPr>
             <a:lvl4pPr>
+              <a:buNone/>
               <a:defRPr sz="1875" b="1">
                 <a:solidFill>
                   <a:srgbClr val="28634E"/>
@@ -8746,6 +9118,7 @@
               </a:defRPr>
             </a:lvl4pPr>
             <a:lvl5pPr>
+              <a:buNone/>
               <a:defRPr sz="1875" b="1">
                 <a:solidFill>
                   <a:srgbClr val="28634E"/>
@@ -8756,6 +9129,7 @@
               </a:defRPr>
             </a:lvl5pPr>
             <a:lvl6pPr>
+              <a:buNone/>
               <a:defRPr sz="1875" b="1">
                 <a:solidFill>
                   <a:srgbClr val="28634E"/>
@@ -8766,6 +9140,7 @@
               </a:defRPr>
             </a:lvl6pPr>
             <a:lvl7pPr>
+              <a:buNone/>
               <a:defRPr sz="1875" b="1">
                 <a:solidFill>
                   <a:srgbClr val="28634E"/>
@@ -8776,6 +9151,7 @@
               </a:defRPr>
             </a:lvl7pPr>
             <a:lvl8pPr>
+              <a:buNone/>
               <a:defRPr sz="1875" b="1">
                 <a:solidFill>
                   <a:srgbClr val="28634E"/>
@@ -8786,6 +9162,7 @@
               </a:defRPr>
             </a:lvl8pPr>
             <a:lvl9pPr>
+              <a:buNone/>
               <a:defRPr sz="1875" b="1">
                 <a:solidFill>
                   <a:srgbClr val="28634E"/>
@@ -8798,6 +9175,7 @@
           </a:lstStyle>
           <a:p xmlns:a="http://schemas.openxmlformats.org/drawingml/2006/main">
             <a:pPr>
+              <a:buNone/>
               <a:defRPr sz="1875" b="1">
                 <a:solidFill>
                   <a:srgbClr val="28634E"/>
@@ -8864,6 +9242,7 @@
               </a:defRPr>
             </a:defPPr>
             <a:lvl1pPr>
+              <a:buNone/>
               <a:defRPr sz="3225" b="1">
                 <a:solidFill>
                   <a:srgbClr val="20322B"/>
@@ -8874,6 +9253,7 @@
               </a:defRPr>
             </a:lvl1pPr>
             <a:lvl2pPr>
+              <a:buNone/>
               <a:defRPr sz="3225" b="1">
                 <a:solidFill>
                   <a:srgbClr val="20322B"/>
@@ -8884,6 +9264,7 @@
               </a:defRPr>
             </a:lvl2pPr>
             <a:lvl3pPr>
+              <a:buNone/>
               <a:defRPr sz="3225" b="1">
                 <a:solidFill>
                   <a:srgbClr val="20322B"/>
@@ -8894,6 +9275,7 @@
               </a:defRPr>
             </a:lvl3pPr>
             <a:lvl4pPr>
+              <a:buNone/>
               <a:defRPr sz="3225" b="1">
                 <a:solidFill>
                   <a:srgbClr val="20322B"/>
@@ -8904,6 +9286,7 @@
               </a:defRPr>
             </a:lvl4pPr>
             <a:lvl5pPr>
+              <a:buNone/>
               <a:defRPr sz="3225" b="1">
                 <a:solidFill>
                   <a:srgbClr val="20322B"/>
@@ -8914,6 +9297,7 @@
               </a:defRPr>
             </a:lvl5pPr>
             <a:lvl6pPr>
+              <a:buNone/>
               <a:defRPr sz="3225" b="1">
                 <a:solidFill>
                   <a:srgbClr val="20322B"/>
@@ -8924,6 +9308,7 @@
               </a:defRPr>
             </a:lvl6pPr>
             <a:lvl7pPr>
+              <a:buNone/>
               <a:defRPr sz="3225" b="1">
                 <a:solidFill>
                   <a:srgbClr val="20322B"/>
@@ -8934,6 +9319,7 @@
               </a:defRPr>
             </a:lvl7pPr>
             <a:lvl8pPr>
+              <a:buNone/>
               <a:defRPr sz="3225" b="1">
                 <a:solidFill>
                   <a:srgbClr val="20322B"/>
@@ -8944,6 +9330,7 @@
               </a:defRPr>
             </a:lvl8pPr>
             <a:lvl9pPr>
+              <a:buNone/>
               <a:defRPr sz="3225" b="1">
                 <a:solidFill>
                   <a:srgbClr val="20322B"/>
@@ -8956,6 +9343,7 @@
           </a:lstStyle>
           <a:p xmlns:a="http://schemas.openxmlformats.org/drawingml/2006/main">
             <a:pPr>
+              <a:buNone/>
               <a:defRPr sz="3225" b="1">
                 <a:solidFill>
                   <a:srgbClr val="20322B"/>
@@ -9022,6 +9410,7 @@
               </a:defRPr>
             </a:defPPr>
             <a:lvl1pPr>
+              <a:buNone/>
               <a:defRPr sz="1875" b="0">
                 <a:solidFill>
                   <a:srgbClr val="20322B"/>
@@ -9032,6 +9421,7 @@
               </a:defRPr>
             </a:lvl1pPr>
             <a:lvl2pPr>
+              <a:buNone/>
               <a:defRPr sz="1875" b="0">
                 <a:solidFill>
                   <a:srgbClr val="20322B"/>
@@ -9042,6 +9432,7 @@
               </a:defRPr>
             </a:lvl2pPr>
             <a:lvl3pPr>
+              <a:buNone/>
               <a:defRPr sz="1875" b="0">
                 <a:solidFill>
                   <a:srgbClr val="20322B"/>
@@ -9052,6 +9443,7 @@
               </a:defRPr>
             </a:lvl3pPr>
             <a:lvl4pPr>
+              <a:buNone/>
               <a:defRPr sz="1875" b="0">
                 <a:solidFill>
                   <a:srgbClr val="20322B"/>
@@ -9062,6 +9454,7 @@
               </a:defRPr>
             </a:lvl4pPr>
             <a:lvl5pPr>
+              <a:buNone/>
               <a:defRPr sz="1875" b="0">
                 <a:solidFill>
                   <a:srgbClr val="20322B"/>
@@ -9072,6 +9465,7 @@
               </a:defRPr>
             </a:lvl5pPr>
             <a:lvl6pPr>
+              <a:buNone/>
               <a:defRPr sz="1875" b="0">
                 <a:solidFill>
                   <a:srgbClr val="20322B"/>
@@ -9082,6 +9476,7 @@
               </a:defRPr>
             </a:lvl6pPr>
             <a:lvl7pPr>
+              <a:buNone/>
               <a:defRPr sz="1875" b="0">
                 <a:solidFill>
                   <a:srgbClr val="20322B"/>
@@ -9092,6 +9487,7 @@
               </a:defRPr>
             </a:lvl7pPr>
             <a:lvl8pPr>
+              <a:buNone/>
               <a:defRPr sz="1875" b="0">
                 <a:solidFill>
                   <a:srgbClr val="20322B"/>
@@ -9102,6 +9498,7 @@
               </a:defRPr>
             </a:lvl8pPr>
             <a:lvl9pPr>
+              <a:buNone/>
               <a:defRPr sz="1875" b="0">
                 <a:solidFill>
                   <a:srgbClr val="20322B"/>
@@ -9114,6 +9511,7 @@
           </a:lstStyle>
           <a:p xmlns:a="http://schemas.openxmlformats.org/drawingml/2006/main">
             <a:pPr>
+              <a:buNone/>
               <a:defRPr sz="1875" b="0">
                 <a:solidFill>
                   <a:srgbClr val="20322B"/>
@@ -9180,6 +9578,7 @@
               </a:defRPr>
             </a:defPPr>
             <a:lvl1pPr>
+              <a:buNone/>
               <a:defRPr sz="1875" b="1">
                 <a:solidFill>
                   <a:srgbClr val="28634E"/>
@@ -9190,6 +9589,7 @@
               </a:defRPr>
             </a:lvl1pPr>
             <a:lvl2pPr>
+              <a:buNone/>
               <a:defRPr sz="1875" b="1">
                 <a:solidFill>
                   <a:srgbClr val="28634E"/>
@@ -9200,6 +9600,7 @@
               </a:defRPr>
             </a:lvl2pPr>
             <a:lvl3pPr>
+              <a:buNone/>
               <a:defRPr sz="1875" b="1">
                 <a:solidFill>
                   <a:srgbClr val="28634E"/>
@@ -9210,6 +9611,7 @@
               </a:defRPr>
             </a:lvl3pPr>
             <a:lvl4pPr>
+              <a:buNone/>
               <a:defRPr sz="1875" b="1">
                 <a:solidFill>
                   <a:srgbClr val="28634E"/>
@@ -9220,6 +9622,7 @@
               </a:defRPr>
             </a:lvl4pPr>
             <a:lvl5pPr>
+              <a:buNone/>
               <a:defRPr sz="1875" b="1">
                 <a:solidFill>
                   <a:srgbClr val="28634E"/>
@@ -9230,6 +9633,7 @@
               </a:defRPr>
             </a:lvl5pPr>
             <a:lvl6pPr>
+              <a:buNone/>
               <a:defRPr sz="1875" b="1">
                 <a:solidFill>
                   <a:srgbClr val="28634E"/>
@@ -9240,6 +9644,7 @@
               </a:defRPr>
             </a:lvl6pPr>
             <a:lvl7pPr>
+              <a:buNone/>
               <a:defRPr sz="1875" b="1">
                 <a:solidFill>
                   <a:srgbClr val="28634E"/>
@@ -9250,6 +9655,7 @@
               </a:defRPr>
             </a:lvl7pPr>
             <a:lvl8pPr>
+              <a:buNone/>
               <a:defRPr sz="1875" b="1">
                 <a:solidFill>
                   <a:srgbClr val="28634E"/>
@@ -9260,6 +9666,7 @@
               </a:defRPr>
             </a:lvl8pPr>
             <a:lvl9pPr>
+              <a:buNone/>
               <a:defRPr sz="1875" b="1">
                 <a:solidFill>
                   <a:srgbClr val="28634E"/>
@@ -9272,6 +9679,7 @@
           </a:lstStyle>
           <a:p xmlns:a="http://schemas.openxmlformats.org/drawingml/2006/main">
             <a:pPr>
+              <a:buNone/>
               <a:defRPr sz="1875" b="1">
                 <a:solidFill>
                   <a:srgbClr val="28634E"/>
@@ -9338,6 +9746,7 @@
               </a:defRPr>
             </a:defPPr>
             <a:lvl1pPr>
+              <a:buNone/>
               <a:defRPr sz="2700" b="1">
                 <a:solidFill>
                   <a:srgbClr val="20322B"/>
@@ -9348,6 +9757,7 @@
               </a:defRPr>
             </a:lvl1pPr>
             <a:lvl2pPr>
+              <a:buNone/>
               <a:defRPr sz="2700" b="1">
                 <a:solidFill>
                   <a:srgbClr val="20322B"/>
@@ -9358,6 +9768,7 @@
               </a:defRPr>
             </a:lvl2pPr>
             <a:lvl3pPr>
+              <a:buNone/>
               <a:defRPr sz="2700" b="1">
                 <a:solidFill>
                   <a:srgbClr val="20322B"/>
@@ -9368,6 +9779,7 @@
               </a:defRPr>
             </a:lvl3pPr>
             <a:lvl4pPr>
+              <a:buNone/>
               <a:defRPr sz="2700" b="1">
                 <a:solidFill>
                   <a:srgbClr val="20322B"/>
@@ -9378,6 +9790,7 @@
               </a:defRPr>
             </a:lvl4pPr>
             <a:lvl5pPr>
+              <a:buNone/>
               <a:defRPr sz="2700" b="1">
                 <a:solidFill>
                   <a:srgbClr val="20322B"/>
@@ -9388,6 +9801,7 @@
               </a:defRPr>
             </a:lvl5pPr>
             <a:lvl6pPr>
+              <a:buNone/>
               <a:defRPr sz="2700" b="1">
                 <a:solidFill>
                   <a:srgbClr val="20322B"/>
@@ -9398,6 +9812,7 @@
               </a:defRPr>
             </a:lvl6pPr>
             <a:lvl7pPr>
+              <a:buNone/>
               <a:defRPr sz="2700" b="1">
                 <a:solidFill>
                   <a:srgbClr val="20322B"/>
@@ -9408,6 +9823,7 @@
               </a:defRPr>
             </a:lvl7pPr>
             <a:lvl8pPr>
+              <a:buNone/>
               <a:defRPr sz="2700" b="1">
                 <a:solidFill>
                   <a:srgbClr val="20322B"/>
@@ -9418,6 +9834,7 @@
               </a:defRPr>
             </a:lvl8pPr>
             <a:lvl9pPr>
+              <a:buNone/>
               <a:defRPr sz="2700" b="1">
                 <a:solidFill>
                   <a:srgbClr val="20322B"/>
@@ -9430,6 +9847,7 @@
           </a:lstStyle>
           <a:p xmlns:a="http://schemas.openxmlformats.org/drawingml/2006/main">
             <a:pPr>
+              <a:buNone/>
               <a:defRPr sz="2700" b="1">
                 <a:solidFill>
                   <a:srgbClr val="20322B"/>
@@ -9496,6 +9914,7 @@
               </a:defRPr>
             </a:defPPr>
             <a:lvl1pPr>
+              <a:buNone/>
               <a:defRPr sz="1875" b="0">
                 <a:solidFill>
                   <a:srgbClr val="20322B"/>
@@ -9506,6 +9925,7 @@
               </a:defRPr>
             </a:lvl1pPr>
             <a:lvl2pPr>
+              <a:buNone/>
               <a:defRPr sz="1875" b="0">
                 <a:solidFill>
                   <a:srgbClr val="20322B"/>
@@ -9516,6 +9936,7 @@
               </a:defRPr>
             </a:lvl2pPr>
             <a:lvl3pPr>
+              <a:buNone/>
               <a:defRPr sz="1875" b="0">
                 <a:solidFill>
                   <a:srgbClr val="20322B"/>
@@ -9526,6 +9947,7 @@
               </a:defRPr>
             </a:lvl3pPr>
             <a:lvl4pPr>
+              <a:buNone/>
               <a:defRPr sz="1875" b="0">
                 <a:solidFill>
                   <a:srgbClr val="20322B"/>
@@ -9536,6 +9958,7 @@
               </a:defRPr>
             </a:lvl4pPr>
             <a:lvl5pPr>
+              <a:buNone/>
               <a:defRPr sz="1875" b="0">
                 <a:solidFill>
                   <a:srgbClr val="20322B"/>
@@ -9546,6 +9969,7 @@
               </a:defRPr>
             </a:lvl5pPr>
             <a:lvl6pPr>
+              <a:buNone/>
               <a:defRPr sz="1875" b="0">
                 <a:solidFill>
                   <a:srgbClr val="20322B"/>
@@ -9556,6 +9980,7 @@
               </a:defRPr>
             </a:lvl6pPr>
             <a:lvl7pPr>
+              <a:buNone/>
               <a:defRPr sz="1875" b="0">
                 <a:solidFill>
                   <a:srgbClr val="20322B"/>
@@ -9566,6 +9991,7 @@
               </a:defRPr>
             </a:lvl7pPr>
             <a:lvl8pPr>
+              <a:buNone/>
               <a:defRPr sz="1875" b="0">
                 <a:solidFill>
                   <a:srgbClr val="20322B"/>
@@ -9576,6 +10002,7 @@
               </a:defRPr>
             </a:lvl8pPr>
             <a:lvl9pPr>
+              <a:buNone/>
               <a:defRPr sz="1875" b="0">
                 <a:solidFill>
                   <a:srgbClr val="20322B"/>
@@ -9588,6 +10015,7 @@
           </a:lstStyle>
           <a:p xmlns:a="http://schemas.openxmlformats.org/drawingml/2006/main">
             <a:pPr>
+              <a:buNone/>
               <a:defRPr sz="1875" b="0">
                 <a:solidFill>
                   <a:srgbClr val="20322B"/>
@@ -9654,6 +10082,7 @@
               </a:defRPr>
             </a:defPPr>
             <a:lvl1pPr>
+              <a:buNone/>
               <a:defRPr sz="1875" b="1">
                 <a:solidFill>
                   <a:srgbClr val="28634E"/>
@@ -9664,6 +10093,7 @@
               </a:defRPr>
             </a:lvl1pPr>
             <a:lvl2pPr>
+              <a:buNone/>
               <a:defRPr sz="1875" b="1">
                 <a:solidFill>
                   <a:srgbClr val="28634E"/>
@@ -9674,6 +10104,7 @@
               </a:defRPr>
             </a:lvl2pPr>
             <a:lvl3pPr>
+              <a:buNone/>
               <a:defRPr sz="1875" b="1">
                 <a:solidFill>
                   <a:srgbClr val="28634E"/>
@@ -9684,6 +10115,7 @@
               </a:defRPr>
             </a:lvl3pPr>
             <a:lvl4pPr>
+              <a:buNone/>
               <a:defRPr sz="1875" b="1">
                 <a:solidFill>
                   <a:srgbClr val="28634E"/>
@@ -9694,6 +10126,7 @@
               </a:defRPr>
             </a:lvl4pPr>
             <a:lvl5pPr>
+              <a:buNone/>
               <a:defRPr sz="1875" b="1">
                 <a:solidFill>
                   <a:srgbClr val="28634E"/>
@@ -9704,6 +10137,7 @@
               </a:defRPr>
             </a:lvl5pPr>
             <a:lvl6pPr>
+              <a:buNone/>
               <a:defRPr sz="1875" b="1">
                 <a:solidFill>
                   <a:srgbClr val="28634E"/>
@@ -9714,6 +10148,7 @@
               </a:defRPr>
             </a:lvl6pPr>
             <a:lvl7pPr>
+              <a:buNone/>
               <a:defRPr sz="1875" b="1">
                 <a:solidFill>
                   <a:srgbClr val="28634E"/>
@@ -9724,6 +10159,7 @@
               </a:defRPr>
             </a:lvl7pPr>
             <a:lvl8pPr>
+              <a:buNone/>
               <a:defRPr sz="1875" b="1">
                 <a:solidFill>
                   <a:srgbClr val="28634E"/>
@@ -9734,6 +10170,7 @@
               </a:defRPr>
             </a:lvl8pPr>
             <a:lvl9pPr>
+              <a:buNone/>
               <a:defRPr sz="1875" b="1">
                 <a:solidFill>
                   <a:srgbClr val="28634E"/>
@@ -9746,6 +10183,7 @@
           </a:lstStyle>
           <a:p xmlns:a="http://schemas.openxmlformats.org/drawingml/2006/main">
             <a:pPr>
+              <a:buNone/>
               <a:defRPr sz="1875" b="1">
                 <a:solidFill>
                   <a:srgbClr val="28634E"/>
@@ -9812,6 +10250,7 @@
               </a:defRPr>
             </a:defPPr>
             <a:lvl1pPr>
+              <a:buNone/>
               <a:defRPr sz="2100" b="1">
                 <a:solidFill>
                   <a:srgbClr val="20322B"/>
@@ -9822,6 +10261,7 @@
               </a:defRPr>
             </a:lvl1pPr>
             <a:lvl2pPr>
+              <a:buNone/>
               <a:defRPr sz="2100" b="1">
                 <a:solidFill>
                   <a:srgbClr val="20322B"/>
@@ -9832,6 +10272,7 @@
               </a:defRPr>
             </a:lvl2pPr>
             <a:lvl3pPr>
+              <a:buNone/>
               <a:defRPr sz="2100" b="1">
                 <a:solidFill>
                   <a:srgbClr val="20322B"/>
@@ -9842,6 +10283,7 @@
               </a:defRPr>
             </a:lvl3pPr>
             <a:lvl4pPr>
+              <a:buNone/>
               <a:defRPr sz="2100" b="1">
                 <a:solidFill>
                   <a:srgbClr val="20322B"/>
@@ -9852,6 +10294,7 @@
               </a:defRPr>
             </a:lvl4pPr>
             <a:lvl5pPr>
+              <a:buNone/>
               <a:defRPr sz="2100" b="1">
                 <a:solidFill>
                   <a:srgbClr val="20322B"/>
@@ -9862,6 +10305,7 @@
               </a:defRPr>
             </a:lvl5pPr>
             <a:lvl6pPr>
+              <a:buNone/>
               <a:defRPr sz="2100" b="1">
                 <a:solidFill>
                   <a:srgbClr val="20322B"/>
@@ -9872,6 +10316,7 @@
               </a:defRPr>
             </a:lvl6pPr>
             <a:lvl7pPr>
+              <a:buNone/>
               <a:defRPr sz="2100" b="1">
                 <a:solidFill>
                   <a:srgbClr val="20322B"/>
@@ -9882,6 +10327,7 @@
               </a:defRPr>
             </a:lvl7pPr>
             <a:lvl8pPr>
+              <a:buNone/>
               <a:defRPr sz="2100" b="1">
                 <a:solidFill>
                   <a:srgbClr val="20322B"/>
@@ -9892,6 +10338,7 @@
               </a:defRPr>
             </a:lvl8pPr>
             <a:lvl9pPr>
+              <a:buNone/>
               <a:defRPr sz="2100" b="1">
                 <a:solidFill>
                   <a:srgbClr val="20322B"/>
@@ -9904,6 +10351,7 @@
           </a:lstStyle>
           <a:p xmlns:a="http://schemas.openxmlformats.org/drawingml/2006/main">
             <a:pPr>
+              <a:buNone/>
               <a:defRPr sz="2100" b="1">
                 <a:solidFill>
                   <a:srgbClr val="20322B"/>
@@ -9970,6 +10418,7 @@
               </a:defRPr>
             </a:defPPr>
             <a:lvl1pPr>
+              <a:buNone/>
               <a:defRPr sz="2100" b="1">
                 <a:solidFill>
                   <a:srgbClr val="28634E"/>
@@ -9980,6 +10429,7 @@
               </a:defRPr>
             </a:lvl1pPr>
             <a:lvl2pPr>
+              <a:buNone/>
               <a:defRPr sz="2100" b="1">
                 <a:solidFill>
                   <a:srgbClr val="28634E"/>
@@ -9990,6 +10440,7 @@
               </a:defRPr>
             </a:lvl2pPr>
             <a:lvl3pPr>
+              <a:buNone/>
               <a:defRPr sz="2100" b="1">
                 <a:solidFill>
                   <a:srgbClr val="28634E"/>
@@ -10000,6 +10451,7 @@
               </a:defRPr>
             </a:lvl3pPr>
             <a:lvl4pPr>
+              <a:buNone/>
               <a:defRPr sz="2100" b="1">
                 <a:solidFill>
                   <a:srgbClr val="28634E"/>
@@ -10010,6 +10462,7 @@
               </a:defRPr>
             </a:lvl4pPr>
             <a:lvl5pPr>
+              <a:buNone/>
               <a:defRPr sz="2100" b="1">
                 <a:solidFill>
                   <a:srgbClr val="28634E"/>
@@ -10020,6 +10473,7 @@
               </a:defRPr>
             </a:lvl5pPr>
             <a:lvl6pPr>
+              <a:buNone/>
               <a:defRPr sz="2100" b="1">
                 <a:solidFill>
                   <a:srgbClr val="28634E"/>
@@ -10030,6 +10484,7 @@
               </a:defRPr>
             </a:lvl6pPr>
             <a:lvl7pPr>
+              <a:buNone/>
               <a:defRPr sz="2100" b="1">
                 <a:solidFill>
                   <a:srgbClr val="28634E"/>
@@ -10040,6 +10495,7 @@
               </a:defRPr>
             </a:lvl7pPr>
             <a:lvl8pPr>
+              <a:buNone/>
               <a:defRPr sz="2100" b="1">
                 <a:solidFill>
                   <a:srgbClr val="28634E"/>
@@ -10050,6 +10506,7 @@
               </a:defRPr>
             </a:lvl8pPr>
             <a:lvl9pPr>
+              <a:buNone/>
               <a:defRPr sz="2100" b="1">
                 <a:solidFill>
                   <a:srgbClr val="28634E"/>
@@ -10062,6 +10519,7 @@
           </a:lstStyle>
           <a:p xmlns:a="http://schemas.openxmlformats.org/drawingml/2006/main">
             <a:pPr>
+              <a:buNone/>
               <a:defRPr sz="2100" b="1">
                 <a:solidFill>
                   <a:srgbClr val="28634E"/>
@@ -10090,7 +10548,7 @@
           <p:cNvPr id="13" name="">
             <a:extLst xmlns:a="http://schemas.openxmlformats.org/drawingml/2006/main">
               <a:ext uri="{FF2B5EF4-FFF2-40B4-BE49-F238E27FC236}">
-                <a16:creationId xmlns:a16="http://schemas.microsoft.com/office/drawing/2014/main" id="{F473CE76-E58D-454A-949B-C17FA1E9C484}"/>
+                <a16:creationId xmlns:a16="http://schemas.microsoft.com/office/drawing/2014/main" id="{A58C775B-6F43-462F-92BD-550A1F3C86A5}"/>
               </a:ext>
             </a:extLst>
           </p:cNvPr>
@@ -10504,6 +10962,7 @@
               </a:defRPr>
             </a:defPPr>
             <a:lvl1pPr>
+              <a:buNone/>
               <a:defRPr sz="2025" b="1">
                 <a:solidFill>
                   <a:srgbClr val="20322B"/>
@@ -10514,6 +10973,7 @@
               </a:defRPr>
             </a:lvl1pPr>
             <a:lvl2pPr>
+              <a:buNone/>
               <a:defRPr sz="2025" b="1">
                 <a:solidFill>
                   <a:srgbClr val="20322B"/>
@@ -10524,6 +10984,7 @@
               </a:defRPr>
             </a:lvl2pPr>
             <a:lvl3pPr>
+              <a:buNone/>
               <a:defRPr sz="2025" b="1">
                 <a:solidFill>
                   <a:srgbClr val="20322B"/>
@@ -10534,6 +10995,7 @@
               </a:defRPr>
             </a:lvl3pPr>
             <a:lvl4pPr>
+              <a:buNone/>
               <a:defRPr sz="2025" b="1">
                 <a:solidFill>
                   <a:srgbClr val="20322B"/>
@@ -10544,6 +11006,7 @@
               </a:defRPr>
             </a:lvl4pPr>
             <a:lvl5pPr>
+              <a:buNone/>
               <a:defRPr sz="2025" b="1">
                 <a:solidFill>
                   <a:srgbClr val="20322B"/>
@@ -10554,6 +11017,7 @@
               </a:defRPr>
             </a:lvl5pPr>
             <a:lvl6pPr>
+              <a:buNone/>
               <a:defRPr sz="2025" b="1">
                 <a:solidFill>
                   <a:srgbClr val="20322B"/>
@@ -10564,6 +11028,7 @@
               </a:defRPr>
             </a:lvl6pPr>
             <a:lvl7pPr>
+              <a:buNone/>
               <a:defRPr sz="2025" b="1">
                 <a:solidFill>
                   <a:srgbClr val="20322B"/>
@@ -10574,6 +11039,7 @@
               </a:defRPr>
             </a:lvl7pPr>
             <a:lvl8pPr>
+              <a:buNone/>
               <a:defRPr sz="2025" b="1">
                 <a:solidFill>
                   <a:srgbClr val="20322B"/>
@@ -10584,6 +11050,7 @@
               </a:defRPr>
             </a:lvl8pPr>
             <a:lvl9pPr>
+              <a:buNone/>
               <a:defRPr sz="2025" b="1">
                 <a:solidFill>
                   <a:srgbClr val="20322B"/>
@@ -10596,6 +11063,7 @@
           </a:lstStyle>
           <a:p xmlns:a="http://schemas.openxmlformats.org/drawingml/2006/main">
             <a:pPr>
+              <a:buNone/>
               <a:defRPr sz="2025" b="1">
                 <a:solidFill>
                   <a:srgbClr val="20322B"/>
@@ -10662,6 +11130,7 @@
               </a:defRPr>
             </a:defPPr>
             <a:lvl1pPr>
+              <a:buNone/>
               <a:defRPr sz="1950" b="0">
                 <a:solidFill>
                   <a:srgbClr val="20322B"/>
@@ -10672,6 +11141,7 @@
               </a:defRPr>
             </a:lvl1pPr>
             <a:lvl2pPr>
+              <a:buNone/>
               <a:defRPr sz="1950" b="0">
                 <a:solidFill>
                   <a:srgbClr val="20322B"/>
@@ -10682,6 +11152,7 @@
               </a:defRPr>
             </a:lvl2pPr>
             <a:lvl3pPr>
+              <a:buNone/>
               <a:defRPr sz="1950" b="0">
                 <a:solidFill>
                   <a:srgbClr val="20322B"/>
@@ -10692,6 +11163,7 @@
               </a:defRPr>
             </a:lvl3pPr>
             <a:lvl4pPr>
+              <a:buNone/>
               <a:defRPr sz="1950" b="0">
                 <a:solidFill>
                   <a:srgbClr val="20322B"/>
@@ -10702,6 +11174,7 @@
               </a:defRPr>
             </a:lvl4pPr>
             <a:lvl5pPr>
+              <a:buNone/>
               <a:defRPr sz="1950" b="0">
                 <a:solidFill>
                   <a:srgbClr val="20322B"/>
@@ -10712,6 +11185,7 @@
               </a:defRPr>
             </a:lvl5pPr>
             <a:lvl6pPr>
+              <a:buNone/>
               <a:defRPr sz="1950" b="0">
                 <a:solidFill>
                   <a:srgbClr val="20322B"/>
@@ -10722,6 +11196,7 @@
               </a:defRPr>
             </a:lvl6pPr>
             <a:lvl7pPr>
+              <a:buNone/>
               <a:defRPr sz="1950" b="0">
                 <a:solidFill>
                   <a:srgbClr val="20322B"/>
@@ -10732,6 +11207,7 @@
               </a:defRPr>
             </a:lvl7pPr>
             <a:lvl8pPr>
+              <a:buNone/>
               <a:defRPr sz="1950" b="0">
                 <a:solidFill>
                   <a:srgbClr val="20322B"/>
@@ -10742,6 +11218,7 @@
               </a:defRPr>
             </a:lvl8pPr>
             <a:lvl9pPr>
+              <a:buNone/>
               <a:defRPr sz="1950" b="0">
                 <a:solidFill>
                   <a:srgbClr val="20322B"/>
@@ -10754,6 +11231,7 @@
           </a:lstStyle>
           <a:p xmlns:a="http://schemas.openxmlformats.org/drawingml/2006/main">
             <a:pPr>
+              <a:buNone/>
               <a:defRPr sz="1950" b="0">
                 <a:solidFill>
                   <a:srgbClr val="20322B"/>
@@ -10820,6 +11298,7 @@
               </a:defRPr>
             </a:defPPr>
             <a:lvl1pPr>
+              <a:buNone/>
               <a:defRPr sz="1200" b="0">
                 <a:solidFill>
                   <a:srgbClr val="58635E"/>
@@ -10830,6 +11309,7 @@
               </a:defRPr>
             </a:lvl1pPr>
             <a:lvl2pPr>
+              <a:buNone/>
               <a:defRPr sz="1200" b="0">
                 <a:solidFill>
                   <a:srgbClr val="58635E"/>
@@ -10840,6 +11320,7 @@
               </a:defRPr>
             </a:lvl2pPr>
             <a:lvl3pPr>
+              <a:buNone/>
               <a:defRPr sz="1200" b="0">
                 <a:solidFill>
                   <a:srgbClr val="58635E"/>
@@ -10850,6 +11331,7 @@
               </a:defRPr>
             </a:lvl3pPr>
             <a:lvl4pPr>
+              <a:buNone/>
               <a:defRPr sz="1200" b="0">
                 <a:solidFill>
                   <a:srgbClr val="58635E"/>
@@ -10860,6 +11342,7 @@
               </a:defRPr>
             </a:lvl4pPr>
             <a:lvl5pPr>
+              <a:buNone/>
               <a:defRPr sz="1200" b="0">
                 <a:solidFill>
                   <a:srgbClr val="58635E"/>
@@ -10870,6 +11353,7 @@
               </a:defRPr>
             </a:lvl5pPr>
             <a:lvl6pPr>
+              <a:buNone/>
               <a:defRPr sz="1200" b="0">
                 <a:solidFill>
                   <a:srgbClr val="58635E"/>
@@ -10880,6 +11364,7 @@
               </a:defRPr>
             </a:lvl6pPr>
             <a:lvl7pPr>
+              <a:buNone/>
               <a:defRPr sz="1200" b="0">
                 <a:solidFill>
                   <a:srgbClr val="58635E"/>
@@ -10890,6 +11375,7 @@
               </a:defRPr>
             </a:lvl7pPr>
             <a:lvl8pPr>
+              <a:buNone/>
               <a:defRPr sz="1200" b="0">
                 <a:solidFill>
                   <a:srgbClr val="58635E"/>
@@ -10900,6 +11386,7 @@
               </a:defRPr>
             </a:lvl8pPr>
             <a:lvl9pPr>
+              <a:buNone/>
               <a:defRPr sz="1200" b="0">
                 <a:solidFill>
                   <a:srgbClr val="58635E"/>
@@ -10912,6 +11399,7 @@
           </a:lstStyle>
           <a:p xmlns:a="http://schemas.openxmlformats.org/drawingml/2006/main">
             <a:pPr>
+              <a:buNone/>
               <a:defRPr sz="1200" b="0">
                 <a:solidFill>
                   <a:srgbClr val="58635E"/>
@@ -11007,6 +11495,7 @@
               </a:defRPr>
             </a:defPPr>
             <a:lvl1pPr>
+              <a:buNone/>
               <a:defRPr sz="1500" b="1">
                 <a:solidFill>
                   <a:srgbClr val="28634E"/>
@@ -11017,6 +11506,7 @@
               </a:defRPr>
             </a:lvl1pPr>
             <a:lvl2pPr>
+              <a:buNone/>
               <a:defRPr sz="1500" b="1">
                 <a:solidFill>
                   <a:srgbClr val="28634E"/>
@@ -11027,6 +11517,7 @@
               </a:defRPr>
             </a:lvl2pPr>
             <a:lvl3pPr>
+              <a:buNone/>
               <a:defRPr sz="1500" b="1">
                 <a:solidFill>
                   <a:srgbClr val="28634E"/>
@@ -11037,6 +11528,7 @@
               </a:defRPr>
             </a:lvl3pPr>
             <a:lvl4pPr>
+              <a:buNone/>
               <a:defRPr sz="1500" b="1">
                 <a:solidFill>
                   <a:srgbClr val="28634E"/>
@@ -11047,6 +11539,7 @@
               </a:defRPr>
             </a:lvl4pPr>
             <a:lvl5pPr>
+              <a:buNone/>
               <a:defRPr sz="1500" b="1">
                 <a:solidFill>
                   <a:srgbClr val="28634E"/>
@@ -11057,6 +11550,7 @@
               </a:defRPr>
             </a:lvl5pPr>
             <a:lvl6pPr>
+              <a:buNone/>
               <a:defRPr sz="1500" b="1">
                 <a:solidFill>
                   <a:srgbClr val="28634E"/>
@@ -11067,6 +11561,7 @@
               </a:defRPr>
             </a:lvl6pPr>
             <a:lvl7pPr>
+              <a:buNone/>
               <a:defRPr sz="1500" b="1">
                 <a:solidFill>
                   <a:srgbClr val="28634E"/>
@@ -11077,6 +11572,7 @@
               </a:defRPr>
             </a:lvl7pPr>
             <a:lvl8pPr>
+              <a:buNone/>
               <a:defRPr sz="1500" b="1">
                 <a:solidFill>
                   <a:srgbClr val="28634E"/>
@@ -11087,6 +11583,7 @@
               </a:defRPr>
             </a:lvl8pPr>
             <a:lvl9pPr>
+              <a:buNone/>
               <a:defRPr sz="1500" b="1">
                 <a:solidFill>
                   <a:srgbClr val="28634E"/>
@@ -11099,6 +11596,7 @@
           </a:lstStyle>
           <a:p xmlns:a="http://schemas.openxmlformats.org/drawingml/2006/main">
             <a:pPr>
+              <a:buNone/>
               <a:defRPr sz="1500" b="1">
                 <a:solidFill>
                   <a:srgbClr val="28634E"/>
@@ -11165,6 +11663,7 @@
               </a:defRPr>
             </a:defPPr>
             <a:lvl1pPr>
+              <a:buNone/>
               <a:defRPr sz="3450" b="1">
                 <a:solidFill>
                   <a:srgbClr val="20322B"/>
@@ -11175,6 +11674,7 @@
               </a:defRPr>
             </a:lvl1pPr>
             <a:lvl2pPr>
+              <a:buNone/>
               <a:defRPr sz="3450" b="1">
                 <a:solidFill>
                   <a:srgbClr val="20322B"/>
@@ -11185,6 +11685,7 @@
               </a:defRPr>
             </a:lvl2pPr>
             <a:lvl3pPr>
+              <a:buNone/>
               <a:defRPr sz="3450" b="1">
                 <a:solidFill>
                   <a:srgbClr val="20322B"/>
@@ -11195,6 +11696,7 @@
               </a:defRPr>
             </a:lvl3pPr>
             <a:lvl4pPr>
+              <a:buNone/>
               <a:defRPr sz="3450" b="1">
                 <a:solidFill>
                   <a:srgbClr val="20322B"/>
@@ -11205,6 +11707,7 @@
               </a:defRPr>
             </a:lvl4pPr>
             <a:lvl5pPr>
+              <a:buNone/>
               <a:defRPr sz="3450" b="1">
                 <a:solidFill>
                   <a:srgbClr val="20322B"/>
@@ -11215,6 +11718,7 @@
               </a:defRPr>
             </a:lvl5pPr>
             <a:lvl6pPr>
+              <a:buNone/>
               <a:defRPr sz="3450" b="1">
                 <a:solidFill>
                   <a:srgbClr val="20322B"/>
@@ -11225,6 +11729,7 @@
               </a:defRPr>
             </a:lvl6pPr>
             <a:lvl7pPr>
+              <a:buNone/>
               <a:defRPr sz="3450" b="1">
                 <a:solidFill>
                   <a:srgbClr val="20322B"/>
@@ -11235,6 +11740,7 @@
               </a:defRPr>
             </a:lvl7pPr>
             <a:lvl8pPr>
+              <a:buNone/>
               <a:defRPr sz="3450" b="1">
                 <a:solidFill>
                   <a:srgbClr val="20322B"/>
@@ -11245,6 +11751,7 @@
               </a:defRPr>
             </a:lvl8pPr>
             <a:lvl9pPr>
+              <a:buNone/>
               <a:defRPr sz="3450" b="1">
                 <a:solidFill>
                   <a:srgbClr val="20322B"/>
@@ -11257,6 +11764,7 @@
           </a:lstStyle>
           <a:p xmlns:a="http://schemas.openxmlformats.org/drawingml/2006/main">
             <a:pPr>
+              <a:buNone/>
               <a:defRPr sz="3450" b="1">
                 <a:solidFill>
                   <a:srgbClr val="20322B"/>
@@ -11323,6 +11831,7 @@
               </a:defRPr>
             </a:defPPr>
             <a:lvl1pPr>
+              <a:buNone/>
               <a:defRPr sz="1350" b="0">
                 <a:solidFill>
                   <a:srgbClr val="58635E"/>
@@ -11333,6 +11842,7 @@
               </a:defRPr>
             </a:lvl1pPr>
             <a:lvl2pPr>
+              <a:buNone/>
               <a:defRPr sz="1350" b="0">
                 <a:solidFill>
                   <a:srgbClr val="58635E"/>
@@ -11343,6 +11853,7 @@
               </a:defRPr>
             </a:lvl2pPr>
             <a:lvl3pPr>
+              <a:buNone/>
               <a:defRPr sz="1350" b="0">
                 <a:solidFill>
                   <a:srgbClr val="58635E"/>
@@ -11353,6 +11864,7 @@
               </a:defRPr>
             </a:lvl3pPr>
             <a:lvl4pPr>
+              <a:buNone/>
               <a:defRPr sz="1350" b="0">
                 <a:solidFill>
                   <a:srgbClr val="58635E"/>
@@ -11363,6 +11875,7 @@
               </a:defRPr>
             </a:lvl4pPr>
             <a:lvl5pPr>
+              <a:buNone/>
               <a:defRPr sz="1350" b="0">
                 <a:solidFill>
                   <a:srgbClr val="58635E"/>
@@ -11373,6 +11886,7 @@
               </a:defRPr>
             </a:lvl5pPr>
             <a:lvl6pPr>
+              <a:buNone/>
               <a:defRPr sz="1350" b="0">
                 <a:solidFill>
                   <a:srgbClr val="58635E"/>
@@ -11383,6 +11897,7 @@
               </a:defRPr>
             </a:lvl6pPr>
             <a:lvl7pPr>
+              <a:buNone/>
               <a:defRPr sz="1350" b="0">
                 <a:solidFill>
                   <a:srgbClr val="58635E"/>
@@ -11393,6 +11908,7 @@
               </a:defRPr>
             </a:lvl7pPr>
             <a:lvl8pPr>
+              <a:buNone/>
               <a:defRPr sz="1350" b="0">
                 <a:solidFill>
                   <a:srgbClr val="58635E"/>
@@ -11403,6 +11919,7 @@
               </a:defRPr>
             </a:lvl8pPr>
             <a:lvl9pPr>
+              <a:buNone/>
               <a:defRPr sz="1350" b="0">
                 <a:solidFill>
                   <a:srgbClr val="58635E"/>
@@ -11415,6 +11932,7 @@
           </a:lstStyle>
           <a:p xmlns:a="http://schemas.openxmlformats.org/drawingml/2006/main">
             <a:pPr>
+              <a:buNone/>
               <a:defRPr sz="1350" b="0">
                 <a:solidFill>
                   <a:srgbClr val="58635E"/>
@@ -11443,7 +11961,7 @@
           <p:cNvPr id="4" name="">
             <a:extLst xmlns:a="http://schemas.openxmlformats.org/drawingml/2006/main">
               <a:ext uri="{FF2B5EF4-FFF2-40B4-BE49-F238E27FC236}">
-                <a16:creationId xmlns:a16="http://schemas.microsoft.com/office/drawing/2014/main" id="{4485830E-5028-4E25-A6C7-57CA97789F5A}"/>
+                <a16:creationId xmlns:a16="http://schemas.microsoft.com/office/drawing/2014/main" id="{170F7586-B66B-4FC6-8598-02E6CD101B9E}"/>
               </a:ext>
             </a:extLst>
           </p:cNvPr>
@@ -11453,13 +11971,13 @@
           <p:nvPr/>
         </p:nvPicPr>
         <p:blipFill>
-          <a:blip xmlns:r="http://schemas.openxmlformats.org/officeDocument/2006/relationships" xmlns:a="http://schemas.openxmlformats.org/drawingml/2006/main" r:embed="R1614a5d9c2ca43ad"/>
+          <a:blip xmlns:r="http://schemas.openxmlformats.org/officeDocument/2006/relationships" xmlns:a="http://schemas.openxmlformats.org/drawingml/2006/main" r:embed="R6a7b84d509484f9b"/>
           <a:stretch xmlns:a="http://schemas.openxmlformats.org/drawingml/2006/main"/>
         </p:blipFill>
         <p:spPr>
           <a:xfrm xmlns:a="http://schemas.openxmlformats.org/drawingml/2006/main">
-            <a:off x="609600" y="2095500"/>
-            <a:ext cx="5334000" cy="3333750"/>
+            <a:off x="609600" y="1763981"/>
+            <a:ext cx="2066925" cy="4473038"/>
           </a:xfrm>
           <a:prstGeom xmlns:a="http://schemas.openxmlformats.org/drawingml/2006/main" prst="rect">
             <a:avLst/>
@@ -11482,8 +12000,8 @@
         </p:nvSpPr>
         <p:spPr>
           <a:xfrm xmlns:a="http://schemas.openxmlformats.org/drawingml/2006/main">
-            <a:off x="609600" y="5848350"/>
-            <a:ext cx="5334000" cy="342900"/>
+            <a:off x="2924175" y="1809750"/>
+            <a:ext cx="3095625" cy="342900"/>
           </a:xfrm>
           <a:prstGeom xmlns:a="http://schemas.openxmlformats.org/drawingml/2006/main" prst="rect">
             <a:avLst/>
@@ -11509,6 +12027,7 @@
               </a:defRPr>
             </a:defPPr>
             <a:lvl1pPr>
+              <a:buNone/>
               <a:defRPr sz="1875" b="1">
                 <a:solidFill>
                   <a:srgbClr val="20322B"/>
@@ -11519,6 +12038,7 @@
               </a:defRPr>
             </a:lvl1pPr>
             <a:lvl2pPr>
+              <a:buNone/>
               <a:defRPr sz="1875" b="1">
                 <a:solidFill>
                   <a:srgbClr val="20322B"/>
@@ -11529,6 +12049,7 @@
               </a:defRPr>
             </a:lvl2pPr>
             <a:lvl3pPr>
+              <a:buNone/>
               <a:defRPr sz="1875" b="1">
                 <a:solidFill>
                   <a:srgbClr val="20322B"/>
@@ -11539,6 +12060,7 @@
               </a:defRPr>
             </a:lvl3pPr>
             <a:lvl4pPr>
+              <a:buNone/>
               <a:defRPr sz="1875" b="1">
                 <a:solidFill>
                   <a:srgbClr val="20322B"/>
@@ -11549,6 +12071,7 @@
               </a:defRPr>
             </a:lvl4pPr>
             <a:lvl5pPr>
+              <a:buNone/>
               <a:defRPr sz="1875" b="1">
                 <a:solidFill>
                   <a:srgbClr val="20322B"/>
@@ -11559,6 +12082,7 @@
               </a:defRPr>
             </a:lvl5pPr>
             <a:lvl6pPr>
+              <a:buNone/>
               <a:defRPr sz="1875" b="1">
                 <a:solidFill>
                   <a:srgbClr val="20322B"/>
@@ -11569,6 +12093,7 @@
               </a:defRPr>
             </a:lvl6pPr>
             <a:lvl7pPr>
+              <a:buNone/>
               <a:defRPr sz="1875" b="1">
                 <a:solidFill>
                   <a:srgbClr val="20322B"/>
@@ -11579,6 +12104,7 @@
               </a:defRPr>
             </a:lvl7pPr>
             <a:lvl8pPr>
+              <a:buNone/>
               <a:defRPr sz="1875" b="1">
                 <a:solidFill>
                   <a:srgbClr val="20322B"/>
@@ -11589,6 +12115,7 @@
               </a:defRPr>
             </a:lvl8pPr>
             <a:lvl9pPr>
+              <a:buNone/>
               <a:defRPr sz="1875" b="1">
                 <a:solidFill>
                   <a:srgbClr val="20322B"/>
@@ -11601,6 +12128,7 @@
           </a:lstStyle>
           <a:p xmlns:a="http://schemas.openxmlformats.org/drawingml/2006/main">
             <a:pPr>
+              <a:buNone/>
               <a:defRPr sz="1875" b="1">
                 <a:solidFill>
                   <a:srgbClr val="20322B"/>
@@ -11619,7 +12147,7 @@
                 <a:ea typeface="Arial"/>
                 <a:cs typeface="Arial"/>
               </a:rPr>
-              <a:t>Request an item for specific dates</a:t>
+              <a:t>Individual timetables</a:t>
             </a:r>
           </a:p>
         </p:txBody>
@@ -11640,8 +12168,8 @@
         </p:nvSpPr>
         <p:spPr>
           <a:xfrm xmlns:a="http://schemas.openxmlformats.org/drawingml/2006/main">
-            <a:off x="609600" y="6229350"/>
-            <a:ext cx="5334000" cy="257175"/>
+            <a:off x="2924175" y="2228850"/>
+            <a:ext cx="3095625" cy="1066800"/>
           </a:xfrm>
           <a:prstGeom xmlns:a="http://schemas.openxmlformats.org/drawingml/2006/main" prst="rect">
             <a:avLst/>
@@ -11657,9 +12185,9 @@
           </a:bodyPr>
           <a:lstStyle xmlns:a="http://schemas.openxmlformats.org/drawingml/2006/main">
             <a:defPPr>
-              <a:defRPr sz="1350" b="0">
-                <a:solidFill>
-                  <a:srgbClr val="58635E"/>
+              <a:defRPr sz="1800" b="0">
+                <a:solidFill>
+                  <a:srgbClr val="20322B"/>
                 </a:solidFill>
                 <a:latin typeface="Arial"/>
                 <a:ea typeface="Arial"/>
@@ -11667,6 +12195,7 @@
               </a:defRPr>
             </a:defPPr>
             <a:lvl1pPr>
+              <a:buNone/>
               <a:defRPr sz="1350" b="0">
                 <a:solidFill>
                   <a:srgbClr val="58635E"/>
@@ -11677,6 +12206,7 @@
               </a:defRPr>
             </a:lvl1pPr>
             <a:lvl2pPr>
+              <a:buNone/>
               <a:defRPr sz="1350" b="0">
                 <a:solidFill>
                   <a:srgbClr val="58635E"/>
@@ -11687,6 +12217,7 @@
               </a:defRPr>
             </a:lvl2pPr>
             <a:lvl3pPr>
+              <a:buNone/>
               <a:defRPr sz="1350" b="0">
                 <a:solidFill>
                   <a:srgbClr val="58635E"/>
@@ -11697,6 +12228,7 @@
               </a:defRPr>
             </a:lvl3pPr>
             <a:lvl4pPr>
+              <a:buNone/>
               <a:defRPr sz="1350" b="0">
                 <a:solidFill>
                   <a:srgbClr val="58635E"/>
@@ -11707,6 +12239,7 @@
               </a:defRPr>
             </a:lvl4pPr>
             <a:lvl5pPr>
+              <a:buNone/>
               <a:defRPr sz="1350" b="0">
                 <a:solidFill>
                   <a:srgbClr val="58635E"/>
@@ -11717,6 +12250,7 @@
               </a:defRPr>
             </a:lvl5pPr>
             <a:lvl6pPr>
+              <a:buNone/>
               <a:defRPr sz="1350" b="0">
                 <a:solidFill>
                   <a:srgbClr val="58635E"/>
@@ -11727,6 +12261,7 @@
               </a:defRPr>
             </a:lvl6pPr>
             <a:lvl7pPr>
+              <a:buNone/>
               <a:defRPr sz="1350" b="0">
                 <a:solidFill>
                   <a:srgbClr val="58635E"/>
@@ -11737,6 +12272,7 @@
               </a:defRPr>
             </a:lvl7pPr>
             <a:lvl8pPr>
+              <a:buNone/>
               <a:defRPr sz="1350" b="0">
                 <a:solidFill>
                   <a:srgbClr val="58635E"/>
@@ -11747,6 +12283,7 @@
               </a:defRPr>
             </a:lvl8pPr>
             <a:lvl9pPr>
+              <a:buNone/>
               <a:defRPr sz="1350" b="0">
                 <a:solidFill>
                   <a:srgbClr val="58635E"/>
@@ -11759,9 +12296,10 @@
           </a:lstStyle>
           <a:p xmlns:a="http://schemas.openxmlformats.org/drawingml/2006/main">
             <a:pPr>
-              <a:defRPr sz="1350" b="0">
-                <a:solidFill>
-                  <a:srgbClr val="58635E"/>
+              <a:buNone/>
+              <a:defRPr sz="1800" b="0">
+                <a:solidFill>
+                  <a:srgbClr val="20322B"/>
                 </a:solidFill>
                 <a:latin typeface="Arial"/>
                 <a:ea typeface="Arial"/>
@@ -11769,15 +12307,15 @@
               </a:defRPr>
             </a:pPr>
             <a:r>
-              <a:rPr sz="1350" b="0">
-                <a:solidFill>
-                  <a:srgbClr val="58635E"/>
+              <a:rPr sz="1800" b="0">
+                <a:solidFill>
+                  <a:srgbClr val="20322B"/>
                 </a:solidFill>
                 <a:latin typeface="Arial"/>
                 <a:ea typeface="Arial"/>
                 <a:cs typeface="Arial"/>
               </a:rPr>
-              <a:t>Prototype snapshot. Synthetic request.</a:t>
+              <a:t>Import an image or PDF. Review each class, then suggest mutual free slots.</a:t>
             </a:r>
           </a:p>
         </p:txBody>
@@ -11825,6 +12363,7 @@
               </a:defRPr>
             </a:defPPr>
             <a:lvl1pPr>
+              <a:buNone/>
               <a:defRPr sz="2100" b="1">
                 <a:solidFill>
                   <a:srgbClr val="28634E"/>
@@ -11835,6 +12374,7 @@
               </a:defRPr>
             </a:lvl1pPr>
             <a:lvl2pPr>
+              <a:buNone/>
               <a:defRPr sz="2100" b="1">
                 <a:solidFill>
                   <a:srgbClr val="28634E"/>
@@ -11845,6 +12385,7 @@
               </a:defRPr>
             </a:lvl2pPr>
             <a:lvl3pPr>
+              <a:buNone/>
               <a:defRPr sz="2100" b="1">
                 <a:solidFill>
                   <a:srgbClr val="28634E"/>
@@ -11855,6 +12396,7 @@
               </a:defRPr>
             </a:lvl3pPr>
             <a:lvl4pPr>
+              <a:buNone/>
               <a:defRPr sz="2100" b="1">
                 <a:solidFill>
                   <a:srgbClr val="28634E"/>
@@ -11865,6 +12407,7 @@
               </a:defRPr>
             </a:lvl4pPr>
             <a:lvl5pPr>
+              <a:buNone/>
               <a:defRPr sz="2100" b="1">
                 <a:solidFill>
                   <a:srgbClr val="28634E"/>
@@ -11875,6 +12418,7 @@
               </a:defRPr>
             </a:lvl5pPr>
             <a:lvl6pPr>
+              <a:buNone/>
               <a:defRPr sz="2100" b="1">
                 <a:solidFill>
                   <a:srgbClr val="28634E"/>
@@ -11885,6 +12429,7 @@
               </a:defRPr>
             </a:lvl6pPr>
             <a:lvl7pPr>
+              <a:buNone/>
               <a:defRPr sz="2100" b="1">
                 <a:solidFill>
                   <a:srgbClr val="28634E"/>
@@ -11895,6 +12440,7 @@
               </a:defRPr>
             </a:lvl7pPr>
             <a:lvl8pPr>
+              <a:buNone/>
               <a:defRPr sz="2100" b="1">
                 <a:solidFill>
                   <a:srgbClr val="28634E"/>
@@ -11905,6 +12451,7 @@
               </a:defRPr>
             </a:lvl8pPr>
             <a:lvl9pPr>
+              <a:buNone/>
               <a:defRPr sz="2100" b="1">
                 <a:solidFill>
                   <a:srgbClr val="28634E"/>
@@ -11917,6 +12464,7 @@
           </a:lstStyle>
           <a:p xmlns:a="http://schemas.openxmlformats.org/drawingml/2006/main">
             <a:pPr>
+              <a:buNone/>
               <a:defRPr sz="2100" b="1">
                 <a:solidFill>
                   <a:srgbClr val="28634E"/>
@@ -11945,7 +12493,7 @@
           <p:cNvPr id="8" name="">
             <a:extLst xmlns:a="http://schemas.openxmlformats.org/drawingml/2006/main">
               <a:ext uri="{FF2B5EF4-FFF2-40B4-BE49-F238E27FC236}">
-                <a16:creationId xmlns:a16="http://schemas.microsoft.com/office/drawing/2014/main" id="{8E55FA4D-DF49-4E42-93FD-212963AEC315}"/>
+                <a16:creationId xmlns:a16="http://schemas.microsoft.com/office/drawing/2014/main" id="{69FC507B-939F-44CA-9B00-503BEBD9B018}"/>
               </a:ext>
             </a:extLst>
           </p:cNvPr>
@@ -12359,6 +12907,7 @@
               </a:defRPr>
             </a:defPPr>
             <a:lvl1pPr>
+              <a:buNone/>
               <a:defRPr sz="1500" b="0">
                 <a:solidFill>
                   <a:srgbClr val="58635E"/>
@@ -12369,6 +12918,7 @@
               </a:defRPr>
             </a:lvl1pPr>
             <a:lvl2pPr>
+              <a:buNone/>
               <a:defRPr sz="1500" b="0">
                 <a:solidFill>
                   <a:srgbClr val="58635E"/>
@@ -12379,6 +12929,7 @@
               </a:defRPr>
             </a:lvl2pPr>
             <a:lvl3pPr>
+              <a:buNone/>
               <a:defRPr sz="1500" b="0">
                 <a:solidFill>
                   <a:srgbClr val="58635E"/>
@@ -12389,6 +12940,7 @@
               </a:defRPr>
             </a:lvl3pPr>
             <a:lvl4pPr>
+              <a:buNone/>
               <a:defRPr sz="1500" b="0">
                 <a:solidFill>
                   <a:srgbClr val="58635E"/>
@@ -12399,6 +12951,7 @@
               </a:defRPr>
             </a:lvl4pPr>
             <a:lvl5pPr>
+              <a:buNone/>
               <a:defRPr sz="1500" b="0">
                 <a:solidFill>
                   <a:srgbClr val="58635E"/>
@@ -12409,6 +12962,7 @@
               </a:defRPr>
             </a:lvl5pPr>
             <a:lvl6pPr>
+              <a:buNone/>
               <a:defRPr sz="1500" b="0">
                 <a:solidFill>
                   <a:srgbClr val="58635E"/>
@@ -12419,6 +12973,7 @@
               </a:defRPr>
             </a:lvl6pPr>
             <a:lvl7pPr>
+              <a:buNone/>
               <a:defRPr sz="1500" b="0">
                 <a:solidFill>
                   <a:srgbClr val="58635E"/>
@@ -12429,6 +12984,7 @@
               </a:defRPr>
             </a:lvl7pPr>
             <a:lvl8pPr>
+              <a:buNone/>
               <a:defRPr sz="1500" b="0">
                 <a:solidFill>
                   <a:srgbClr val="58635E"/>
@@ -12439,6 +12995,7 @@
               </a:defRPr>
             </a:lvl8pPr>
             <a:lvl9pPr>
+              <a:buNone/>
               <a:defRPr sz="1500" b="0">
                 <a:solidFill>
                   <a:srgbClr val="58635E"/>
@@ -12451,6 +13008,7 @@
           </a:lstStyle>
           <a:p xmlns:a="http://schemas.openxmlformats.org/drawingml/2006/main">
             <a:pPr>
+              <a:buNone/>
               <a:defRPr sz="1500" b="0">
                 <a:solidFill>
                   <a:srgbClr val="58635E"/>
@@ -12517,6 +13075,7 @@
               </a:defRPr>
             </a:defPPr>
             <a:lvl1pPr>
+              <a:buNone/>
               <a:defRPr sz="2100" b="1">
                 <a:solidFill>
                   <a:srgbClr val="20322B"/>
@@ -12527,6 +13086,7 @@
               </a:defRPr>
             </a:lvl1pPr>
             <a:lvl2pPr>
+              <a:buNone/>
               <a:defRPr sz="2100" b="1">
                 <a:solidFill>
                   <a:srgbClr val="20322B"/>
@@ -12537,6 +13097,7 @@
               </a:defRPr>
             </a:lvl2pPr>
             <a:lvl3pPr>
+              <a:buNone/>
               <a:defRPr sz="2100" b="1">
                 <a:solidFill>
                   <a:srgbClr val="20322B"/>
@@ -12547,6 +13108,7 @@
               </a:defRPr>
             </a:lvl3pPr>
             <a:lvl4pPr>
+              <a:buNone/>
               <a:defRPr sz="2100" b="1">
                 <a:solidFill>
                   <a:srgbClr val="20322B"/>
@@ -12557,6 +13119,7 @@
               </a:defRPr>
             </a:lvl4pPr>
             <a:lvl5pPr>
+              <a:buNone/>
               <a:defRPr sz="2100" b="1">
                 <a:solidFill>
                   <a:srgbClr val="20322B"/>
@@ -12567,6 +13130,7 @@
               </a:defRPr>
             </a:lvl5pPr>
             <a:lvl6pPr>
+              <a:buNone/>
               <a:defRPr sz="2100" b="1">
                 <a:solidFill>
                   <a:srgbClr val="20322B"/>
@@ -12577,6 +13141,7 @@
               </a:defRPr>
             </a:lvl6pPr>
             <a:lvl7pPr>
+              <a:buNone/>
               <a:defRPr sz="2100" b="1">
                 <a:solidFill>
                   <a:srgbClr val="20322B"/>
@@ -12587,6 +13152,7 @@
               </a:defRPr>
             </a:lvl7pPr>
             <a:lvl8pPr>
+              <a:buNone/>
               <a:defRPr sz="2100" b="1">
                 <a:solidFill>
                   <a:srgbClr val="20322B"/>
@@ -12597,6 +13163,7 @@
               </a:defRPr>
             </a:lvl8pPr>
             <a:lvl9pPr>
+              <a:buNone/>
               <a:defRPr sz="2100" b="1">
                 <a:solidFill>
                   <a:srgbClr val="20322B"/>
@@ -12609,6 +13176,7 @@
           </a:lstStyle>
           <a:p xmlns:a="http://schemas.openxmlformats.org/drawingml/2006/main">
             <a:pPr>
+              <a:buNone/>
               <a:defRPr sz="2100" b="1">
                 <a:solidFill>
                   <a:srgbClr val="20322B"/>
@@ -12627,7 +13195,7 @@
                 <a:ea typeface="Arial"/>
                 <a:cs typeface="Arial"/>
               </a:rPr>
-              <a:t>Why U Use first</a:t>
+              <a:t>Operating fallback</a:t>
             </a:r>
           </a:p>
         </p:txBody>
@@ -12675,6 +13243,7 @@
               </a:defRPr>
             </a:defPPr>
             <a:lvl1pPr>
+              <a:buNone/>
               <a:defRPr sz="1875" b="0">
                 <a:solidFill>
                   <a:srgbClr val="20322B"/>
@@ -12685,6 +13254,7 @@
               </a:defRPr>
             </a:lvl1pPr>
             <a:lvl2pPr>
+              <a:buNone/>
               <a:defRPr sz="1875" b="0">
                 <a:solidFill>
                   <a:srgbClr val="20322B"/>
@@ -12695,6 +13265,7 @@
               </a:defRPr>
             </a:lvl2pPr>
             <a:lvl3pPr>
+              <a:buNone/>
               <a:defRPr sz="1875" b="0">
                 <a:solidFill>
                   <a:srgbClr val="20322B"/>
@@ -12705,6 +13276,7 @@
               </a:defRPr>
             </a:lvl3pPr>
             <a:lvl4pPr>
+              <a:buNone/>
               <a:defRPr sz="1875" b="0">
                 <a:solidFill>
                   <a:srgbClr val="20322B"/>
@@ -12715,6 +13287,7 @@
               </a:defRPr>
             </a:lvl4pPr>
             <a:lvl5pPr>
+              <a:buNone/>
               <a:defRPr sz="1875" b="0">
                 <a:solidFill>
                   <a:srgbClr val="20322B"/>
@@ -12725,6 +13298,7 @@
               </a:defRPr>
             </a:lvl5pPr>
             <a:lvl6pPr>
+              <a:buNone/>
               <a:defRPr sz="1875" b="0">
                 <a:solidFill>
                   <a:srgbClr val="20322B"/>
@@ -12735,6 +13309,7 @@
               </a:defRPr>
             </a:lvl6pPr>
             <a:lvl7pPr>
+              <a:buNone/>
               <a:defRPr sz="1875" b="0">
                 <a:solidFill>
                   <a:srgbClr val="20322B"/>
@@ -12745,6 +13320,7 @@
               </a:defRPr>
             </a:lvl7pPr>
             <a:lvl8pPr>
+              <a:buNone/>
               <a:defRPr sz="1875" b="0">
                 <a:solidFill>
                   <a:srgbClr val="20322B"/>
@@ -12755,6 +13331,7 @@
               </a:defRPr>
             </a:lvl8pPr>
             <a:lvl9pPr>
+              <a:buNone/>
               <a:defRPr sz="1875" b="0">
                 <a:solidFill>
                   <a:srgbClr val="20322B"/>
@@ -12767,6 +13344,7 @@
           </a:lstStyle>
           <a:p xmlns:a="http://schemas.openxmlformats.org/drawingml/2006/main">
             <a:pPr>
+              <a:buNone/>
               <a:defRPr sz="1875" b="0">
                 <a:solidFill>
                   <a:srgbClr val="20322B"/>
@@ -12833,6 +13411,7 @@
               </a:defRPr>
             </a:defPPr>
             <a:lvl1pPr>
+              <a:buNone/>
               <a:defRPr sz="1200" b="0">
                 <a:solidFill>
                   <a:srgbClr val="58635E"/>
@@ -12843,6 +13422,7 @@
               </a:defRPr>
             </a:lvl1pPr>
             <a:lvl2pPr>
+              <a:buNone/>
               <a:defRPr sz="1200" b="0">
                 <a:solidFill>
                   <a:srgbClr val="58635E"/>
@@ -12853,6 +13433,7 @@
               </a:defRPr>
             </a:lvl2pPr>
             <a:lvl3pPr>
+              <a:buNone/>
               <a:defRPr sz="1200" b="0">
                 <a:solidFill>
                   <a:srgbClr val="58635E"/>
@@ -12863,6 +13444,7 @@
               </a:defRPr>
             </a:lvl3pPr>
             <a:lvl4pPr>
+              <a:buNone/>
               <a:defRPr sz="1200" b="0">
                 <a:solidFill>
                   <a:srgbClr val="58635E"/>
@@ -12873,6 +13455,7 @@
               </a:defRPr>
             </a:lvl4pPr>
             <a:lvl5pPr>
+              <a:buNone/>
               <a:defRPr sz="1200" b="0">
                 <a:solidFill>
                   <a:srgbClr val="58635E"/>
@@ -12883,6 +13466,7 @@
               </a:defRPr>
             </a:lvl5pPr>
             <a:lvl6pPr>
+              <a:buNone/>
               <a:defRPr sz="1200" b="0">
                 <a:solidFill>
                   <a:srgbClr val="58635E"/>
@@ -12893,6 +13477,7 @@
               </a:defRPr>
             </a:lvl6pPr>
             <a:lvl7pPr>
+              <a:buNone/>
               <a:defRPr sz="1200" b="0">
                 <a:solidFill>
                   <a:srgbClr val="58635E"/>
@@ -12903,6 +13488,7 @@
               </a:defRPr>
             </a:lvl7pPr>
             <a:lvl8pPr>
+              <a:buNone/>
               <a:defRPr sz="1200" b="0">
                 <a:solidFill>
                   <a:srgbClr val="58635E"/>
@@ -12913,6 +13499,7 @@
               </a:defRPr>
             </a:lvl8pPr>
             <a:lvl9pPr>
+              <a:buNone/>
               <a:defRPr sz="1200" b="0">
                 <a:solidFill>
                   <a:srgbClr val="58635E"/>
@@ -12925,6 +13512,7 @@
           </a:lstStyle>
           <a:p xmlns:a="http://schemas.openxmlformats.org/drawingml/2006/main">
             <a:pPr>
+              <a:buNone/>
               <a:defRPr sz="1200" b="0">
                 <a:solidFill>
                   <a:srgbClr val="58635E"/>
@@ -12943,7 +13531,639 @@
                 <a:ea typeface="Arial"/>
                 <a:cs typeface="Arial"/>
               </a:rPr>
-              <a:t>Planning weights and scores, not user ratings. Full matrix and sensitivity in the workbook.</a:t>
+              <a:t>Demo account and request. Scores are planning judgments. Full matrix and sensitivity in the workbook.</a:t>
+            </a:r>
+          </a:p>
+        </p:txBody>
+      </p:sp>
+      <p:sp>
+        <p:nvSpPr>
+          <p:cNvPr id="14" name="">
+            <a:extLst xmlns:a="http://schemas.openxmlformats.org/drawingml/2006/main">
+              <a:ext uri="{FF2B5EF4-FFF2-40B4-BE49-F238E27FC236}">
+                <a16:creationId xmlns:a16="http://schemas.microsoft.com/office/drawing/2014/main" id="{9974AF59-E25F-4C2F-A749-66767E558DE4}"/>
+              </a:ext>
+            </a:extLst>
+          </p:cNvPr>
+          <p:cNvSpPr>
+            <a:spLocks xmlns:a="http://schemas.openxmlformats.org/drawingml/2006/main" noGrp="1"/>
+          </p:cNvSpPr>
+          <p:nvPr/>
+        </p:nvSpPr>
+        <p:spPr>
+          <a:xfrm xmlns:a="http://schemas.openxmlformats.org/drawingml/2006/main">
+            <a:off x="2924175" y="3476625"/>
+            <a:ext cx="3095625" cy="342900"/>
+          </a:xfrm>
+          <a:prstGeom xmlns:a="http://schemas.openxmlformats.org/drawingml/2006/main" prst="rect">
+            <a:avLst/>
+          </a:prstGeom>
+          <a:noFill xmlns:a="http://schemas.openxmlformats.org/drawingml/2006/main"/>
+          <a:ln xmlns:a="http://schemas.openxmlformats.org/drawingml/2006/main" w="0">
+            <a:noFill/>
+          </a:ln>
+        </p:spPr>
+        <p:txBody>
+          <a:bodyPr xmlns:a="http://schemas.openxmlformats.org/drawingml/2006/main">
+            <a:noAutofit/>
+          </a:bodyPr>
+          <a:lstStyle xmlns:a="http://schemas.openxmlformats.org/drawingml/2006/main">
+            <a:defPPr>
+              <a:defRPr sz="1875" b="1">
+                <a:solidFill>
+                  <a:srgbClr val="20322B"/>
+                </a:solidFill>
+                <a:latin typeface="Arial"/>
+                <a:ea typeface="Arial"/>
+                <a:cs typeface="Arial"/>
+              </a:defRPr>
+            </a:defPPr>
+            <a:lvl1pPr>
+              <a:defRPr sz="1875" b="1">
+                <a:solidFill>
+                  <a:srgbClr val="20322B"/>
+                </a:solidFill>
+                <a:latin typeface="Arial"/>
+                <a:ea typeface="Arial"/>
+                <a:cs typeface="Arial"/>
+              </a:defRPr>
+            </a:lvl1pPr>
+            <a:lvl2pPr>
+              <a:defRPr sz="1875" b="1">
+                <a:solidFill>
+                  <a:srgbClr val="20322B"/>
+                </a:solidFill>
+                <a:latin typeface="Arial"/>
+                <a:ea typeface="Arial"/>
+                <a:cs typeface="Arial"/>
+              </a:defRPr>
+            </a:lvl2pPr>
+            <a:lvl3pPr>
+              <a:defRPr sz="1875" b="1">
+                <a:solidFill>
+                  <a:srgbClr val="20322B"/>
+                </a:solidFill>
+                <a:latin typeface="Arial"/>
+                <a:ea typeface="Arial"/>
+                <a:cs typeface="Arial"/>
+              </a:defRPr>
+            </a:lvl3pPr>
+            <a:lvl4pPr>
+              <a:defRPr sz="1875" b="1">
+                <a:solidFill>
+                  <a:srgbClr val="20322B"/>
+                </a:solidFill>
+                <a:latin typeface="Arial"/>
+                <a:ea typeface="Arial"/>
+                <a:cs typeface="Arial"/>
+              </a:defRPr>
+            </a:lvl4pPr>
+            <a:lvl5pPr>
+              <a:defRPr sz="1875" b="1">
+                <a:solidFill>
+                  <a:srgbClr val="20322B"/>
+                </a:solidFill>
+                <a:latin typeface="Arial"/>
+                <a:ea typeface="Arial"/>
+                <a:cs typeface="Arial"/>
+              </a:defRPr>
+            </a:lvl5pPr>
+            <a:lvl6pPr>
+              <a:defRPr sz="1875" b="1">
+                <a:solidFill>
+                  <a:srgbClr val="20322B"/>
+                </a:solidFill>
+                <a:latin typeface="Arial"/>
+                <a:ea typeface="Arial"/>
+                <a:cs typeface="Arial"/>
+              </a:defRPr>
+            </a:lvl6pPr>
+            <a:lvl7pPr>
+              <a:defRPr sz="1875" b="1">
+                <a:solidFill>
+                  <a:srgbClr val="20322B"/>
+                </a:solidFill>
+                <a:latin typeface="Arial"/>
+                <a:ea typeface="Arial"/>
+                <a:cs typeface="Arial"/>
+              </a:defRPr>
+            </a:lvl7pPr>
+            <a:lvl8pPr>
+              <a:defRPr sz="1875" b="1">
+                <a:solidFill>
+                  <a:srgbClr val="20322B"/>
+                </a:solidFill>
+                <a:latin typeface="Arial"/>
+                <a:ea typeface="Arial"/>
+                <a:cs typeface="Arial"/>
+              </a:defRPr>
+            </a:lvl8pPr>
+            <a:lvl9pPr>
+              <a:defRPr sz="1875" b="1">
+                <a:solidFill>
+                  <a:srgbClr val="20322B"/>
+                </a:solidFill>
+                <a:latin typeface="Arial"/>
+                <a:ea typeface="Arial"/>
+                <a:cs typeface="Arial"/>
+              </a:defRPr>
+            </a:lvl9pPr>
+          </a:lstStyle>
+          <a:p xmlns:a="http://schemas.openxmlformats.org/drawingml/2006/main">
+            <a:pPr>
+              <a:defRPr sz="1875" b="1">
+                <a:solidFill>
+                  <a:srgbClr val="20322B"/>
+                </a:solidFill>
+                <a:latin typeface="Arial"/>
+                <a:ea typeface="Arial"/>
+                <a:cs typeface="Arial"/>
+              </a:defRPr>
+            </a:pPr>
+            <a:r>
+              <a:rPr sz="1875" b="1">
+                <a:solidFill>
+                  <a:srgbClr val="20322B"/>
+                </a:solidFill>
+                <a:latin typeface="Arial"/>
+                <a:ea typeface="Arial"/>
+                <a:cs typeface="Arial"/>
+              </a:rPr>
+              <a:t>Requests and offers</a:t>
+            </a:r>
+          </a:p>
+        </p:txBody>
+      </p:sp>
+      <p:sp>
+        <p:nvSpPr>
+          <p:cNvPr id="15" name="">
+            <a:extLst xmlns:a="http://schemas.openxmlformats.org/drawingml/2006/main">
+              <a:ext uri="{FF2B5EF4-FFF2-40B4-BE49-F238E27FC236}">
+                <a16:creationId xmlns:a16="http://schemas.microsoft.com/office/drawing/2014/main" id="{49EA6F52-A0B0-4A83-A17B-151D7E4EF348}"/>
+              </a:ext>
+            </a:extLst>
+          </p:cNvPr>
+          <p:cNvSpPr>
+            <a:spLocks xmlns:a="http://schemas.openxmlformats.org/drawingml/2006/main" noGrp="1"/>
+          </p:cNvSpPr>
+          <p:nvPr/>
+        </p:nvSpPr>
+        <p:spPr>
+          <a:xfrm xmlns:a="http://schemas.openxmlformats.org/drawingml/2006/main">
+            <a:off x="2924175" y="3905250"/>
+            <a:ext cx="3095625" cy="1009650"/>
+          </a:xfrm>
+          <a:prstGeom xmlns:a="http://schemas.openxmlformats.org/drawingml/2006/main" prst="rect">
+            <a:avLst/>
+          </a:prstGeom>
+          <a:noFill xmlns:a="http://schemas.openxmlformats.org/drawingml/2006/main"/>
+          <a:ln xmlns:a="http://schemas.openxmlformats.org/drawingml/2006/main" w="0">
+            <a:noFill/>
+          </a:ln>
+        </p:spPr>
+        <p:txBody>
+          <a:bodyPr xmlns:a="http://schemas.openxmlformats.org/drawingml/2006/main">
+            <a:noAutofit/>
+          </a:bodyPr>
+          <a:lstStyle xmlns:a="http://schemas.openxmlformats.org/drawingml/2006/main">
+            <a:defPPr>
+              <a:defRPr sz="1800" b="0">
+                <a:solidFill>
+                  <a:srgbClr val="20322B"/>
+                </a:solidFill>
+                <a:latin typeface="Arial"/>
+                <a:ea typeface="Arial"/>
+                <a:cs typeface="Arial"/>
+              </a:defRPr>
+            </a:defPPr>
+            <a:lvl1pPr>
+              <a:defRPr sz="1800" b="0">
+                <a:solidFill>
+                  <a:srgbClr val="20322B"/>
+                </a:solidFill>
+                <a:latin typeface="Arial"/>
+                <a:ea typeface="Arial"/>
+                <a:cs typeface="Arial"/>
+              </a:defRPr>
+            </a:lvl1pPr>
+            <a:lvl2pPr>
+              <a:defRPr sz="1800" b="0">
+                <a:solidFill>
+                  <a:srgbClr val="20322B"/>
+                </a:solidFill>
+                <a:latin typeface="Arial"/>
+                <a:ea typeface="Arial"/>
+                <a:cs typeface="Arial"/>
+              </a:defRPr>
+            </a:lvl2pPr>
+            <a:lvl3pPr>
+              <a:defRPr sz="1800" b="0">
+                <a:solidFill>
+                  <a:srgbClr val="20322B"/>
+                </a:solidFill>
+                <a:latin typeface="Arial"/>
+                <a:ea typeface="Arial"/>
+                <a:cs typeface="Arial"/>
+              </a:defRPr>
+            </a:lvl3pPr>
+            <a:lvl4pPr>
+              <a:defRPr sz="1800" b="0">
+                <a:solidFill>
+                  <a:srgbClr val="20322B"/>
+                </a:solidFill>
+                <a:latin typeface="Arial"/>
+                <a:ea typeface="Arial"/>
+                <a:cs typeface="Arial"/>
+              </a:defRPr>
+            </a:lvl4pPr>
+            <a:lvl5pPr>
+              <a:defRPr sz="1800" b="0">
+                <a:solidFill>
+                  <a:srgbClr val="20322B"/>
+                </a:solidFill>
+                <a:latin typeface="Arial"/>
+                <a:ea typeface="Arial"/>
+                <a:cs typeface="Arial"/>
+              </a:defRPr>
+            </a:lvl5pPr>
+            <a:lvl6pPr>
+              <a:defRPr sz="1800" b="0">
+                <a:solidFill>
+                  <a:srgbClr val="20322B"/>
+                </a:solidFill>
+                <a:latin typeface="Arial"/>
+                <a:ea typeface="Arial"/>
+                <a:cs typeface="Arial"/>
+              </a:defRPr>
+            </a:lvl6pPr>
+            <a:lvl7pPr>
+              <a:defRPr sz="1800" b="0">
+                <a:solidFill>
+                  <a:srgbClr val="20322B"/>
+                </a:solidFill>
+                <a:latin typeface="Arial"/>
+                <a:ea typeface="Arial"/>
+                <a:cs typeface="Arial"/>
+              </a:defRPr>
+            </a:lvl7pPr>
+            <a:lvl8pPr>
+              <a:defRPr sz="1800" b="0">
+                <a:solidFill>
+                  <a:srgbClr val="20322B"/>
+                </a:solidFill>
+                <a:latin typeface="Arial"/>
+                <a:ea typeface="Arial"/>
+                <a:cs typeface="Arial"/>
+              </a:defRPr>
+            </a:lvl8pPr>
+            <a:lvl9pPr>
+              <a:defRPr sz="1800" b="0">
+                <a:solidFill>
+                  <a:srgbClr val="20322B"/>
+                </a:solidFill>
+                <a:latin typeface="Arial"/>
+                <a:ea typeface="Arial"/>
+                <a:cs typeface="Arial"/>
+              </a:defRPr>
+            </a:lvl9pPr>
+          </a:lstStyle>
+          <a:p xmlns:a="http://schemas.openxmlformats.org/drawingml/2006/main">
+            <a:pPr>
+              <a:defRPr sz="1800" b="0">
+                <a:solidFill>
+                  <a:srgbClr val="20322B"/>
+                </a:solidFill>
+                <a:latin typeface="Arial"/>
+                <a:ea typeface="Arial"/>
+                <a:cs typeface="Arial"/>
+              </a:defRPr>
+            </a:pPr>
+            <a:r>
+              <a:rPr sz="1800" b="0">
+                <a:solidFill>
+                  <a:srgbClr val="20322B"/>
+                </a:solidFill>
+                <a:latin typeface="Arial"/>
+                <a:ea typeface="Arial"/>
+                <a:cs typeface="Arial"/>
+              </a:rPr>
+              <a:t>Post dates and budget. Owners recommend an item before any booking.</a:t>
+            </a:r>
+          </a:p>
+        </p:txBody>
+      </p:sp>
+      <p:sp>
+        <p:nvSpPr>
+          <p:cNvPr id="16" name="">
+            <a:extLst xmlns:a="http://schemas.openxmlformats.org/drawingml/2006/main">
+              <a:ext uri="{FF2B5EF4-FFF2-40B4-BE49-F238E27FC236}">
+                <a16:creationId xmlns:a16="http://schemas.microsoft.com/office/drawing/2014/main" id="{864BF1A1-175E-4E52-BD4F-209379458F3E}"/>
+              </a:ext>
+            </a:extLst>
+          </p:cNvPr>
+          <p:cNvSpPr>
+            <a:spLocks xmlns:a="http://schemas.openxmlformats.org/drawingml/2006/main" noGrp="1"/>
+          </p:cNvSpPr>
+          <p:nvPr/>
+        </p:nvSpPr>
+        <p:spPr>
+          <a:xfrm xmlns:a="http://schemas.openxmlformats.org/drawingml/2006/main">
+            <a:off x="2924175" y="5057775"/>
+            <a:ext cx="3095625" cy="342900"/>
+          </a:xfrm>
+          <a:prstGeom xmlns:a="http://schemas.openxmlformats.org/drawingml/2006/main" prst="rect">
+            <a:avLst/>
+          </a:prstGeom>
+          <a:noFill xmlns:a="http://schemas.openxmlformats.org/drawingml/2006/main"/>
+          <a:ln xmlns:a="http://schemas.openxmlformats.org/drawingml/2006/main" w="0">
+            <a:noFill/>
+          </a:ln>
+        </p:spPr>
+        <p:txBody>
+          <a:bodyPr xmlns:a="http://schemas.openxmlformats.org/drawingml/2006/main">
+            <a:noAutofit/>
+          </a:bodyPr>
+          <a:lstStyle xmlns:a="http://schemas.openxmlformats.org/drawingml/2006/main">
+            <a:defPPr>
+              <a:defRPr sz="1875" b="1">
+                <a:solidFill>
+                  <a:srgbClr val="20322B"/>
+                </a:solidFill>
+                <a:latin typeface="Arial"/>
+                <a:ea typeface="Arial"/>
+                <a:cs typeface="Arial"/>
+              </a:defRPr>
+            </a:defPPr>
+            <a:lvl1pPr>
+              <a:defRPr sz="1875" b="1">
+                <a:solidFill>
+                  <a:srgbClr val="20322B"/>
+                </a:solidFill>
+                <a:latin typeface="Arial"/>
+                <a:ea typeface="Arial"/>
+                <a:cs typeface="Arial"/>
+              </a:defRPr>
+            </a:lvl1pPr>
+            <a:lvl2pPr>
+              <a:defRPr sz="1875" b="1">
+                <a:solidFill>
+                  <a:srgbClr val="20322B"/>
+                </a:solidFill>
+                <a:latin typeface="Arial"/>
+                <a:ea typeface="Arial"/>
+                <a:cs typeface="Arial"/>
+              </a:defRPr>
+            </a:lvl2pPr>
+            <a:lvl3pPr>
+              <a:defRPr sz="1875" b="1">
+                <a:solidFill>
+                  <a:srgbClr val="20322B"/>
+                </a:solidFill>
+                <a:latin typeface="Arial"/>
+                <a:ea typeface="Arial"/>
+                <a:cs typeface="Arial"/>
+              </a:defRPr>
+            </a:lvl3pPr>
+            <a:lvl4pPr>
+              <a:defRPr sz="1875" b="1">
+                <a:solidFill>
+                  <a:srgbClr val="20322B"/>
+                </a:solidFill>
+                <a:latin typeface="Arial"/>
+                <a:ea typeface="Arial"/>
+                <a:cs typeface="Arial"/>
+              </a:defRPr>
+            </a:lvl4pPr>
+            <a:lvl5pPr>
+              <a:defRPr sz="1875" b="1">
+                <a:solidFill>
+                  <a:srgbClr val="20322B"/>
+                </a:solidFill>
+                <a:latin typeface="Arial"/>
+                <a:ea typeface="Arial"/>
+                <a:cs typeface="Arial"/>
+              </a:defRPr>
+            </a:lvl5pPr>
+            <a:lvl6pPr>
+              <a:defRPr sz="1875" b="1">
+                <a:solidFill>
+                  <a:srgbClr val="20322B"/>
+                </a:solidFill>
+                <a:latin typeface="Arial"/>
+                <a:ea typeface="Arial"/>
+                <a:cs typeface="Arial"/>
+              </a:defRPr>
+            </a:lvl6pPr>
+            <a:lvl7pPr>
+              <a:defRPr sz="1875" b="1">
+                <a:solidFill>
+                  <a:srgbClr val="20322B"/>
+                </a:solidFill>
+                <a:latin typeface="Arial"/>
+                <a:ea typeface="Arial"/>
+                <a:cs typeface="Arial"/>
+              </a:defRPr>
+            </a:lvl7pPr>
+            <a:lvl8pPr>
+              <a:defRPr sz="1875" b="1">
+                <a:solidFill>
+                  <a:srgbClr val="20322B"/>
+                </a:solidFill>
+                <a:latin typeface="Arial"/>
+                <a:ea typeface="Arial"/>
+                <a:cs typeface="Arial"/>
+              </a:defRPr>
+            </a:lvl8pPr>
+            <a:lvl9pPr>
+              <a:defRPr sz="1875" b="1">
+                <a:solidFill>
+                  <a:srgbClr val="20322B"/>
+                </a:solidFill>
+                <a:latin typeface="Arial"/>
+                <a:ea typeface="Arial"/>
+                <a:cs typeface="Arial"/>
+              </a:defRPr>
+            </a:lvl9pPr>
+          </a:lstStyle>
+          <a:p xmlns:a="http://schemas.openxmlformats.org/drawingml/2006/main">
+            <a:pPr>
+              <a:defRPr sz="1875" b="1">
+                <a:solidFill>
+                  <a:srgbClr val="20322B"/>
+                </a:solidFill>
+                <a:latin typeface="Arial"/>
+                <a:ea typeface="Arial"/>
+                <a:cs typeface="Arial"/>
+              </a:defRPr>
+            </a:pPr>
+            <a:r>
+              <a:rPr sz="1875" b="1">
+                <a:solidFill>
+                  <a:srgbClr val="20322B"/>
+                </a:solidFill>
+                <a:latin typeface="Arial"/>
+                <a:ea typeface="Arial"/>
+                <a:cs typeface="Arial"/>
+              </a:rPr>
+              <a:t>Optional location</a:t>
+            </a:r>
+          </a:p>
+        </p:txBody>
+      </p:sp>
+      <p:sp>
+        <p:nvSpPr>
+          <p:cNvPr id="17" name="">
+            <a:extLst xmlns:a="http://schemas.openxmlformats.org/drawingml/2006/main">
+              <a:ext uri="{FF2B5EF4-FFF2-40B4-BE49-F238E27FC236}">
+                <a16:creationId xmlns:a16="http://schemas.microsoft.com/office/drawing/2014/main" id="{381286A4-64F2-4517-A30C-2639594038C4}"/>
+              </a:ext>
+            </a:extLst>
+          </p:cNvPr>
+          <p:cNvSpPr>
+            <a:spLocks xmlns:a="http://schemas.openxmlformats.org/drawingml/2006/main" noGrp="1"/>
+          </p:cNvSpPr>
+          <p:nvPr/>
+        </p:nvSpPr>
+        <p:spPr>
+          <a:xfrm xmlns:a="http://schemas.openxmlformats.org/drawingml/2006/main">
+            <a:off x="2924175" y="5486400"/>
+            <a:ext cx="3095625" cy="733425"/>
+          </a:xfrm>
+          <a:prstGeom xmlns:a="http://schemas.openxmlformats.org/drawingml/2006/main" prst="rect">
+            <a:avLst/>
+          </a:prstGeom>
+          <a:noFill xmlns:a="http://schemas.openxmlformats.org/drawingml/2006/main"/>
+          <a:ln xmlns:a="http://schemas.openxmlformats.org/drawingml/2006/main" w="0">
+            <a:noFill/>
+          </a:ln>
+        </p:spPr>
+        <p:txBody>
+          <a:bodyPr xmlns:a="http://schemas.openxmlformats.org/drawingml/2006/main">
+            <a:noAutofit/>
+          </a:bodyPr>
+          <a:lstStyle xmlns:a="http://schemas.openxmlformats.org/drawingml/2006/main">
+            <a:defPPr>
+              <a:defRPr sz="1800" b="0">
+                <a:solidFill>
+                  <a:srgbClr val="20322B"/>
+                </a:solidFill>
+                <a:latin typeface="Arial"/>
+                <a:ea typeface="Arial"/>
+                <a:cs typeface="Arial"/>
+              </a:defRPr>
+            </a:defPPr>
+            <a:lvl1pPr>
+              <a:defRPr sz="1800" b="0">
+                <a:solidFill>
+                  <a:srgbClr val="20322B"/>
+                </a:solidFill>
+                <a:latin typeface="Arial"/>
+                <a:ea typeface="Arial"/>
+                <a:cs typeface="Arial"/>
+              </a:defRPr>
+            </a:lvl1pPr>
+            <a:lvl2pPr>
+              <a:defRPr sz="1800" b="0">
+                <a:solidFill>
+                  <a:srgbClr val="20322B"/>
+                </a:solidFill>
+                <a:latin typeface="Arial"/>
+                <a:ea typeface="Arial"/>
+                <a:cs typeface="Arial"/>
+              </a:defRPr>
+            </a:lvl2pPr>
+            <a:lvl3pPr>
+              <a:defRPr sz="1800" b="0">
+                <a:solidFill>
+                  <a:srgbClr val="20322B"/>
+                </a:solidFill>
+                <a:latin typeface="Arial"/>
+                <a:ea typeface="Arial"/>
+                <a:cs typeface="Arial"/>
+              </a:defRPr>
+            </a:lvl3pPr>
+            <a:lvl4pPr>
+              <a:defRPr sz="1800" b="0">
+                <a:solidFill>
+                  <a:srgbClr val="20322B"/>
+                </a:solidFill>
+                <a:latin typeface="Arial"/>
+                <a:ea typeface="Arial"/>
+                <a:cs typeface="Arial"/>
+              </a:defRPr>
+            </a:lvl4pPr>
+            <a:lvl5pPr>
+              <a:defRPr sz="1800" b="0">
+                <a:solidFill>
+                  <a:srgbClr val="20322B"/>
+                </a:solidFill>
+                <a:latin typeface="Arial"/>
+                <a:ea typeface="Arial"/>
+                <a:cs typeface="Arial"/>
+              </a:defRPr>
+            </a:lvl5pPr>
+            <a:lvl6pPr>
+              <a:defRPr sz="1800" b="0">
+                <a:solidFill>
+                  <a:srgbClr val="20322B"/>
+                </a:solidFill>
+                <a:latin typeface="Arial"/>
+                <a:ea typeface="Arial"/>
+                <a:cs typeface="Arial"/>
+              </a:defRPr>
+            </a:lvl6pPr>
+            <a:lvl7pPr>
+              <a:defRPr sz="1800" b="0">
+                <a:solidFill>
+                  <a:srgbClr val="20322B"/>
+                </a:solidFill>
+                <a:latin typeface="Arial"/>
+                <a:ea typeface="Arial"/>
+                <a:cs typeface="Arial"/>
+              </a:defRPr>
+            </a:lvl7pPr>
+            <a:lvl8pPr>
+              <a:defRPr sz="1800" b="0">
+                <a:solidFill>
+                  <a:srgbClr val="20322B"/>
+                </a:solidFill>
+                <a:latin typeface="Arial"/>
+                <a:ea typeface="Arial"/>
+                <a:cs typeface="Arial"/>
+              </a:defRPr>
+            </a:lvl8pPr>
+            <a:lvl9pPr>
+              <a:defRPr sz="1800" b="0">
+                <a:solidFill>
+                  <a:srgbClr val="20322B"/>
+                </a:solidFill>
+                <a:latin typeface="Arial"/>
+                <a:ea typeface="Arial"/>
+                <a:cs typeface="Arial"/>
+              </a:defRPr>
+            </a:lvl9pPr>
+          </a:lstStyle>
+          <a:p xmlns:a="http://schemas.openxmlformats.org/drawingml/2006/main">
+            <a:pPr>
+              <a:defRPr sz="1800" b="0">
+                <a:solidFill>
+                  <a:srgbClr val="20322B"/>
+                </a:solidFill>
+                <a:latin typeface="Arial"/>
+                <a:ea typeface="Arial"/>
+                <a:cs typeface="Arial"/>
+              </a:defRPr>
+            </a:pPr>
+            <a:r>
+              <a:rPr sz="1800" b="0">
+                <a:solidFill>
+                  <a:srgbClr val="20322B"/>
+                </a:solidFill>
+                <a:latin typeface="Arial"/>
+                <a:ea typeface="Arial"/>
+                <a:cs typeface="Arial"/>
+              </a:rPr>
+              <a:t>Agree a public handoff. Maps stay collapsed.</a:t>
             </a:r>
           </a:p>
         </p:txBody>
@@ -13020,6 +14240,7 @@
               </a:defRPr>
             </a:defPPr>
             <a:lvl1pPr>
+              <a:buNone/>
               <a:defRPr sz="1500" b="1">
                 <a:solidFill>
                   <a:srgbClr val="28634E"/>
@@ -13030,6 +14251,7 @@
               </a:defRPr>
             </a:lvl1pPr>
             <a:lvl2pPr>
+              <a:buNone/>
               <a:defRPr sz="1500" b="1">
                 <a:solidFill>
                   <a:srgbClr val="28634E"/>
@@ -13040,6 +14262,7 @@
               </a:defRPr>
             </a:lvl2pPr>
             <a:lvl3pPr>
+              <a:buNone/>
               <a:defRPr sz="1500" b="1">
                 <a:solidFill>
                   <a:srgbClr val="28634E"/>
@@ -13050,6 +14273,7 @@
               </a:defRPr>
             </a:lvl3pPr>
             <a:lvl4pPr>
+              <a:buNone/>
               <a:defRPr sz="1500" b="1">
                 <a:solidFill>
                   <a:srgbClr val="28634E"/>
@@ -13060,6 +14284,7 @@
               </a:defRPr>
             </a:lvl4pPr>
             <a:lvl5pPr>
+              <a:buNone/>
               <a:defRPr sz="1500" b="1">
                 <a:solidFill>
                   <a:srgbClr val="28634E"/>
@@ -13070,6 +14295,7 @@
               </a:defRPr>
             </a:lvl5pPr>
             <a:lvl6pPr>
+              <a:buNone/>
               <a:defRPr sz="1500" b="1">
                 <a:solidFill>
                   <a:srgbClr val="28634E"/>
@@ -13080,6 +14306,7 @@
               </a:defRPr>
             </a:lvl6pPr>
             <a:lvl7pPr>
+              <a:buNone/>
               <a:defRPr sz="1500" b="1">
                 <a:solidFill>
                   <a:srgbClr val="28634E"/>
@@ -13090,6 +14317,7 @@
               </a:defRPr>
             </a:lvl7pPr>
             <a:lvl8pPr>
+              <a:buNone/>
               <a:defRPr sz="1500" b="1">
                 <a:solidFill>
                   <a:srgbClr val="28634E"/>
@@ -13100,6 +14328,7 @@
               </a:defRPr>
             </a:lvl8pPr>
             <a:lvl9pPr>
+              <a:buNone/>
               <a:defRPr sz="1500" b="1">
                 <a:solidFill>
                   <a:srgbClr val="28634E"/>
@@ -13112,6 +14341,7 @@
           </a:lstStyle>
           <a:p xmlns:a="http://schemas.openxmlformats.org/drawingml/2006/main">
             <a:pPr>
+              <a:buNone/>
               <a:defRPr sz="1500" b="1">
                 <a:solidFill>
                   <a:srgbClr val="28634E"/>
@@ -13178,6 +14408,7 @@
               </a:defRPr>
             </a:defPPr>
             <a:lvl1pPr>
+              <a:buNone/>
               <a:defRPr sz="3450" b="1">
                 <a:solidFill>
                   <a:srgbClr val="20322B"/>
@@ -13188,6 +14419,7 @@
               </a:defRPr>
             </a:lvl1pPr>
             <a:lvl2pPr>
+              <a:buNone/>
               <a:defRPr sz="3450" b="1">
                 <a:solidFill>
                   <a:srgbClr val="20322B"/>
@@ -13198,6 +14430,7 @@
               </a:defRPr>
             </a:lvl2pPr>
             <a:lvl3pPr>
+              <a:buNone/>
               <a:defRPr sz="3450" b="1">
                 <a:solidFill>
                   <a:srgbClr val="20322B"/>
@@ -13208,6 +14441,7 @@
               </a:defRPr>
             </a:lvl3pPr>
             <a:lvl4pPr>
+              <a:buNone/>
               <a:defRPr sz="3450" b="1">
                 <a:solidFill>
                   <a:srgbClr val="20322B"/>
@@ -13218,6 +14452,7 @@
               </a:defRPr>
             </a:lvl4pPr>
             <a:lvl5pPr>
+              <a:buNone/>
               <a:defRPr sz="3450" b="1">
                 <a:solidFill>
                   <a:srgbClr val="20322B"/>
@@ -13228,6 +14463,7 @@
               </a:defRPr>
             </a:lvl5pPr>
             <a:lvl6pPr>
+              <a:buNone/>
               <a:defRPr sz="3450" b="1">
                 <a:solidFill>
                   <a:srgbClr val="20322B"/>
@@ -13238,6 +14474,7 @@
               </a:defRPr>
             </a:lvl6pPr>
             <a:lvl7pPr>
+              <a:buNone/>
               <a:defRPr sz="3450" b="1">
                 <a:solidFill>
                   <a:srgbClr val="20322B"/>
@@ -13248,6 +14485,7 @@
               </a:defRPr>
             </a:lvl7pPr>
             <a:lvl8pPr>
+              <a:buNone/>
               <a:defRPr sz="3450" b="1">
                 <a:solidFill>
                   <a:srgbClr val="20322B"/>
@@ -13258,6 +14496,7 @@
               </a:defRPr>
             </a:lvl8pPr>
             <a:lvl9pPr>
+              <a:buNone/>
               <a:defRPr sz="3450" b="1">
                 <a:solidFill>
                   <a:srgbClr val="20322B"/>
@@ -13270,6 +14509,7 @@
           </a:lstStyle>
           <a:p xmlns:a="http://schemas.openxmlformats.org/drawingml/2006/main">
             <a:pPr>
+              <a:buNone/>
               <a:defRPr sz="3450" b="1">
                 <a:solidFill>
                   <a:srgbClr val="20322B"/>
@@ -13336,6 +14576,7 @@
               </a:defRPr>
             </a:defPPr>
             <a:lvl1pPr>
+              <a:buNone/>
               <a:defRPr sz="1350" b="0">
                 <a:solidFill>
                   <a:srgbClr val="58635E"/>
@@ -13346,6 +14587,7 @@
               </a:defRPr>
             </a:lvl1pPr>
             <a:lvl2pPr>
+              <a:buNone/>
               <a:defRPr sz="1350" b="0">
                 <a:solidFill>
                   <a:srgbClr val="58635E"/>
@@ -13356,6 +14598,7 @@
               </a:defRPr>
             </a:lvl2pPr>
             <a:lvl3pPr>
+              <a:buNone/>
               <a:defRPr sz="1350" b="0">
                 <a:solidFill>
                   <a:srgbClr val="58635E"/>
@@ -13366,6 +14609,7 @@
               </a:defRPr>
             </a:lvl3pPr>
             <a:lvl4pPr>
+              <a:buNone/>
               <a:defRPr sz="1350" b="0">
                 <a:solidFill>
                   <a:srgbClr val="58635E"/>
@@ -13376,6 +14620,7 @@
               </a:defRPr>
             </a:lvl4pPr>
             <a:lvl5pPr>
+              <a:buNone/>
               <a:defRPr sz="1350" b="0">
                 <a:solidFill>
                   <a:srgbClr val="58635E"/>
@@ -13386,6 +14631,7 @@
               </a:defRPr>
             </a:lvl5pPr>
             <a:lvl6pPr>
+              <a:buNone/>
               <a:defRPr sz="1350" b="0">
                 <a:solidFill>
                   <a:srgbClr val="58635E"/>
@@ -13396,6 +14642,7 @@
               </a:defRPr>
             </a:lvl6pPr>
             <a:lvl7pPr>
+              <a:buNone/>
               <a:defRPr sz="1350" b="0">
                 <a:solidFill>
                   <a:srgbClr val="58635E"/>
@@ -13406,6 +14653,7 @@
               </a:defRPr>
             </a:lvl7pPr>
             <a:lvl8pPr>
+              <a:buNone/>
               <a:defRPr sz="1350" b="0">
                 <a:solidFill>
                   <a:srgbClr val="58635E"/>
@@ -13416,6 +14664,7 @@
               </a:defRPr>
             </a:lvl8pPr>
             <a:lvl9pPr>
+              <a:buNone/>
               <a:defRPr sz="1350" b="0">
                 <a:solidFill>
                   <a:srgbClr val="58635E"/>
@@ -13428,6 +14677,7 @@
           </a:lstStyle>
           <a:p xmlns:a="http://schemas.openxmlformats.org/drawingml/2006/main">
             <a:pPr>
+              <a:buNone/>
               <a:defRPr sz="1350" b="0">
                 <a:solidFill>
                   <a:srgbClr val="58635E"/>
@@ -13456,7 +14706,7 @@
           <p:cNvPr id="4" name="">
             <a:extLst xmlns:a="http://schemas.openxmlformats.org/drawingml/2006/main">
               <a:ext uri="{FF2B5EF4-FFF2-40B4-BE49-F238E27FC236}">
-                <a16:creationId xmlns:a16="http://schemas.microsoft.com/office/drawing/2014/main" id="{826C52C0-16CA-46C0-94B0-01DF2C7664B3}"/>
+                <a16:creationId xmlns:a16="http://schemas.microsoft.com/office/drawing/2014/main" id="{8698DA35-3A59-4919-AE95-905DD52FEFFD}"/>
               </a:ext>
             </a:extLst>
           </p:cNvPr>
@@ -14357,6 +15607,7 @@
               </a:defRPr>
             </a:defPPr>
             <a:lvl1pPr>
+              <a:buNone/>
               <a:defRPr sz="1875" b="1">
                 <a:solidFill>
                   <a:srgbClr val="20322B"/>
@@ -14367,6 +15618,7 @@
               </a:defRPr>
             </a:lvl1pPr>
             <a:lvl2pPr>
+              <a:buNone/>
               <a:defRPr sz="1875" b="1">
                 <a:solidFill>
                   <a:srgbClr val="20322B"/>
@@ -14377,6 +15629,7 @@
               </a:defRPr>
             </a:lvl2pPr>
             <a:lvl3pPr>
+              <a:buNone/>
               <a:defRPr sz="1875" b="1">
                 <a:solidFill>
                   <a:srgbClr val="20322B"/>
@@ -14387,6 +15640,7 @@
               </a:defRPr>
             </a:lvl3pPr>
             <a:lvl4pPr>
+              <a:buNone/>
               <a:defRPr sz="1875" b="1">
                 <a:solidFill>
                   <a:srgbClr val="20322B"/>
@@ -14397,6 +15651,7 @@
               </a:defRPr>
             </a:lvl4pPr>
             <a:lvl5pPr>
+              <a:buNone/>
               <a:defRPr sz="1875" b="1">
                 <a:solidFill>
                   <a:srgbClr val="20322B"/>
@@ -14407,6 +15662,7 @@
               </a:defRPr>
             </a:lvl5pPr>
             <a:lvl6pPr>
+              <a:buNone/>
               <a:defRPr sz="1875" b="1">
                 <a:solidFill>
                   <a:srgbClr val="20322B"/>
@@ -14417,6 +15673,7 @@
               </a:defRPr>
             </a:lvl6pPr>
             <a:lvl7pPr>
+              <a:buNone/>
               <a:defRPr sz="1875" b="1">
                 <a:solidFill>
                   <a:srgbClr val="20322B"/>
@@ -14427,6 +15684,7 @@
               </a:defRPr>
             </a:lvl7pPr>
             <a:lvl8pPr>
+              <a:buNone/>
               <a:defRPr sz="1875" b="1">
                 <a:solidFill>
                   <a:srgbClr val="20322B"/>
@@ -14437,6 +15695,7 @@
               </a:defRPr>
             </a:lvl8pPr>
             <a:lvl9pPr>
+              <a:buNone/>
               <a:defRPr sz="1875" b="1">
                 <a:solidFill>
                   <a:srgbClr val="20322B"/>
@@ -14449,6 +15708,7 @@
           </a:lstStyle>
           <a:p xmlns:a="http://schemas.openxmlformats.org/drawingml/2006/main">
             <a:pPr>
+              <a:buNone/>
               <a:defRPr sz="1875" b="1">
                 <a:solidFill>
                   <a:srgbClr val="20322B"/>
@@ -14515,6 +15775,7 @@
               </a:defRPr>
             </a:defPPr>
             <a:lvl1pPr>
+              <a:buNone/>
               <a:defRPr sz="1425" b="0">
                 <a:solidFill>
                   <a:srgbClr val="58635E"/>
@@ -14525,6 +15786,7 @@
               </a:defRPr>
             </a:lvl1pPr>
             <a:lvl2pPr>
+              <a:buNone/>
               <a:defRPr sz="1425" b="0">
                 <a:solidFill>
                   <a:srgbClr val="58635E"/>
@@ -14535,6 +15797,7 @@
               </a:defRPr>
             </a:lvl2pPr>
             <a:lvl3pPr>
+              <a:buNone/>
               <a:defRPr sz="1425" b="0">
                 <a:solidFill>
                   <a:srgbClr val="58635E"/>
@@ -14545,6 +15808,7 @@
               </a:defRPr>
             </a:lvl3pPr>
             <a:lvl4pPr>
+              <a:buNone/>
               <a:defRPr sz="1425" b="0">
                 <a:solidFill>
                   <a:srgbClr val="58635E"/>
@@ -14555,6 +15819,7 @@
               </a:defRPr>
             </a:lvl4pPr>
             <a:lvl5pPr>
+              <a:buNone/>
               <a:defRPr sz="1425" b="0">
                 <a:solidFill>
                   <a:srgbClr val="58635E"/>
@@ -14565,6 +15830,7 @@
               </a:defRPr>
             </a:lvl5pPr>
             <a:lvl6pPr>
+              <a:buNone/>
               <a:defRPr sz="1425" b="0">
                 <a:solidFill>
                   <a:srgbClr val="58635E"/>
@@ -14575,6 +15841,7 @@
               </a:defRPr>
             </a:lvl6pPr>
             <a:lvl7pPr>
+              <a:buNone/>
               <a:defRPr sz="1425" b="0">
                 <a:solidFill>
                   <a:srgbClr val="58635E"/>
@@ -14585,6 +15852,7 @@
               </a:defRPr>
             </a:lvl7pPr>
             <a:lvl8pPr>
+              <a:buNone/>
               <a:defRPr sz="1425" b="0">
                 <a:solidFill>
                   <a:srgbClr val="58635E"/>
@@ -14595,6 +15863,7 @@
               </a:defRPr>
             </a:lvl8pPr>
             <a:lvl9pPr>
+              <a:buNone/>
               <a:defRPr sz="1425" b="0">
                 <a:solidFill>
                   <a:srgbClr val="58635E"/>
@@ -14607,6 +15876,7 @@
           </a:lstStyle>
           <a:p xmlns:a="http://schemas.openxmlformats.org/drawingml/2006/main">
             <a:pPr>
+              <a:buNone/>
               <a:defRPr sz="1425" b="0">
                 <a:solidFill>
                   <a:srgbClr val="58635E"/>
@@ -14702,6 +15972,7 @@
               </a:defRPr>
             </a:defPPr>
             <a:lvl1pPr>
+              <a:buNone/>
               <a:defRPr sz="1500" b="1">
                 <a:solidFill>
                   <a:srgbClr val="28634E"/>
@@ -14712,6 +15983,7 @@
               </a:defRPr>
             </a:lvl1pPr>
             <a:lvl2pPr>
+              <a:buNone/>
               <a:defRPr sz="1500" b="1">
                 <a:solidFill>
                   <a:srgbClr val="28634E"/>
@@ -14722,6 +15994,7 @@
               </a:defRPr>
             </a:lvl2pPr>
             <a:lvl3pPr>
+              <a:buNone/>
               <a:defRPr sz="1500" b="1">
                 <a:solidFill>
                   <a:srgbClr val="28634E"/>
@@ -14732,6 +16005,7 @@
               </a:defRPr>
             </a:lvl3pPr>
             <a:lvl4pPr>
+              <a:buNone/>
               <a:defRPr sz="1500" b="1">
                 <a:solidFill>
                   <a:srgbClr val="28634E"/>
@@ -14742,6 +16016,7 @@
               </a:defRPr>
             </a:lvl4pPr>
             <a:lvl5pPr>
+              <a:buNone/>
               <a:defRPr sz="1500" b="1">
                 <a:solidFill>
                   <a:srgbClr val="28634E"/>
@@ -14752,6 +16027,7 @@
               </a:defRPr>
             </a:lvl5pPr>
             <a:lvl6pPr>
+              <a:buNone/>
               <a:defRPr sz="1500" b="1">
                 <a:solidFill>
                   <a:srgbClr val="28634E"/>
@@ -14762,6 +16038,7 @@
               </a:defRPr>
             </a:lvl6pPr>
             <a:lvl7pPr>
+              <a:buNone/>
               <a:defRPr sz="1500" b="1">
                 <a:solidFill>
                   <a:srgbClr val="28634E"/>
@@ -14772,6 +16049,7 @@
               </a:defRPr>
             </a:lvl7pPr>
             <a:lvl8pPr>
+              <a:buNone/>
               <a:defRPr sz="1500" b="1">
                 <a:solidFill>
                   <a:srgbClr val="28634E"/>
@@ -14782,6 +16060,7 @@
               </a:defRPr>
             </a:lvl8pPr>
             <a:lvl9pPr>
+              <a:buNone/>
               <a:defRPr sz="1500" b="1">
                 <a:solidFill>
                   <a:srgbClr val="28634E"/>
@@ -14794,6 +16073,7 @@
           </a:lstStyle>
           <a:p xmlns:a="http://schemas.openxmlformats.org/drawingml/2006/main">
             <a:pPr>
+              <a:buNone/>
               <a:defRPr sz="1500" b="1">
                 <a:solidFill>
                   <a:srgbClr val="28634E"/>
@@ -14860,6 +16140,7 @@
               </a:defRPr>
             </a:defPPr>
             <a:lvl1pPr>
+              <a:buNone/>
               <a:defRPr sz="3450" b="1">
                 <a:solidFill>
                   <a:srgbClr val="20322B"/>
@@ -14870,6 +16151,7 @@
               </a:defRPr>
             </a:lvl1pPr>
             <a:lvl2pPr>
+              <a:buNone/>
               <a:defRPr sz="3450" b="1">
                 <a:solidFill>
                   <a:srgbClr val="20322B"/>
@@ -14880,6 +16162,7 @@
               </a:defRPr>
             </a:lvl2pPr>
             <a:lvl3pPr>
+              <a:buNone/>
               <a:defRPr sz="3450" b="1">
                 <a:solidFill>
                   <a:srgbClr val="20322B"/>
@@ -14890,6 +16173,7 @@
               </a:defRPr>
             </a:lvl3pPr>
             <a:lvl4pPr>
+              <a:buNone/>
               <a:defRPr sz="3450" b="1">
                 <a:solidFill>
                   <a:srgbClr val="20322B"/>
@@ -14900,6 +16184,7 @@
               </a:defRPr>
             </a:lvl4pPr>
             <a:lvl5pPr>
+              <a:buNone/>
               <a:defRPr sz="3450" b="1">
                 <a:solidFill>
                   <a:srgbClr val="20322B"/>
@@ -14910,6 +16195,7 @@
               </a:defRPr>
             </a:lvl5pPr>
             <a:lvl6pPr>
+              <a:buNone/>
               <a:defRPr sz="3450" b="1">
                 <a:solidFill>
                   <a:srgbClr val="20322B"/>
@@ -14920,6 +16206,7 @@
               </a:defRPr>
             </a:lvl6pPr>
             <a:lvl7pPr>
+              <a:buNone/>
               <a:defRPr sz="3450" b="1">
                 <a:solidFill>
                   <a:srgbClr val="20322B"/>
@@ -14930,6 +16217,7 @@
               </a:defRPr>
             </a:lvl7pPr>
             <a:lvl8pPr>
+              <a:buNone/>
               <a:defRPr sz="3450" b="1">
                 <a:solidFill>
                   <a:srgbClr val="20322B"/>
@@ -14940,6 +16228,7 @@
               </a:defRPr>
             </a:lvl8pPr>
             <a:lvl9pPr>
+              <a:buNone/>
               <a:defRPr sz="3450" b="1">
                 <a:solidFill>
                   <a:srgbClr val="20322B"/>
@@ -14952,6 +16241,7 @@
           </a:lstStyle>
           <a:p xmlns:a="http://schemas.openxmlformats.org/drawingml/2006/main">
             <a:pPr>
+              <a:buNone/>
               <a:defRPr sz="3450" b="1">
                 <a:solidFill>
                   <a:srgbClr val="20322B"/>
@@ -15018,6 +16308,7 @@
               </a:defRPr>
             </a:defPPr>
             <a:lvl1pPr>
+              <a:buNone/>
               <a:defRPr sz="1350" b="0">
                 <a:solidFill>
                   <a:srgbClr val="58635E"/>
@@ -15028,6 +16319,7 @@
               </a:defRPr>
             </a:lvl1pPr>
             <a:lvl2pPr>
+              <a:buNone/>
               <a:defRPr sz="1350" b="0">
                 <a:solidFill>
                   <a:srgbClr val="58635E"/>
@@ -15038,6 +16330,7 @@
               </a:defRPr>
             </a:lvl2pPr>
             <a:lvl3pPr>
+              <a:buNone/>
               <a:defRPr sz="1350" b="0">
                 <a:solidFill>
                   <a:srgbClr val="58635E"/>
@@ -15048,6 +16341,7 @@
               </a:defRPr>
             </a:lvl3pPr>
             <a:lvl4pPr>
+              <a:buNone/>
               <a:defRPr sz="1350" b="0">
                 <a:solidFill>
                   <a:srgbClr val="58635E"/>
@@ -15058,6 +16352,7 @@
               </a:defRPr>
             </a:lvl4pPr>
             <a:lvl5pPr>
+              <a:buNone/>
               <a:defRPr sz="1350" b="0">
                 <a:solidFill>
                   <a:srgbClr val="58635E"/>
@@ -15068,6 +16363,7 @@
               </a:defRPr>
             </a:lvl5pPr>
             <a:lvl6pPr>
+              <a:buNone/>
               <a:defRPr sz="1350" b="0">
                 <a:solidFill>
                   <a:srgbClr val="58635E"/>
@@ -15078,6 +16374,7 @@
               </a:defRPr>
             </a:lvl6pPr>
             <a:lvl7pPr>
+              <a:buNone/>
               <a:defRPr sz="1350" b="0">
                 <a:solidFill>
                   <a:srgbClr val="58635E"/>
@@ -15088,6 +16385,7 @@
               </a:defRPr>
             </a:lvl7pPr>
             <a:lvl8pPr>
+              <a:buNone/>
               <a:defRPr sz="1350" b="0">
                 <a:solidFill>
                   <a:srgbClr val="58635E"/>
@@ -15098,6 +16396,7 @@
               </a:defRPr>
             </a:lvl8pPr>
             <a:lvl9pPr>
+              <a:buNone/>
               <a:defRPr sz="1350" b="0">
                 <a:solidFill>
                   <a:srgbClr val="58635E"/>
@@ -15110,6 +16409,7 @@
           </a:lstStyle>
           <a:p xmlns:a="http://schemas.openxmlformats.org/drawingml/2006/main">
             <a:pPr>
+              <a:buNone/>
               <a:defRPr sz="1350" b="0">
                 <a:solidFill>
                   <a:srgbClr val="58635E"/>
@@ -15176,6 +16476,7 @@
               </a:defRPr>
             </a:defPPr>
             <a:lvl1pPr>
+              <a:buNone/>
               <a:defRPr sz="2100" b="1">
                 <a:solidFill>
                   <a:srgbClr val="28634E"/>
@@ -15186,6 +16487,7 @@
               </a:defRPr>
             </a:lvl1pPr>
             <a:lvl2pPr>
+              <a:buNone/>
               <a:defRPr sz="2100" b="1">
                 <a:solidFill>
                   <a:srgbClr val="28634E"/>
@@ -15196,6 +16498,7 @@
               </a:defRPr>
             </a:lvl2pPr>
             <a:lvl3pPr>
+              <a:buNone/>
               <a:defRPr sz="2100" b="1">
                 <a:solidFill>
                   <a:srgbClr val="28634E"/>
@@ -15206,6 +16509,7 @@
               </a:defRPr>
             </a:lvl3pPr>
             <a:lvl4pPr>
+              <a:buNone/>
               <a:defRPr sz="2100" b="1">
                 <a:solidFill>
                   <a:srgbClr val="28634E"/>
@@ -15216,6 +16520,7 @@
               </a:defRPr>
             </a:lvl4pPr>
             <a:lvl5pPr>
+              <a:buNone/>
               <a:defRPr sz="2100" b="1">
                 <a:solidFill>
                   <a:srgbClr val="28634E"/>
@@ -15226,6 +16531,7 @@
               </a:defRPr>
             </a:lvl5pPr>
             <a:lvl6pPr>
+              <a:buNone/>
               <a:defRPr sz="2100" b="1">
                 <a:solidFill>
                   <a:srgbClr val="28634E"/>
@@ -15236,6 +16542,7 @@
               </a:defRPr>
             </a:lvl6pPr>
             <a:lvl7pPr>
+              <a:buNone/>
               <a:defRPr sz="2100" b="1">
                 <a:solidFill>
                   <a:srgbClr val="28634E"/>
@@ -15246,6 +16553,7 @@
               </a:defRPr>
             </a:lvl7pPr>
             <a:lvl8pPr>
+              <a:buNone/>
               <a:defRPr sz="2100" b="1">
                 <a:solidFill>
                   <a:srgbClr val="28634E"/>
@@ -15256,6 +16564,7 @@
               </a:defRPr>
             </a:lvl8pPr>
             <a:lvl9pPr>
+              <a:buNone/>
               <a:defRPr sz="2100" b="1">
                 <a:solidFill>
                   <a:srgbClr val="28634E"/>
@@ -15268,6 +16577,7 @@
           </a:lstStyle>
           <a:p xmlns:a="http://schemas.openxmlformats.org/drawingml/2006/main">
             <a:pPr>
+              <a:buNone/>
               <a:defRPr sz="2100" b="1">
                 <a:solidFill>
                   <a:srgbClr val="28634E"/>
@@ -15334,6 +16644,7 @@
               </a:defRPr>
             </a:defPPr>
             <a:lvl1pPr>
+              <a:buNone/>
               <a:defRPr sz="1875" b="1">
                 <a:solidFill>
                   <a:srgbClr val="20322B"/>
@@ -15344,6 +16655,7 @@
               </a:defRPr>
             </a:lvl1pPr>
             <a:lvl2pPr>
+              <a:buNone/>
               <a:defRPr sz="1875" b="1">
                 <a:solidFill>
                   <a:srgbClr val="20322B"/>
@@ -15354,6 +16666,7 @@
               </a:defRPr>
             </a:lvl2pPr>
             <a:lvl3pPr>
+              <a:buNone/>
               <a:defRPr sz="1875" b="1">
                 <a:solidFill>
                   <a:srgbClr val="20322B"/>
@@ -15364,6 +16677,7 @@
               </a:defRPr>
             </a:lvl3pPr>
             <a:lvl4pPr>
+              <a:buNone/>
               <a:defRPr sz="1875" b="1">
                 <a:solidFill>
                   <a:srgbClr val="20322B"/>
@@ -15374,6 +16688,7 @@
               </a:defRPr>
             </a:lvl4pPr>
             <a:lvl5pPr>
+              <a:buNone/>
               <a:defRPr sz="1875" b="1">
                 <a:solidFill>
                   <a:srgbClr val="20322B"/>
@@ -15384,6 +16699,7 @@
               </a:defRPr>
             </a:lvl5pPr>
             <a:lvl6pPr>
+              <a:buNone/>
               <a:defRPr sz="1875" b="1">
                 <a:solidFill>
                   <a:srgbClr val="20322B"/>
@@ -15394,6 +16710,7 @@
               </a:defRPr>
             </a:lvl6pPr>
             <a:lvl7pPr>
+              <a:buNone/>
               <a:defRPr sz="1875" b="1">
                 <a:solidFill>
                   <a:srgbClr val="20322B"/>
@@ -15404,6 +16721,7 @@
               </a:defRPr>
             </a:lvl7pPr>
             <a:lvl8pPr>
+              <a:buNone/>
               <a:defRPr sz="1875" b="1">
                 <a:solidFill>
                   <a:srgbClr val="20322B"/>
@@ -15414,6 +16732,7 @@
               </a:defRPr>
             </a:lvl8pPr>
             <a:lvl9pPr>
+              <a:buNone/>
               <a:defRPr sz="1875" b="1">
                 <a:solidFill>
                   <a:srgbClr val="20322B"/>
@@ -15426,6 +16745,7 @@
           </a:lstStyle>
           <a:p xmlns:a="http://schemas.openxmlformats.org/drawingml/2006/main">
             <a:pPr>
+              <a:buNone/>
               <a:defRPr sz="1875" b="1">
                 <a:solidFill>
                   <a:srgbClr val="20322B"/>
@@ -15492,6 +16812,7 @@
               </a:defRPr>
             </a:defPPr>
             <a:lvl1pPr>
+              <a:buNone/>
               <a:defRPr sz="1800" b="0">
                 <a:solidFill>
                   <a:srgbClr val="20322B"/>
@@ -15502,6 +16823,7 @@
               </a:defRPr>
             </a:lvl1pPr>
             <a:lvl2pPr>
+              <a:buNone/>
               <a:defRPr sz="1800" b="0">
                 <a:solidFill>
                   <a:srgbClr val="20322B"/>
@@ -15512,6 +16834,7 @@
               </a:defRPr>
             </a:lvl2pPr>
             <a:lvl3pPr>
+              <a:buNone/>
               <a:defRPr sz="1800" b="0">
                 <a:solidFill>
                   <a:srgbClr val="20322B"/>
@@ -15522,6 +16845,7 @@
               </a:defRPr>
             </a:lvl3pPr>
             <a:lvl4pPr>
+              <a:buNone/>
               <a:defRPr sz="1800" b="0">
                 <a:solidFill>
                   <a:srgbClr val="20322B"/>
@@ -15532,6 +16856,7 @@
               </a:defRPr>
             </a:lvl4pPr>
             <a:lvl5pPr>
+              <a:buNone/>
               <a:defRPr sz="1800" b="0">
                 <a:solidFill>
                   <a:srgbClr val="20322B"/>
@@ -15542,6 +16867,7 @@
               </a:defRPr>
             </a:lvl5pPr>
             <a:lvl6pPr>
+              <a:buNone/>
               <a:defRPr sz="1800" b="0">
                 <a:solidFill>
                   <a:srgbClr val="20322B"/>
@@ -15552,6 +16878,7 @@
               </a:defRPr>
             </a:lvl6pPr>
             <a:lvl7pPr>
+              <a:buNone/>
               <a:defRPr sz="1800" b="0">
                 <a:solidFill>
                   <a:srgbClr val="20322B"/>
@@ -15562,6 +16889,7 @@
               </a:defRPr>
             </a:lvl7pPr>
             <a:lvl8pPr>
+              <a:buNone/>
               <a:defRPr sz="1800" b="0">
                 <a:solidFill>
                   <a:srgbClr val="20322B"/>
@@ -15572,6 +16900,7 @@
               </a:defRPr>
             </a:lvl8pPr>
             <a:lvl9pPr>
+              <a:buNone/>
               <a:defRPr sz="1800" b="0">
                 <a:solidFill>
                   <a:srgbClr val="20322B"/>
@@ -15584,6 +16913,7 @@
           </a:lstStyle>
           <a:p xmlns:a="http://schemas.openxmlformats.org/drawingml/2006/main">
             <a:pPr>
+              <a:buNone/>
               <a:defRPr sz="1800" b="0">
                 <a:solidFill>
                   <a:srgbClr val="20322B"/>
@@ -15650,6 +16980,7 @@
               </a:defRPr>
             </a:defPPr>
             <a:lvl1pPr>
+              <a:buNone/>
               <a:defRPr sz="1875" b="1">
                 <a:solidFill>
                   <a:srgbClr val="20322B"/>
@@ -15660,6 +16991,7 @@
               </a:defRPr>
             </a:lvl1pPr>
             <a:lvl2pPr>
+              <a:buNone/>
               <a:defRPr sz="1875" b="1">
                 <a:solidFill>
                   <a:srgbClr val="20322B"/>
@@ -15670,6 +17002,7 @@
               </a:defRPr>
             </a:lvl2pPr>
             <a:lvl3pPr>
+              <a:buNone/>
               <a:defRPr sz="1875" b="1">
                 <a:solidFill>
                   <a:srgbClr val="20322B"/>
@@ -15680,6 +17013,7 @@
               </a:defRPr>
             </a:lvl3pPr>
             <a:lvl4pPr>
+              <a:buNone/>
               <a:defRPr sz="1875" b="1">
                 <a:solidFill>
                   <a:srgbClr val="20322B"/>
@@ -15690,6 +17024,7 @@
               </a:defRPr>
             </a:lvl4pPr>
             <a:lvl5pPr>
+              <a:buNone/>
               <a:defRPr sz="1875" b="1">
                 <a:solidFill>
                   <a:srgbClr val="20322B"/>
@@ -15700,6 +17035,7 @@
               </a:defRPr>
             </a:lvl5pPr>
             <a:lvl6pPr>
+              <a:buNone/>
               <a:defRPr sz="1875" b="1">
                 <a:solidFill>
                   <a:srgbClr val="20322B"/>
@@ -15710,6 +17046,7 @@
               </a:defRPr>
             </a:lvl6pPr>
             <a:lvl7pPr>
+              <a:buNone/>
               <a:defRPr sz="1875" b="1">
                 <a:solidFill>
                   <a:srgbClr val="20322B"/>
@@ -15720,6 +17057,7 @@
               </a:defRPr>
             </a:lvl7pPr>
             <a:lvl8pPr>
+              <a:buNone/>
               <a:defRPr sz="1875" b="1">
                 <a:solidFill>
                   <a:srgbClr val="20322B"/>
@@ -15730,6 +17068,7 @@
               </a:defRPr>
             </a:lvl8pPr>
             <a:lvl9pPr>
+              <a:buNone/>
               <a:defRPr sz="1875" b="1">
                 <a:solidFill>
                   <a:srgbClr val="20322B"/>
@@ -15742,6 +17081,7 @@
           </a:lstStyle>
           <a:p xmlns:a="http://schemas.openxmlformats.org/drawingml/2006/main">
             <a:pPr>
+              <a:buNone/>
               <a:defRPr sz="1875" b="1">
                 <a:solidFill>
                   <a:srgbClr val="20322B"/>
@@ -15808,6 +17148,7 @@
               </a:defRPr>
             </a:defPPr>
             <a:lvl1pPr>
+              <a:buNone/>
               <a:defRPr sz="1800" b="0">
                 <a:solidFill>
                   <a:srgbClr val="20322B"/>
@@ -15818,6 +17159,7 @@
               </a:defRPr>
             </a:lvl1pPr>
             <a:lvl2pPr>
+              <a:buNone/>
               <a:defRPr sz="1800" b="0">
                 <a:solidFill>
                   <a:srgbClr val="20322B"/>
@@ -15828,6 +17170,7 @@
               </a:defRPr>
             </a:lvl2pPr>
             <a:lvl3pPr>
+              <a:buNone/>
               <a:defRPr sz="1800" b="0">
                 <a:solidFill>
                   <a:srgbClr val="20322B"/>
@@ -15838,6 +17181,7 @@
               </a:defRPr>
             </a:lvl3pPr>
             <a:lvl4pPr>
+              <a:buNone/>
               <a:defRPr sz="1800" b="0">
                 <a:solidFill>
                   <a:srgbClr val="20322B"/>
@@ -15848,6 +17192,7 @@
               </a:defRPr>
             </a:lvl4pPr>
             <a:lvl5pPr>
+              <a:buNone/>
               <a:defRPr sz="1800" b="0">
                 <a:solidFill>
                   <a:srgbClr val="20322B"/>
@@ -15858,6 +17203,7 @@
               </a:defRPr>
             </a:lvl5pPr>
             <a:lvl6pPr>
+              <a:buNone/>
               <a:defRPr sz="1800" b="0">
                 <a:solidFill>
                   <a:srgbClr val="20322B"/>
@@ -15868,6 +17214,7 @@
               </a:defRPr>
             </a:lvl6pPr>
             <a:lvl7pPr>
+              <a:buNone/>
               <a:defRPr sz="1800" b="0">
                 <a:solidFill>
                   <a:srgbClr val="20322B"/>
@@ -15878,6 +17225,7 @@
               </a:defRPr>
             </a:lvl7pPr>
             <a:lvl8pPr>
+              <a:buNone/>
               <a:defRPr sz="1800" b="0">
                 <a:solidFill>
                   <a:srgbClr val="20322B"/>
@@ -15888,6 +17236,7 @@
               </a:defRPr>
             </a:lvl8pPr>
             <a:lvl9pPr>
+              <a:buNone/>
               <a:defRPr sz="1800" b="0">
                 <a:solidFill>
                   <a:srgbClr val="20322B"/>
@@ -15900,6 +17249,7 @@
           </a:lstStyle>
           <a:p xmlns:a="http://schemas.openxmlformats.org/drawingml/2006/main">
             <a:pPr>
+              <a:buNone/>
               <a:defRPr sz="1800" b="0">
                 <a:solidFill>
                   <a:srgbClr val="20322B"/>
@@ -15966,6 +17316,7 @@
               </a:defRPr>
             </a:defPPr>
             <a:lvl1pPr>
+              <a:buNone/>
               <a:defRPr sz="1875" b="1">
                 <a:solidFill>
                   <a:srgbClr val="20322B"/>
@@ -15976,6 +17327,7 @@
               </a:defRPr>
             </a:lvl1pPr>
             <a:lvl2pPr>
+              <a:buNone/>
               <a:defRPr sz="1875" b="1">
                 <a:solidFill>
                   <a:srgbClr val="20322B"/>
@@ -15986,6 +17338,7 @@
               </a:defRPr>
             </a:lvl2pPr>
             <a:lvl3pPr>
+              <a:buNone/>
               <a:defRPr sz="1875" b="1">
                 <a:solidFill>
                   <a:srgbClr val="20322B"/>
@@ -15996,6 +17349,7 @@
               </a:defRPr>
             </a:lvl3pPr>
             <a:lvl4pPr>
+              <a:buNone/>
               <a:defRPr sz="1875" b="1">
                 <a:solidFill>
                   <a:srgbClr val="20322B"/>
@@ -16006,6 +17360,7 @@
               </a:defRPr>
             </a:lvl4pPr>
             <a:lvl5pPr>
+              <a:buNone/>
               <a:defRPr sz="1875" b="1">
                 <a:solidFill>
                   <a:srgbClr val="20322B"/>
@@ -16016,6 +17371,7 @@
               </a:defRPr>
             </a:lvl5pPr>
             <a:lvl6pPr>
+              <a:buNone/>
               <a:defRPr sz="1875" b="1">
                 <a:solidFill>
                   <a:srgbClr val="20322B"/>
@@ -16026,6 +17382,7 @@
               </a:defRPr>
             </a:lvl6pPr>
             <a:lvl7pPr>
+              <a:buNone/>
               <a:defRPr sz="1875" b="1">
                 <a:solidFill>
                   <a:srgbClr val="20322B"/>
@@ -16036,6 +17393,7 @@
               </a:defRPr>
             </a:lvl7pPr>
             <a:lvl8pPr>
+              <a:buNone/>
               <a:defRPr sz="1875" b="1">
                 <a:solidFill>
                   <a:srgbClr val="20322B"/>
@@ -16046,6 +17404,7 @@
               </a:defRPr>
             </a:lvl8pPr>
             <a:lvl9pPr>
+              <a:buNone/>
               <a:defRPr sz="1875" b="1">
                 <a:solidFill>
                   <a:srgbClr val="20322B"/>
@@ -16058,6 +17417,7 @@
           </a:lstStyle>
           <a:p xmlns:a="http://schemas.openxmlformats.org/drawingml/2006/main">
             <a:pPr>
+              <a:buNone/>
               <a:defRPr sz="1875" b="1">
                 <a:solidFill>
                   <a:srgbClr val="20322B"/>
@@ -16124,6 +17484,7 @@
               </a:defRPr>
             </a:defPPr>
             <a:lvl1pPr>
+              <a:buNone/>
               <a:defRPr sz="1800" b="0">
                 <a:solidFill>
                   <a:srgbClr val="20322B"/>
@@ -16134,6 +17495,7 @@
               </a:defRPr>
             </a:lvl1pPr>
             <a:lvl2pPr>
+              <a:buNone/>
               <a:defRPr sz="1800" b="0">
                 <a:solidFill>
                   <a:srgbClr val="20322B"/>
@@ -16144,6 +17506,7 @@
               </a:defRPr>
             </a:lvl2pPr>
             <a:lvl3pPr>
+              <a:buNone/>
               <a:defRPr sz="1800" b="0">
                 <a:solidFill>
                   <a:srgbClr val="20322B"/>
@@ -16154,6 +17517,7 @@
               </a:defRPr>
             </a:lvl3pPr>
             <a:lvl4pPr>
+              <a:buNone/>
               <a:defRPr sz="1800" b="0">
                 <a:solidFill>
                   <a:srgbClr val="20322B"/>
@@ -16164,6 +17528,7 @@
               </a:defRPr>
             </a:lvl4pPr>
             <a:lvl5pPr>
+              <a:buNone/>
               <a:defRPr sz="1800" b="0">
                 <a:solidFill>
                   <a:srgbClr val="20322B"/>
@@ -16174,6 +17539,7 @@
               </a:defRPr>
             </a:lvl5pPr>
             <a:lvl6pPr>
+              <a:buNone/>
               <a:defRPr sz="1800" b="0">
                 <a:solidFill>
                   <a:srgbClr val="20322B"/>
@@ -16184,6 +17550,7 @@
               </a:defRPr>
             </a:lvl6pPr>
             <a:lvl7pPr>
+              <a:buNone/>
               <a:defRPr sz="1800" b="0">
                 <a:solidFill>
                   <a:srgbClr val="20322B"/>
@@ -16194,6 +17561,7 @@
               </a:defRPr>
             </a:lvl7pPr>
             <a:lvl8pPr>
+              <a:buNone/>
               <a:defRPr sz="1800" b="0">
                 <a:solidFill>
                   <a:srgbClr val="20322B"/>
@@ -16204,6 +17572,7 @@
               </a:defRPr>
             </a:lvl8pPr>
             <a:lvl9pPr>
+              <a:buNone/>
               <a:defRPr sz="1800" b="0">
                 <a:solidFill>
                   <a:srgbClr val="20322B"/>
@@ -16216,6 +17585,7 @@
           </a:lstStyle>
           <a:p xmlns:a="http://schemas.openxmlformats.org/drawingml/2006/main">
             <a:pPr>
+              <a:buNone/>
               <a:defRPr sz="1800" b="0">
                 <a:solidFill>
                   <a:srgbClr val="20322B"/>
@@ -16282,6 +17652,7 @@
               </a:defRPr>
             </a:defPPr>
             <a:lvl1pPr>
+              <a:buNone/>
               <a:defRPr sz="1875" b="1">
                 <a:solidFill>
                   <a:srgbClr val="20322B"/>
@@ -16292,6 +17663,7 @@
               </a:defRPr>
             </a:lvl1pPr>
             <a:lvl2pPr>
+              <a:buNone/>
               <a:defRPr sz="1875" b="1">
                 <a:solidFill>
                   <a:srgbClr val="20322B"/>
@@ -16302,6 +17674,7 @@
               </a:defRPr>
             </a:lvl2pPr>
             <a:lvl3pPr>
+              <a:buNone/>
               <a:defRPr sz="1875" b="1">
                 <a:solidFill>
                   <a:srgbClr val="20322B"/>
@@ -16312,6 +17685,7 @@
               </a:defRPr>
             </a:lvl3pPr>
             <a:lvl4pPr>
+              <a:buNone/>
               <a:defRPr sz="1875" b="1">
                 <a:solidFill>
                   <a:srgbClr val="20322B"/>
@@ -16322,6 +17696,7 @@
               </a:defRPr>
             </a:lvl4pPr>
             <a:lvl5pPr>
+              <a:buNone/>
               <a:defRPr sz="1875" b="1">
                 <a:solidFill>
                   <a:srgbClr val="20322B"/>
@@ -16332,6 +17707,7 @@
               </a:defRPr>
             </a:lvl5pPr>
             <a:lvl6pPr>
+              <a:buNone/>
               <a:defRPr sz="1875" b="1">
                 <a:solidFill>
                   <a:srgbClr val="20322B"/>
@@ -16342,6 +17718,7 @@
               </a:defRPr>
             </a:lvl6pPr>
             <a:lvl7pPr>
+              <a:buNone/>
               <a:defRPr sz="1875" b="1">
                 <a:solidFill>
                   <a:srgbClr val="20322B"/>
@@ -16352,6 +17729,7 @@
               </a:defRPr>
             </a:lvl7pPr>
             <a:lvl8pPr>
+              <a:buNone/>
               <a:defRPr sz="1875" b="1">
                 <a:solidFill>
                   <a:srgbClr val="20322B"/>
@@ -16362,6 +17740,7 @@
               </a:defRPr>
             </a:lvl8pPr>
             <a:lvl9pPr>
+              <a:buNone/>
               <a:defRPr sz="1875" b="1">
                 <a:solidFill>
                   <a:srgbClr val="20322B"/>
@@ -16374,6 +17753,7 @@
           </a:lstStyle>
           <a:p xmlns:a="http://schemas.openxmlformats.org/drawingml/2006/main">
             <a:pPr>
+              <a:buNone/>
               <a:defRPr sz="1875" b="1">
                 <a:solidFill>
                   <a:srgbClr val="20322B"/>
@@ -16440,6 +17820,7 @@
               </a:defRPr>
             </a:defPPr>
             <a:lvl1pPr>
+              <a:buNone/>
               <a:defRPr sz="1800" b="0">
                 <a:solidFill>
                   <a:srgbClr val="20322B"/>
@@ -16450,6 +17831,7 @@
               </a:defRPr>
             </a:lvl1pPr>
             <a:lvl2pPr>
+              <a:buNone/>
               <a:defRPr sz="1800" b="0">
                 <a:solidFill>
                   <a:srgbClr val="20322B"/>
@@ -16460,6 +17842,7 @@
               </a:defRPr>
             </a:lvl2pPr>
             <a:lvl3pPr>
+              <a:buNone/>
               <a:defRPr sz="1800" b="0">
                 <a:solidFill>
                   <a:srgbClr val="20322B"/>
@@ -16470,6 +17853,7 @@
               </a:defRPr>
             </a:lvl3pPr>
             <a:lvl4pPr>
+              <a:buNone/>
               <a:defRPr sz="1800" b="0">
                 <a:solidFill>
                   <a:srgbClr val="20322B"/>
@@ -16480,6 +17864,7 @@
               </a:defRPr>
             </a:lvl4pPr>
             <a:lvl5pPr>
+              <a:buNone/>
               <a:defRPr sz="1800" b="0">
                 <a:solidFill>
                   <a:srgbClr val="20322B"/>
@@ -16490,6 +17875,7 @@
               </a:defRPr>
             </a:lvl5pPr>
             <a:lvl6pPr>
+              <a:buNone/>
               <a:defRPr sz="1800" b="0">
                 <a:solidFill>
                   <a:srgbClr val="20322B"/>
@@ -16500,6 +17886,7 @@
               </a:defRPr>
             </a:lvl6pPr>
             <a:lvl7pPr>
+              <a:buNone/>
               <a:defRPr sz="1800" b="0">
                 <a:solidFill>
                   <a:srgbClr val="20322B"/>
@@ -16510,6 +17897,7 @@
               </a:defRPr>
             </a:lvl7pPr>
             <a:lvl8pPr>
+              <a:buNone/>
               <a:defRPr sz="1800" b="0">
                 <a:solidFill>
                   <a:srgbClr val="20322B"/>
@@ -16520,6 +17908,7 @@
               </a:defRPr>
             </a:lvl8pPr>
             <a:lvl9pPr>
+              <a:buNone/>
               <a:defRPr sz="1800" b="0">
                 <a:solidFill>
                   <a:srgbClr val="20322B"/>
@@ -16532,6 +17921,7 @@
           </a:lstStyle>
           <a:p xmlns:a="http://schemas.openxmlformats.org/drawingml/2006/main">
             <a:pPr>
+              <a:buNone/>
               <a:defRPr sz="1800" b="0">
                 <a:solidFill>
                   <a:srgbClr val="20322B"/>
@@ -16598,6 +17988,7 @@
               </a:defRPr>
             </a:defPPr>
             <a:lvl1pPr>
+              <a:buNone/>
               <a:defRPr sz="1875" b="1">
                 <a:solidFill>
                   <a:srgbClr val="20322B"/>
@@ -16608,6 +17999,7 @@
               </a:defRPr>
             </a:lvl1pPr>
             <a:lvl2pPr>
+              <a:buNone/>
               <a:defRPr sz="1875" b="1">
                 <a:solidFill>
                   <a:srgbClr val="20322B"/>
@@ -16618,6 +18010,7 @@
               </a:defRPr>
             </a:lvl2pPr>
             <a:lvl3pPr>
+              <a:buNone/>
               <a:defRPr sz="1875" b="1">
                 <a:solidFill>
                   <a:srgbClr val="20322B"/>
@@ -16628,6 +18021,7 @@
               </a:defRPr>
             </a:lvl3pPr>
             <a:lvl4pPr>
+              <a:buNone/>
               <a:defRPr sz="1875" b="1">
                 <a:solidFill>
                   <a:srgbClr val="20322B"/>
@@ -16638,6 +18032,7 @@
               </a:defRPr>
             </a:lvl4pPr>
             <a:lvl5pPr>
+              <a:buNone/>
               <a:defRPr sz="1875" b="1">
                 <a:solidFill>
                   <a:srgbClr val="20322B"/>
@@ -16648,6 +18043,7 @@
               </a:defRPr>
             </a:lvl5pPr>
             <a:lvl6pPr>
+              <a:buNone/>
               <a:defRPr sz="1875" b="1">
                 <a:solidFill>
                   <a:srgbClr val="20322B"/>
@@ -16658,6 +18054,7 @@
               </a:defRPr>
             </a:lvl6pPr>
             <a:lvl7pPr>
+              <a:buNone/>
               <a:defRPr sz="1875" b="1">
                 <a:solidFill>
                   <a:srgbClr val="20322B"/>
@@ -16668,6 +18065,7 @@
               </a:defRPr>
             </a:lvl7pPr>
             <a:lvl8pPr>
+              <a:buNone/>
               <a:defRPr sz="1875" b="1">
                 <a:solidFill>
                   <a:srgbClr val="20322B"/>
@@ -16678,6 +18076,7 @@
               </a:defRPr>
             </a:lvl8pPr>
             <a:lvl9pPr>
+              <a:buNone/>
               <a:defRPr sz="1875" b="1">
                 <a:solidFill>
                   <a:srgbClr val="20322B"/>
@@ -16690,6 +18089,7 @@
           </a:lstStyle>
           <a:p xmlns:a="http://schemas.openxmlformats.org/drawingml/2006/main">
             <a:pPr>
+              <a:buNone/>
               <a:defRPr sz="1875" b="1">
                 <a:solidFill>
                   <a:srgbClr val="20322B"/>
@@ -16756,6 +18156,7 @@
               </a:defRPr>
             </a:defPPr>
             <a:lvl1pPr>
+              <a:buNone/>
               <a:defRPr sz="1800" b="0">
                 <a:solidFill>
                   <a:srgbClr val="20322B"/>
@@ -16766,6 +18167,7 @@
               </a:defRPr>
             </a:lvl1pPr>
             <a:lvl2pPr>
+              <a:buNone/>
               <a:defRPr sz="1800" b="0">
                 <a:solidFill>
                   <a:srgbClr val="20322B"/>
@@ -16776,6 +18178,7 @@
               </a:defRPr>
             </a:lvl2pPr>
             <a:lvl3pPr>
+              <a:buNone/>
               <a:defRPr sz="1800" b="0">
                 <a:solidFill>
                   <a:srgbClr val="20322B"/>
@@ -16786,6 +18189,7 @@
               </a:defRPr>
             </a:lvl3pPr>
             <a:lvl4pPr>
+              <a:buNone/>
               <a:defRPr sz="1800" b="0">
                 <a:solidFill>
                   <a:srgbClr val="20322B"/>
@@ -16796,6 +18200,7 @@
               </a:defRPr>
             </a:lvl4pPr>
             <a:lvl5pPr>
+              <a:buNone/>
               <a:defRPr sz="1800" b="0">
                 <a:solidFill>
                   <a:srgbClr val="20322B"/>
@@ -16806,6 +18211,7 @@
               </a:defRPr>
             </a:lvl5pPr>
             <a:lvl6pPr>
+              <a:buNone/>
               <a:defRPr sz="1800" b="0">
                 <a:solidFill>
                   <a:srgbClr val="20322B"/>
@@ -16816,6 +18222,7 @@
               </a:defRPr>
             </a:lvl6pPr>
             <a:lvl7pPr>
+              <a:buNone/>
               <a:defRPr sz="1800" b="0">
                 <a:solidFill>
                   <a:srgbClr val="20322B"/>
@@ -16826,6 +18233,7 @@
               </a:defRPr>
             </a:lvl7pPr>
             <a:lvl8pPr>
+              <a:buNone/>
               <a:defRPr sz="1800" b="0">
                 <a:solidFill>
                   <a:srgbClr val="20322B"/>
@@ -16836,6 +18244,7 @@
               </a:defRPr>
             </a:lvl8pPr>
             <a:lvl9pPr>
+              <a:buNone/>
               <a:defRPr sz="1800" b="0">
                 <a:solidFill>
                   <a:srgbClr val="20322B"/>
@@ -16848,6 +18257,7 @@
           </a:lstStyle>
           <a:p xmlns:a="http://schemas.openxmlformats.org/drawingml/2006/main">
             <a:pPr>
+              <a:buNone/>
               <a:defRPr sz="1800" b="0">
                 <a:solidFill>
                   <a:srgbClr val="20322B"/>
@@ -16914,6 +18324,7 @@
               </a:defRPr>
             </a:defPPr>
             <a:lvl1pPr>
+              <a:buNone/>
               <a:defRPr sz="1875" b="1">
                 <a:solidFill>
                   <a:srgbClr val="20322B"/>
@@ -16924,6 +18335,7 @@
               </a:defRPr>
             </a:lvl1pPr>
             <a:lvl2pPr>
+              <a:buNone/>
               <a:defRPr sz="1875" b="1">
                 <a:solidFill>
                   <a:srgbClr val="20322B"/>
@@ -16934,6 +18346,7 @@
               </a:defRPr>
             </a:lvl2pPr>
             <a:lvl3pPr>
+              <a:buNone/>
               <a:defRPr sz="1875" b="1">
                 <a:solidFill>
                   <a:srgbClr val="20322B"/>
@@ -16944,6 +18357,7 @@
               </a:defRPr>
             </a:lvl3pPr>
             <a:lvl4pPr>
+              <a:buNone/>
               <a:defRPr sz="1875" b="1">
                 <a:solidFill>
                   <a:srgbClr val="20322B"/>
@@ -16954,6 +18368,7 @@
               </a:defRPr>
             </a:lvl4pPr>
             <a:lvl5pPr>
+              <a:buNone/>
               <a:defRPr sz="1875" b="1">
                 <a:solidFill>
                   <a:srgbClr val="20322B"/>
@@ -16964,6 +18379,7 @@
               </a:defRPr>
             </a:lvl5pPr>
             <a:lvl6pPr>
+              <a:buNone/>
               <a:defRPr sz="1875" b="1">
                 <a:solidFill>
                   <a:srgbClr val="20322B"/>
@@ -16974,6 +18390,7 @@
               </a:defRPr>
             </a:lvl6pPr>
             <a:lvl7pPr>
+              <a:buNone/>
               <a:defRPr sz="1875" b="1">
                 <a:solidFill>
                   <a:srgbClr val="20322B"/>
@@ -16984,6 +18401,7 @@
               </a:defRPr>
             </a:lvl7pPr>
             <a:lvl8pPr>
+              <a:buNone/>
               <a:defRPr sz="1875" b="1">
                 <a:solidFill>
                   <a:srgbClr val="20322B"/>
@@ -16994,6 +18412,7 @@
               </a:defRPr>
             </a:lvl8pPr>
             <a:lvl9pPr>
+              <a:buNone/>
               <a:defRPr sz="1875" b="1">
                 <a:solidFill>
                   <a:srgbClr val="20322B"/>
@@ -17006,6 +18425,7 @@
           </a:lstStyle>
           <a:p xmlns:a="http://schemas.openxmlformats.org/drawingml/2006/main">
             <a:pPr>
+              <a:buNone/>
               <a:defRPr sz="1875" b="1">
                 <a:solidFill>
                   <a:srgbClr val="20322B"/>
@@ -17072,6 +18492,7 @@
               </a:defRPr>
             </a:defPPr>
             <a:lvl1pPr>
+              <a:buNone/>
               <a:defRPr sz="1800" b="0">
                 <a:solidFill>
                   <a:srgbClr val="20322B"/>
@@ -17082,6 +18503,7 @@
               </a:defRPr>
             </a:lvl1pPr>
             <a:lvl2pPr>
+              <a:buNone/>
               <a:defRPr sz="1800" b="0">
                 <a:solidFill>
                   <a:srgbClr val="20322B"/>
@@ -17092,6 +18514,7 @@
               </a:defRPr>
             </a:lvl2pPr>
             <a:lvl3pPr>
+              <a:buNone/>
               <a:defRPr sz="1800" b="0">
                 <a:solidFill>
                   <a:srgbClr val="20322B"/>
@@ -17102,6 +18525,7 @@
               </a:defRPr>
             </a:lvl3pPr>
             <a:lvl4pPr>
+              <a:buNone/>
               <a:defRPr sz="1800" b="0">
                 <a:solidFill>
                   <a:srgbClr val="20322B"/>
@@ -17112,6 +18536,7 @@
               </a:defRPr>
             </a:lvl4pPr>
             <a:lvl5pPr>
+              <a:buNone/>
               <a:defRPr sz="1800" b="0">
                 <a:solidFill>
                   <a:srgbClr val="20322B"/>
@@ -17122,6 +18547,7 @@
               </a:defRPr>
             </a:lvl5pPr>
             <a:lvl6pPr>
+              <a:buNone/>
               <a:defRPr sz="1800" b="0">
                 <a:solidFill>
                   <a:srgbClr val="20322B"/>
@@ -17132,6 +18558,7 @@
               </a:defRPr>
             </a:lvl6pPr>
             <a:lvl7pPr>
+              <a:buNone/>
               <a:defRPr sz="1800" b="0">
                 <a:solidFill>
                   <a:srgbClr val="20322B"/>
@@ -17142,6 +18569,7 @@
               </a:defRPr>
             </a:lvl7pPr>
             <a:lvl8pPr>
+              <a:buNone/>
               <a:defRPr sz="1800" b="0">
                 <a:solidFill>
                   <a:srgbClr val="20322B"/>
@@ -17152,6 +18580,7 @@
               </a:defRPr>
             </a:lvl8pPr>
             <a:lvl9pPr>
+              <a:buNone/>
               <a:defRPr sz="1800" b="0">
                 <a:solidFill>
                   <a:srgbClr val="20322B"/>
@@ -17164,6 +18593,7 @@
           </a:lstStyle>
           <a:p xmlns:a="http://schemas.openxmlformats.org/drawingml/2006/main">
             <a:pPr>
+              <a:buNone/>
               <a:defRPr sz="1800" b="0">
                 <a:solidFill>
                   <a:srgbClr val="20322B"/>
@@ -17230,6 +18660,7 @@
               </a:defRPr>
             </a:defPPr>
             <a:lvl1pPr>
+              <a:buNone/>
               <a:defRPr sz="1875" b="1">
                 <a:solidFill>
                   <a:srgbClr val="20322B"/>
@@ -17240,6 +18671,7 @@
               </a:defRPr>
             </a:lvl1pPr>
             <a:lvl2pPr>
+              <a:buNone/>
               <a:defRPr sz="1875" b="1">
                 <a:solidFill>
                   <a:srgbClr val="20322B"/>
@@ -17250,6 +18682,7 @@
               </a:defRPr>
             </a:lvl2pPr>
             <a:lvl3pPr>
+              <a:buNone/>
               <a:defRPr sz="1875" b="1">
                 <a:solidFill>
                   <a:srgbClr val="20322B"/>
@@ -17260,6 +18693,7 @@
               </a:defRPr>
             </a:lvl3pPr>
             <a:lvl4pPr>
+              <a:buNone/>
               <a:defRPr sz="1875" b="1">
                 <a:solidFill>
                   <a:srgbClr val="20322B"/>
@@ -17270,6 +18704,7 @@
               </a:defRPr>
             </a:lvl4pPr>
             <a:lvl5pPr>
+              <a:buNone/>
               <a:defRPr sz="1875" b="1">
                 <a:solidFill>
                   <a:srgbClr val="20322B"/>
@@ -17280,6 +18715,7 @@
               </a:defRPr>
             </a:lvl5pPr>
             <a:lvl6pPr>
+              <a:buNone/>
               <a:defRPr sz="1875" b="1">
                 <a:solidFill>
                   <a:srgbClr val="20322B"/>
@@ -17290,6 +18726,7 @@
               </a:defRPr>
             </a:lvl6pPr>
             <a:lvl7pPr>
+              <a:buNone/>
               <a:defRPr sz="1875" b="1">
                 <a:solidFill>
                   <a:srgbClr val="20322B"/>
@@ -17300,6 +18737,7 @@
               </a:defRPr>
             </a:lvl7pPr>
             <a:lvl8pPr>
+              <a:buNone/>
               <a:defRPr sz="1875" b="1">
                 <a:solidFill>
                   <a:srgbClr val="20322B"/>
@@ -17310,6 +18748,7 @@
               </a:defRPr>
             </a:lvl8pPr>
             <a:lvl9pPr>
+              <a:buNone/>
               <a:defRPr sz="1875" b="1">
                 <a:solidFill>
                   <a:srgbClr val="20322B"/>
@@ -17322,6 +18761,7 @@
           </a:lstStyle>
           <a:p xmlns:a="http://schemas.openxmlformats.org/drawingml/2006/main">
             <a:pPr>
+              <a:buNone/>
               <a:defRPr sz="1875" b="1">
                 <a:solidFill>
                   <a:srgbClr val="20322B"/>
@@ -17388,6 +18828,7 @@
               </a:defRPr>
             </a:defPPr>
             <a:lvl1pPr>
+              <a:buNone/>
               <a:defRPr sz="1800" b="0">
                 <a:solidFill>
                   <a:srgbClr val="20322B"/>
@@ -17398,6 +18839,7 @@
               </a:defRPr>
             </a:lvl1pPr>
             <a:lvl2pPr>
+              <a:buNone/>
               <a:defRPr sz="1800" b="0">
                 <a:solidFill>
                   <a:srgbClr val="20322B"/>
@@ -17408,6 +18850,7 @@
               </a:defRPr>
             </a:lvl2pPr>
             <a:lvl3pPr>
+              <a:buNone/>
               <a:defRPr sz="1800" b="0">
                 <a:solidFill>
                   <a:srgbClr val="20322B"/>
@@ -17418,6 +18861,7 @@
               </a:defRPr>
             </a:lvl3pPr>
             <a:lvl4pPr>
+              <a:buNone/>
               <a:defRPr sz="1800" b="0">
                 <a:solidFill>
                   <a:srgbClr val="20322B"/>
@@ -17428,6 +18872,7 @@
               </a:defRPr>
             </a:lvl4pPr>
             <a:lvl5pPr>
+              <a:buNone/>
               <a:defRPr sz="1800" b="0">
                 <a:solidFill>
                   <a:srgbClr val="20322B"/>
@@ -17438,6 +18883,7 @@
               </a:defRPr>
             </a:lvl5pPr>
             <a:lvl6pPr>
+              <a:buNone/>
               <a:defRPr sz="1800" b="0">
                 <a:solidFill>
                   <a:srgbClr val="20322B"/>
@@ -17448,6 +18894,7 @@
               </a:defRPr>
             </a:lvl6pPr>
             <a:lvl7pPr>
+              <a:buNone/>
               <a:defRPr sz="1800" b="0">
                 <a:solidFill>
                   <a:srgbClr val="20322B"/>
@@ -17458,6 +18905,7 @@
               </a:defRPr>
             </a:lvl7pPr>
             <a:lvl8pPr>
+              <a:buNone/>
               <a:defRPr sz="1800" b="0">
                 <a:solidFill>
                   <a:srgbClr val="20322B"/>
@@ -17468,6 +18916,7 @@
               </a:defRPr>
             </a:lvl8pPr>
             <a:lvl9pPr>
+              <a:buNone/>
               <a:defRPr sz="1800" b="0">
                 <a:solidFill>
                   <a:srgbClr val="20322B"/>
@@ -17480,6 +18929,7 @@
           </a:lstStyle>
           <a:p xmlns:a="http://schemas.openxmlformats.org/drawingml/2006/main">
             <a:pPr>
+              <a:buNone/>
               <a:defRPr sz="1800" b="0">
                 <a:solidFill>
                   <a:srgbClr val="20322B"/>
@@ -17546,6 +18996,7 @@
               </a:defRPr>
             </a:defPPr>
             <a:lvl1pPr>
+              <a:buNone/>
               <a:defRPr sz="2100" b="1">
                 <a:solidFill>
                   <a:srgbClr val="28634E"/>
@@ -17556,6 +19007,7 @@
               </a:defRPr>
             </a:lvl1pPr>
             <a:lvl2pPr>
+              <a:buNone/>
               <a:defRPr sz="2100" b="1">
                 <a:solidFill>
                   <a:srgbClr val="28634E"/>
@@ -17566,6 +19018,7 @@
               </a:defRPr>
             </a:lvl2pPr>
             <a:lvl3pPr>
+              <a:buNone/>
               <a:defRPr sz="2100" b="1">
                 <a:solidFill>
                   <a:srgbClr val="28634E"/>
@@ -17576,6 +19029,7 @@
               </a:defRPr>
             </a:lvl3pPr>
             <a:lvl4pPr>
+              <a:buNone/>
               <a:defRPr sz="2100" b="1">
                 <a:solidFill>
                   <a:srgbClr val="28634E"/>
@@ -17586,6 +19040,7 @@
               </a:defRPr>
             </a:lvl4pPr>
             <a:lvl5pPr>
+              <a:buNone/>
               <a:defRPr sz="2100" b="1">
                 <a:solidFill>
                   <a:srgbClr val="28634E"/>
@@ -17596,6 +19051,7 @@
               </a:defRPr>
             </a:lvl5pPr>
             <a:lvl6pPr>
+              <a:buNone/>
               <a:defRPr sz="2100" b="1">
                 <a:solidFill>
                   <a:srgbClr val="28634E"/>
@@ -17606,6 +19062,7 @@
               </a:defRPr>
             </a:lvl6pPr>
             <a:lvl7pPr>
+              <a:buNone/>
               <a:defRPr sz="2100" b="1">
                 <a:solidFill>
                   <a:srgbClr val="28634E"/>
@@ -17616,6 +19073,7 @@
               </a:defRPr>
             </a:lvl7pPr>
             <a:lvl8pPr>
+              <a:buNone/>
               <a:defRPr sz="2100" b="1">
                 <a:solidFill>
                   <a:srgbClr val="28634E"/>
@@ -17626,6 +19084,7 @@
               </a:defRPr>
             </a:lvl8pPr>
             <a:lvl9pPr>
+              <a:buNone/>
               <a:defRPr sz="2100" b="1">
                 <a:solidFill>
                   <a:srgbClr val="28634E"/>
@@ -17638,6 +19097,7 @@
           </a:lstStyle>
           <a:p xmlns:a="http://schemas.openxmlformats.org/drawingml/2006/main">
             <a:pPr>
+              <a:buNone/>
               <a:defRPr sz="2100" b="1">
                 <a:solidFill>
                   <a:srgbClr val="28634E"/>
@@ -17656,7 +19116,7 @@
                 <a:ea typeface="Arial"/>
                 <a:cs typeface="Arial"/>
               </a:rPr>
-              <a:t>Before the A1 deadline</a:t>
+              <a:t>User validation and A1</a:t>
             </a:r>
           </a:p>
         </p:txBody>
@@ -17704,6 +19164,7 @@
               </a:defRPr>
             </a:defPPr>
             <a:lvl1pPr>
+              <a:buNone/>
               <a:defRPr sz="1950" b="1">
                 <a:solidFill>
                   <a:srgbClr val="20322B"/>
@@ -17714,6 +19175,7 @@
               </a:defRPr>
             </a:lvl1pPr>
             <a:lvl2pPr>
+              <a:buNone/>
               <a:defRPr sz="1950" b="1">
                 <a:solidFill>
                   <a:srgbClr val="20322B"/>
@@ -17724,6 +19186,7 @@
               </a:defRPr>
             </a:lvl2pPr>
             <a:lvl3pPr>
+              <a:buNone/>
               <a:defRPr sz="1950" b="1">
                 <a:solidFill>
                   <a:srgbClr val="20322B"/>
@@ -17734,6 +19197,7 @@
               </a:defRPr>
             </a:lvl3pPr>
             <a:lvl4pPr>
+              <a:buNone/>
               <a:defRPr sz="1950" b="1">
                 <a:solidFill>
                   <a:srgbClr val="20322B"/>
@@ -17744,6 +19208,7 @@
               </a:defRPr>
             </a:lvl4pPr>
             <a:lvl5pPr>
+              <a:buNone/>
               <a:defRPr sz="1950" b="1">
                 <a:solidFill>
                   <a:srgbClr val="20322B"/>
@@ -17754,6 +19219,7 @@
               </a:defRPr>
             </a:lvl5pPr>
             <a:lvl6pPr>
+              <a:buNone/>
               <a:defRPr sz="1950" b="1">
                 <a:solidFill>
                   <a:srgbClr val="20322B"/>
@@ -17764,6 +19230,7 @@
               </a:defRPr>
             </a:lvl6pPr>
             <a:lvl7pPr>
+              <a:buNone/>
               <a:defRPr sz="1950" b="1">
                 <a:solidFill>
                   <a:srgbClr val="20322B"/>
@@ -17774,6 +19241,7 @@
               </a:defRPr>
             </a:lvl7pPr>
             <a:lvl8pPr>
+              <a:buNone/>
               <a:defRPr sz="1950" b="1">
                 <a:solidFill>
                   <a:srgbClr val="20322B"/>
@@ -17784,6 +19252,7 @@
               </a:defRPr>
             </a:lvl8pPr>
             <a:lvl9pPr>
+              <a:buNone/>
               <a:defRPr sz="1950" b="1">
                 <a:solidFill>
                   <a:srgbClr val="20322B"/>
@@ -17796,6 +19265,7 @@
           </a:lstStyle>
           <a:p xmlns:a="http://schemas.openxmlformats.org/drawingml/2006/main">
             <a:pPr>
+              <a:buNone/>
               <a:defRPr sz="1950" b="1">
                 <a:solidFill>
                   <a:srgbClr val="20322B"/>
@@ -17862,6 +19332,7 @@
               </a:defRPr>
             </a:defPPr>
             <a:lvl1pPr>
+              <a:buNone/>
               <a:defRPr sz="1875" b="0">
                 <a:solidFill>
                   <a:srgbClr val="20322B"/>
@@ -17872,6 +19343,7 @@
               </a:defRPr>
             </a:lvl1pPr>
             <a:lvl2pPr>
+              <a:buNone/>
               <a:defRPr sz="1875" b="0">
                 <a:solidFill>
                   <a:srgbClr val="20322B"/>
@@ -17882,6 +19354,7 @@
               </a:defRPr>
             </a:lvl2pPr>
             <a:lvl3pPr>
+              <a:buNone/>
               <a:defRPr sz="1875" b="0">
                 <a:solidFill>
                   <a:srgbClr val="20322B"/>
@@ -17892,6 +19365,7 @@
               </a:defRPr>
             </a:lvl3pPr>
             <a:lvl4pPr>
+              <a:buNone/>
               <a:defRPr sz="1875" b="0">
                 <a:solidFill>
                   <a:srgbClr val="20322B"/>
@@ -17902,6 +19376,7 @@
               </a:defRPr>
             </a:lvl4pPr>
             <a:lvl5pPr>
+              <a:buNone/>
               <a:defRPr sz="1875" b="0">
                 <a:solidFill>
                   <a:srgbClr val="20322B"/>
@@ -17912,6 +19387,7 @@
               </a:defRPr>
             </a:lvl5pPr>
             <a:lvl6pPr>
+              <a:buNone/>
               <a:defRPr sz="1875" b="0">
                 <a:solidFill>
                   <a:srgbClr val="20322B"/>
@@ -17922,6 +19398,7 @@
               </a:defRPr>
             </a:lvl6pPr>
             <a:lvl7pPr>
+              <a:buNone/>
               <a:defRPr sz="1875" b="0">
                 <a:solidFill>
                   <a:srgbClr val="20322B"/>
@@ -17932,6 +19409,7 @@
               </a:defRPr>
             </a:lvl7pPr>
             <a:lvl8pPr>
+              <a:buNone/>
               <a:defRPr sz="1875" b="0">
                 <a:solidFill>
                   <a:srgbClr val="20322B"/>
@@ -17942,6 +19420,7 @@
               </a:defRPr>
             </a:lvl8pPr>
             <a:lvl9pPr>
+              <a:buNone/>
               <a:defRPr sz="1875" b="0">
                 <a:solidFill>
                   <a:srgbClr val="20322B"/>
@@ -17954,6 +19433,7 @@
           </a:lstStyle>
           <a:p xmlns:a="http://schemas.openxmlformats.org/drawingml/2006/main">
             <a:pPr>
+              <a:buNone/>
               <a:defRPr sz="1875" b="0">
                 <a:solidFill>
                   <a:srgbClr val="20322B"/>
@@ -17972,7 +19452,7 @@
                 <a:ea typeface="Arial"/>
                 <a:cs typeface="Arial"/>
               </a:rPr>
-              <a:t>Connect the insights to product decisions and complete the research record trail.</a:t>
+              <a:t>Feature freeze. Link three insights to the persona, journey and design.</a:t>
             </a:r>
           </a:p>
         </p:txBody>
@@ -18020,6 +19500,7 @@
               </a:defRPr>
             </a:defPPr>
             <a:lvl1pPr>
+              <a:buNone/>
               <a:defRPr sz="1950" b="1">
                 <a:solidFill>
                   <a:srgbClr val="20322B"/>
@@ -18030,6 +19511,7 @@
               </a:defRPr>
             </a:lvl1pPr>
             <a:lvl2pPr>
+              <a:buNone/>
               <a:defRPr sz="1950" b="1">
                 <a:solidFill>
                   <a:srgbClr val="20322B"/>
@@ -18040,6 +19522,7 @@
               </a:defRPr>
             </a:lvl2pPr>
             <a:lvl3pPr>
+              <a:buNone/>
               <a:defRPr sz="1950" b="1">
                 <a:solidFill>
                   <a:srgbClr val="20322B"/>
@@ -18050,6 +19533,7 @@
               </a:defRPr>
             </a:lvl3pPr>
             <a:lvl4pPr>
+              <a:buNone/>
               <a:defRPr sz="1950" b="1">
                 <a:solidFill>
                   <a:srgbClr val="20322B"/>
@@ -18060,6 +19544,7 @@
               </a:defRPr>
             </a:lvl4pPr>
             <a:lvl5pPr>
+              <a:buNone/>
               <a:defRPr sz="1950" b="1">
                 <a:solidFill>
                   <a:srgbClr val="20322B"/>
@@ -18070,6 +19555,7 @@
               </a:defRPr>
             </a:lvl5pPr>
             <a:lvl6pPr>
+              <a:buNone/>
               <a:defRPr sz="1950" b="1">
                 <a:solidFill>
                   <a:srgbClr val="20322B"/>
@@ -18080,6 +19566,7 @@
               </a:defRPr>
             </a:lvl6pPr>
             <a:lvl7pPr>
+              <a:buNone/>
               <a:defRPr sz="1950" b="1">
                 <a:solidFill>
                   <a:srgbClr val="20322B"/>
@@ -18090,6 +19577,7 @@
               </a:defRPr>
             </a:lvl7pPr>
             <a:lvl8pPr>
+              <a:buNone/>
               <a:defRPr sz="1950" b="1">
                 <a:solidFill>
                   <a:srgbClr val="20322B"/>
@@ -18100,6 +19588,7 @@
               </a:defRPr>
             </a:lvl8pPr>
             <a:lvl9pPr>
+              <a:buNone/>
               <a:defRPr sz="1950" b="1">
                 <a:solidFill>
                   <a:srgbClr val="20322B"/>
@@ -18112,6 +19601,7 @@
           </a:lstStyle>
           <a:p xmlns:a="http://schemas.openxmlformats.org/drawingml/2006/main">
             <a:pPr>
+              <a:buNone/>
               <a:defRPr sz="1950" b="1">
                 <a:solidFill>
                   <a:srgbClr val="20322B"/>
@@ -18178,6 +19668,7 @@
               </a:defRPr>
             </a:defPPr>
             <a:lvl1pPr>
+              <a:buNone/>
               <a:defRPr sz="1875" b="0">
                 <a:solidFill>
                   <a:srgbClr val="20322B"/>
@@ -18188,6 +19679,7 @@
               </a:defRPr>
             </a:lvl1pPr>
             <a:lvl2pPr>
+              <a:buNone/>
               <a:defRPr sz="1875" b="0">
                 <a:solidFill>
                   <a:srgbClr val="20322B"/>
@@ -18198,6 +19690,7 @@
               </a:defRPr>
             </a:lvl2pPr>
             <a:lvl3pPr>
+              <a:buNone/>
               <a:defRPr sz="1875" b="0">
                 <a:solidFill>
                   <a:srgbClr val="20322B"/>
@@ -18208,6 +19701,7 @@
               </a:defRPr>
             </a:lvl3pPr>
             <a:lvl4pPr>
+              <a:buNone/>
               <a:defRPr sz="1875" b="0">
                 <a:solidFill>
                   <a:srgbClr val="20322B"/>
@@ -18218,6 +19712,7 @@
               </a:defRPr>
             </a:lvl4pPr>
             <a:lvl5pPr>
+              <a:buNone/>
               <a:defRPr sz="1875" b="0">
                 <a:solidFill>
                   <a:srgbClr val="20322B"/>
@@ -18228,6 +19723,7 @@
               </a:defRPr>
             </a:lvl5pPr>
             <a:lvl6pPr>
+              <a:buNone/>
               <a:defRPr sz="1875" b="0">
                 <a:solidFill>
                   <a:srgbClr val="20322B"/>
@@ -18238,6 +19734,7 @@
               </a:defRPr>
             </a:lvl6pPr>
             <a:lvl7pPr>
+              <a:buNone/>
               <a:defRPr sz="1875" b="0">
                 <a:solidFill>
                   <a:srgbClr val="20322B"/>
@@ -18248,6 +19745,7 @@
               </a:defRPr>
             </a:lvl7pPr>
             <a:lvl8pPr>
+              <a:buNone/>
               <a:defRPr sz="1875" b="0">
                 <a:solidFill>
                   <a:srgbClr val="20322B"/>
@@ -18258,6 +19756,7 @@
               </a:defRPr>
             </a:lvl8pPr>
             <a:lvl9pPr>
+              <a:buNone/>
               <a:defRPr sz="1875" b="0">
                 <a:solidFill>
                   <a:srgbClr val="20322B"/>
@@ -18270,6 +19769,7 @@
           </a:lstStyle>
           <a:p xmlns:a="http://schemas.openxmlformats.org/drawingml/2006/main">
             <a:pPr>
+              <a:buNone/>
               <a:defRPr sz="1875" b="0">
                 <a:solidFill>
                   <a:srgbClr val="20322B"/>
@@ -18288,7 +19788,7 @@
                 <a:ea typeface="Arial"/>
                 <a:cs typeface="Arial"/>
               </a:rPr>
-              <a:t>Review the concept choice. Test how users understand dates, fees and privacy.</a:t>
+              <a:t>Review three concepts. Test each user's own timetable, fees and privacy choices.</a:t>
             </a:r>
           </a:p>
         </p:txBody>
@@ -18336,6 +19836,7 @@
               </a:defRPr>
             </a:defPPr>
             <a:lvl1pPr>
+              <a:buNone/>
               <a:defRPr sz="1950" b="1">
                 <a:solidFill>
                   <a:srgbClr val="20322B"/>
@@ -18346,6 +19847,7 @@
               </a:defRPr>
             </a:lvl1pPr>
             <a:lvl2pPr>
+              <a:buNone/>
               <a:defRPr sz="1950" b="1">
                 <a:solidFill>
                   <a:srgbClr val="20322B"/>
@@ -18356,6 +19858,7 @@
               </a:defRPr>
             </a:lvl2pPr>
             <a:lvl3pPr>
+              <a:buNone/>
               <a:defRPr sz="1950" b="1">
                 <a:solidFill>
                   <a:srgbClr val="20322B"/>
@@ -18366,6 +19869,7 @@
               </a:defRPr>
             </a:lvl3pPr>
             <a:lvl4pPr>
+              <a:buNone/>
               <a:defRPr sz="1950" b="1">
                 <a:solidFill>
                   <a:srgbClr val="20322B"/>
@@ -18376,6 +19880,7 @@
               </a:defRPr>
             </a:lvl4pPr>
             <a:lvl5pPr>
+              <a:buNone/>
               <a:defRPr sz="1950" b="1">
                 <a:solidFill>
                   <a:srgbClr val="20322B"/>
@@ -18386,6 +19891,7 @@
               </a:defRPr>
             </a:lvl5pPr>
             <a:lvl6pPr>
+              <a:buNone/>
               <a:defRPr sz="1950" b="1">
                 <a:solidFill>
                   <a:srgbClr val="20322B"/>
@@ -18396,6 +19902,7 @@
               </a:defRPr>
             </a:lvl6pPr>
             <a:lvl7pPr>
+              <a:buNone/>
               <a:defRPr sz="1950" b="1">
                 <a:solidFill>
                   <a:srgbClr val="20322B"/>
@@ -18406,6 +19913,7 @@
               </a:defRPr>
             </a:lvl7pPr>
             <a:lvl8pPr>
+              <a:buNone/>
               <a:defRPr sz="1950" b="1">
                 <a:solidFill>
                   <a:srgbClr val="20322B"/>
@@ -18416,6 +19924,7 @@
               </a:defRPr>
             </a:lvl8pPr>
             <a:lvl9pPr>
+              <a:buNone/>
               <a:defRPr sz="1950" b="1">
                 <a:solidFill>
                   <a:srgbClr val="20322B"/>
@@ -18428,6 +19937,7 @@
           </a:lstStyle>
           <a:p xmlns:a="http://schemas.openxmlformats.org/drawingml/2006/main">
             <a:pPr>
+              <a:buNone/>
               <a:defRPr sz="1950" b="1">
                 <a:solidFill>
                   <a:srgbClr val="20322B"/>
@@ -18494,6 +20004,7 @@
               </a:defRPr>
             </a:defPPr>
             <a:lvl1pPr>
+              <a:buNone/>
               <a:defRPr sz="1875" b="0">
                 <a:solidFill>
                   <a:srgbClr val="20322B"/>
@@ -18504,6 +20015,7 @@
               </a:defRPr>
             </a:lvl1pPr>
             <a:lvl2pPr>
+              <a:buNone/>
               <a:defRPr sz="1875" b="0">
                 <a:solidFill>
                   <a:srgbClr val="20322B"/>
@@ -18514,6 +20026,7 @@
               </a:defRPr>
             </a:lvl2pPr>
             <a:lvl3pPr>
+              <a:buNone/>
               <a:defRPr sz="1875" b="0">
                 <a:solidFill>
                   <a:srgbClr val="20322B"/>
@@ -18524,6 +20037,7 @@
               </a:defRPr>
             </a:lvl3pPr>
             <a:lvl4pPr>
+              <a:buNone/>
               <a:defRPr sz="1875" b="0">
                 <a:solidFill>
                   <a:srgbClr val="20322B"/>
@@ -18534,6 +20048,7 @@
               </a:defRPr>
             </a:lvl4pPr>
             <a:lvl5pPr>
+              <a:buNone/>
               <a:defRPr sz="1875" b="0">
                 <a:solidFill>
                   <a:srgbClr val="20322B"/>
@@ -18544,6 +20059,7 @@
               </a:defRPr>
             </a:lvl5pPr>
             <a:lvl6pPr>
+              <a:buNone/>
               <a:defRPr sz="1875" b="0">
                 <a:solidFill>
                   <a:srgbClr val="20322B"/>
@@ -18554,6 +20070,7 @@
               </a:defRPr>
             </a:lvl6pPr>
             <a:lvl7pPr>
+              <a:buNone/>
               <a:defRPr sz="1875" b="0">
                 <a:solidFill>
                   <a:srgbClr val="20322B"/>
@@ -18564,6 +20081,7 @@
               </a:defRPr>
             </a:lvl7pPr>
             <a:lvl8pPr>
+              <a:buNone/>
               <a:defRPr sz="1875" b="0">
                 <a:solidFill>
                   <a:srgbClr val="20322B"/>
@@ -18574,6 +20092,7 @@
               </a:defRPr>
             </a:lvl8pPr>
             <a:lvl9pPr>
+              <a:buNone/>
               <a:defRPr sz="1875" b="0">
                 <a:solidFill>
                   <a:srgbClr val="20322B"/>
@@ -18586,6 +20105,7 @@
           </a:lstStyle>
           <a:p xmlns:a="http://schemas.openxmlformats.org/drawingml/2006/main">
             <a:pPr>
+              <a:buNone/>
               <a:defRPr sz="1875" b="0">
                 <a:solidFill>
                   <a:srgbClr val="20322B"/>
@@ -18604,7 +20124,7 @@
                 <a:ea typeface="Arial"/>
                 <a:cs typeface="Arial"/>
               </a:rPr>
-              <a:t>Finalise six slides and sources. Submit by 6 Nov, 23:59 via LMO.</a:t>
+              <a:t>Finalise the BMC, evidence and six slides. Submit by 6 Nov, 23:59 via LMO.</a:t>
             </a:r>
           </a:p>
         </p:txBody>
@@ -18652,6 +20172,7 @@
               </a:defRPr>
             </a:defPPr>
             <a:lvl1pPr>
+              <a:buNone/>
               <a:defRPr sz="1650" b="0">
                 <a:solidFill>
                   <a:srgbClr val="58635E"/>
@@ -18662,6 +20183,7 @@
               </a:defRPr>
             </a:lvl1pPr>
             <a:lvl2pPr>
+              <a:buNone/>
               <a:defRPr sz="1650" b="0">
                 <a:solidFill>
                   <a:srgbClr val="58635E"/>
@@ -18672,6 +20194,7 @@
               </a:defRPr>
             </a:lvl2pPr>
             <a:lvl3pPr>
+              <a:buNone/>
               <a:defRPr sz="1650" b="0">
                 <a:solidFill>
                   <a:srgbClr val="58635E"/>
@@ -18682,6 +20205,7 @@
               </a:defRPr>
             </a:lvl3pPr>
             <a:lvl4pPr>
+              <a:buNone/>
               <a:defRPr sz="1650" b="0">
                 <a:solidFill>
                   <a:srgbClr val="58635E"/>
@@ -18692,6 +20216,7 @@
               </a:defRPr>
             </a:lvl4pPr>
             <a:lvl5pPr>
+              <a:buNone/>
               <a:defRPr sz="1650" b="0">
                 <a:solidFill>
                   <a:srgbClr val="58635E"/>
@@ -18702,6 +20227,7 @@
               </a:defRPr>
             </a:lvl5pPr>
             <a:lvl6pPr>
+              <a:buNone/>
               <a:defRPr sz="1650" b="0">
                 <a:solidFill>
                   <a:srgbClr val="58635E"/>
@@ -18712,6 +20238,7 @@
               </a:defRPr>
             </a:lvl6pPr>
             <a:lvl7pPr>
+              <a:buNone/>
               <a:defRPr sz="1650" b="0">
                 <a:solidFill>
                   <a:srgbClr val="58635E"/>
@@ -18722,6 +20249,7 @@
               </a:defRPr>
             </a:lvl7pPr>
             <a:lvl8pPr>
+              <a:buNone/>
               <a:defRPr sz="1650" b="0">
                 <a:solidFill>
                   <a:srgbClr val="58635E"/>
@@ -18732,6 +20260,7 @@
               </a:defRPr>
             </a:lvl8pPr>
             <a:lvl9pPr>
+              <a:buNone/>
               <a:defRPr sz="1650" b="0">
                 <a:solidFill>
                   <a:srgbClr val="58635E"/>
@@ -18744,6 +20273,7 @@
           </a:lstStyle>
           <a:p xmlns:a="http://schemas.openxmlformats.org/drawingml/2006/main">
             <a:pPr>
+              <a:buNone/>
               <a:defRPr sz="1650" b="0">
                 <a:solidFill>
                   <a:srgbClr val="58635E"/>
@@ -18762,7 +20292,7 @@
                 <a:ea typeface="Arial"/>
                 <a:cs typeface="Arial"/>
               </a:rPr>
-              <a:t>Follow-on pilot gate: 2 genuine completions without a severe privacy or loss incident, or narrow the service.</a:t>
+              <a:t>Demo scope ready for user tests. Live email, physical devices and production setup remain open.</a:t>
             </a:r>
           </a:p>
         </p:txBody>

--- a/A1_Current/UUse_A1_6_Slides.pptx
+++ b/A1_Current/UUse_A1_6_Slides.pptx
@@ -2,18 +2,18 @@
 <file path=ppt/presentation.xml><?xml version="1.0" encoding="utf-8"?>
 <p:presentation xmlns:p="http://schemas.openxmlformats.org/presentationml/2006/main">
   <p:sldMasterIdLst>
-    <p:sldMasterId xmlns:r="http://schemas.openxmlformats.org/officeDocument/2006/relationships" id="2147483648" r:id="R6017096b5aa24f3d"/>
+    <p:sldMasterId xmlns:r="http://schemas.openxmlformats.org/officeDocument/2006/relationships" id="2147483648" r:id="Rb1ba777174f64ce8"/>
   </p:sldMasterIdLst>
   <p:notesMasterIdLst>
-    <p:notesMasterId xmlns:r="http://schemas.openxmlformats.org/officeDocument/2006/relationships" r:id="Rf78ad1f8880a4fd9"/>
+    <p:notesMasterId xmlns:r="http://schemas.openxmlformats.org/officeDocument/2006/relationships" r:id="R26afa793b8ee4d22"/>
   </p:notesMasterIdLst>
   <p:sldIdLst>
-    <p:sldId xmlns:r="http://schemas.openxmlformats.org/officeDocument/2006/relationships" id="256" r:id="R3d39cba8553a475b"/>
-    <p:sldId xmlns:r="http://schemas.openxmlformats.org/officeDocument/2006/relationships" id="257" r:id="R3fb10efd8c234b84"/>
-    <p:sldId xmlns:r="http://schemas.openxmlformats.org/officeDocument/2006/relationships" id="258" r:id="R79a81a3ae88947ca"/>
-    <p:sldId xmlns:r="http://schemas.openxmlformats.org/officeDocument/2006/relationships" id="259" r:id="Rdd987e874c3d4db8"/>
-    <p:sldId xmlns:r="http://schemas.openxmlformats.org/officeDocument/2006/relationships" id="260" r:id="Rc74abe09f7864bf2"/>
-    <p:sldId xmlns:r="http://schemas.openxmlformats.org/officeDocument/2006/relationships" id="261" r:id="R6978056c9b8c4652"/>
+    <p:sldId xmlns:r="http://schemas.openxmlformats.org/officeDocument/2006/relationships" id="256" r:id="R5ddc607951834325"/>
+    <p:sldId xmlns:r="http://schemas.openxmlformats.org/officeDocument/2006/relationships" id="257" r:id="Re73bea6826a54e8a"/>
+    <p:sldId xmlns:r="http://schemas.openxmlformats.org/officeDocument/2006/relationships" id="258" r:id="R1830d8f07b3e47ac"/>
+    <p:sldId xmlns:r="http://schemas.openxmlformats.org/officeDocument/2006/relationships" id="259" r:id="Re74f44e84370455d"/>
+    <p:sldId xmlns:r="http://schemas.openxmlformats.org/officeDocument/2006/relationships" id="260" r:id="Rae03b81d8bff474f"/>
+    <p:sldId xmlns:r="http://schemas.openxmlformats.org/officeDocument/2006/relationships" id="261" r:id="Rd6fab8b2ccbe4bb1"/>
   </p:sldIdLst>
   <p:sldSz cx="12192000" cy="6858000"/>
   <p:notesSz cx="6858000" cy="9144000"/>
@@ -490,6 +490,11 @@
               <a:t>The code is suitable for course demonstrations and the next user-validation stage within the tested scope. This does not certify a public launch or universal absence of defects. Real school-email delivery, physical devices, Safari and other browsers, actual campus GPS/network conditions, and the project's production environment and recovery remain to be accepted.</a:t>
             </a:r>
           </a:p>
+          <a:p xmlns:a="http://schemas.openxmlformats.org/drawingml/2006/main">
+            <a:r>
+              <a:t>Cohort update: Rita, 19 October 2026: approximately 430 students in the eight DTS classes. Team-reported cohort population, not measured demand, recruitment permission, invitations sent or active users. Individual class counts have not been supplied.</a:t>
+            </a:r>
+          </a:p>
         </p:txBody>
       </p:sp>
       <p:sp>
@@ -647,7 +652,7 @@
           </a:p>
           <a:p xmlns:a="http://schemas.openxmlformats.org/drawingml/2006/main">
             <a:r>
-              <a:t>Provisional SAM is the sum of eligible students in the eight DTS classes the team intends to reach, after verifying class sizes, channel permission and deduplication. No total headcount is invented. No national money TAM is claimed.</a:t>
+              <a:t>The pilot SAM boundary is approximately 430 students across the eight DTS classes, as reported by Rita on 19 October 2026. This is a cohort population estimate, not evidence that all students are reachable, interested, registered or active. Recruitment channel permission still needs confirmation. No individual class counts are invented. No national money TAM is claimed.</a:t>
             </a:r>
           </a:p>
           <a:p xmlns:a="http://schemas.openxmlformats.org/drawingml/2006/main">
@@ -657,7 +662,7 @@
           </a:p>
           <a:p xmlns:a="http://schemas.openxmlformats.org/drawingml/2006/main">
             <a:r>
-              <a:t>SOM here means two served requesters in four weeks, not two paying subscribers. The workbook shows the calculation and leaves class headcounts blank.</a:t>
+              <a:t>SOM here means two served requesters in four weeks, not two paying subscribers. The workbook records the reported aggregate as 430 in B35 and keeps the optional individual class breakdown blank. The 80 invitations, 10% posting and 25% completion remain planning assumptions. The cohort total does not increase the forecast or demonstrate demand.</a:t>
             </a:r>
           </a:p>
           <a:p xmlns:a="http://schemas.openxmlformats.org/drawingml/2006/main">
@@ -688,6 +693,11 @@
           <a:p xmlns:a="http://schemas.openxmlformats.org/drawingml/2006/main">
             <a:r>
               <a:t>New planning assumptions for this A1 edition. Four-week pilot: 80 potential requester invites, 10% posting, 25% fulfilment, four responsive owners, two fulfilments per owner, 50% paid share and CNY20 paid consideration. No observed outcomes are implied.</a:t>
+            </a:r>
+          </a:p>
+          <a:p xmlns:a="http://schemas.openxmlformats.org/drawingml/2006/main">
+            <a:r>
+              <a:t>Cohort update: Rita, 19 October 2026: approximately 430 students in the eight DTS classes. Team-reported cohort population, not measured demand, recruitment permission, invitations sent or active users. Individual class counts have not been supplied.</a:t>
             </a:r>
           </a:p>
         </p:txBody>
@@ -982,7 +992,7 @@
           </a:p>
           <a:p xmlns:a="http://schemas.openxmlformats.org/drawingml/2006/main">
             <a:r>
-              <a:t>A proposed later four-week pilot targets two genuine completed requests without a severe privacy or loss incident. This is a learning gate, not completed traction, a handbook rule or proof of viability. The eight DTS classes are the recruitment boundary, with actual headcounts and permission still to confirm. Low use or inadequate supply may justify a manual bulletin.</a:t>
+              <a:t>A proposed later four-week pilot targets two genuine completed requests without a severe privacy or loss incident. This is a learning gate, not completed traction, a handbook rule or proof of viability. The eight DTS classes are the recruitment boundary, with approximately 430 students reported by Rita on 19 October and recruitment permission still to confirm. Low use or inadequate supply may justify a manual bulletin.</a:t>
             </a:r>
           </a:p>
           <a:p xmlns:a="http://schemas.openxmlformats.org/drawingml/2006/main">
@@ -1008,6 +1018,11 @@
           <a:p xmlns:a="http://schemas.openxmlformats.org/drawingml/2006/main">
             <a:r>
               <a:t>The code is suitable for course demonstrations and the next user-validation stage within the tested scope. This does not certify a public launch or universal absence of defects. Real school-email delivery, physical devices, Safari and other browsers, actual campus GPS/network conditions, and the project's production environment and recovery remain to be accepted.</a:t>
+            </a:r>
+          </a:p>
+          <a:p xmlns:a="http://schemas.openxmlformats.org/drawingml/2006/main">
+            <a:r>
+              <a:t>Cohort update: Rita, 19 October 2026: approximately 430 students in the eight DTS classes. Team-reported cohort population, not measured demand, recruitment permission, invitations sent or active users. Individual class counts have not been supplied.</a:t>
             </a:r>
           </a:p>
         </p:txBody>
@@ -3450,12 +3465,12 @@
   </p:cSld>
   <p:clrMap bg1="lt1" tx1="dk1" bg2="lt2" tx2="dk2" accent1="accent1" accent2="accent2" accent3="accent3" accent4="accent4" accent5="accent5" accent6="accent6" hlink="hlink" folHlink="folHlink"/>
   <p:sldLayoutIdLst>
-    <p:sldLayoutId xmlns:r="http://schemas.openxmlformats.org/officeDocument/2006/relationships" id="2147483649" r:id="R81d37cfcab744fee"/>
-    <p:sldLayoutId xmlns:r="http://schemas.openxmlformats.org/officeDocument/2006/relationships" id="2147483650" r:id="R49ee661213d9400e"/>
-    <p:sldLayoutId xmlns:r="http://schemas.openxmlformats.org/officeDocument/2006/relationships" id="2147483651" r:id="R246500799afd4184"/>
-    <p:sldLayoutId xmlns:r="http://schemas.openxmlformats.org/officeDocument/2006/relationships" id="2147483652" r:id="Rd2d3bd63f60148b1"/>
-    <p:sldLayoutId xmlns:r="http://schemas.openxmlformats.org/officeDocument/2006/relationships" id="2147483653" r:id="Re370411ee9cc422f"/>
-    <p:sldLayoutId xmlns:r="http://schemas.openxmlformats.org/officeDocument/2006/relationships" id="2147483654" r:id="R6c6a32f9b77b49cc"/>
+    <p:sldLayoutId xmlns:r="http://schemas.openxmlformats.org/officeDocument/2006/relationships" id="2147483649" r:id="R017b26c95430499e"/>
+    <p:sldLayoutId xmlns:r="http://schemas.openxmlformats.org/officeDocument/2006/relationships" id="2147483650" r:id="Rf51d11a8bc404d80"/>
+    <p:sldLayoutId xmlns:r="http://schemas.openxmlformats.org/officeDocument/2006/relationships" id="2147483651" r:id="R475856ee17644972"/>
+    <p:sldLayoutId xmlns:r="http://schemas.openxmlformats.org/officeDocument/2006/relationships" id="2147483652" r:id="R64dd4caccdb745ab"/>
+    <p:sldLayoutId xmlns:r="http://schemas.openxmlformats.org/officeDocument/2006/relationships" id="2147483653" r:id="R4eae135dd2094850"/>
+    <p:sldLayoutId xmlns:r="http://schemas.openxmlformats.org/officeDocument/2006/relationships" id="2147483654" r:id="Rdca1a09d9cee428e"/>
   </p:sldLayoutIdLst>
   <p:txStyles>
     <p:titleStyle>
@@ -5004,7 +5019,7 @@
                 <a:ea typeface="Arial"/>
                 <a:cs typeface="Arial"/>
               </a:rPr>
-              <a:t>Proposed first pilot: eight DTS classes</a:t>
+              <a:t>Proposed pilot: eight DTS classes (~430 students)</a:t>
             </a:r>
           </a:p>
         </p:txBody>
@@ -5182,7 +5197,7 @@
           <p:cNvPr id="8" name="">
             <a:extLst xmlns:a="http://schemas.openxmlformats.org/drawingml/2006/main">
               <a:ext uri="{FF2B5EF4-FFF2-40B4-BE49-F238E27FC236}">
-                <a16:creationId xmlns:a16="http://schemas.microsoft.com/office/drawing/2014/main" id="{A6722693-B7AB-4255-B01A-BA59BFF79CDA}"/>
+                <a16:creationId xmlns:a16="http://schemas.microsoft.com/office/drawing/2014/main" id="{ABDD1CC1-B46A-4456-A90F-47B2173B3E1D}"/>
               </a:ext>
             </a:extLst>
           </p:cNvPr>
@@ -5192,7 +5207,7 @@
           <p:nvPr/>
         </p:nvPicPr>
         <p:blipFill>
-          <a:blip xmlns:r="http://schemas.openxmlformats.org/officeDocument/2006/relationships" xmlns:a="http://schemas.openxmlformats.org/drawingml/2006/main" r:embed="R42c67f4cbd3d4bd8"/>
+          <a:blip xmlns:r="http://schemas.openxmlformats.org/officeDocument/2006/relationships" xmlns:a="http://schemas.openxmlformats.org/drawingml/2006/main" r:embed="Rb14a4becf3194beb"/>
           <a:stretch xmlns:a="http://schemas.openxmlformats.org/drawingml/2006/main"/>
         </p:blipFill>
         <p:spPr>
@@ -9698,7 +9713,7 @@
                 <a:ea typeface="Arial"/>
                 <a:cs typeface="Arial"/>
               </a:rPr>
-              <a:t>Pilot SAM</a:t>
+              <a:t>Pilot SAM boundary</a:t>
             </a:r>
           </a:p>
         </p:txBody>
@@ -9866,7 +9881,7 @@
                 <a:ea typeface="Arial"/>
                 <a:cs typeface="Arial"/>
               </a:rPr>
-              <a:t>Eight DTS classes</a:t>
+              <a:t>~430 students</a:t>
             </a:r>
           </a:p>
         </p:txBody>
@@ -10034,7 +10049,7 @@
                 <a:ea typeface="Arial"/>
                 <a:cs typeface="Arial"/>
               </a:rPr>
-              <a:t>Recruitment boundary. Eligible headcount and channel access to confirm.</a:t>
+              <a:t>Eight DTS classes. Team estimate, access to confirm.</a:t>
             </a:r>
           </a:p>
         </p:txBody>
@@ -10548,7 +10563,7 @@
           <p:cNvPr id="13" name="">
             <a:extLst xmlns:a="http://schemas.openxmlformats.org/drawingml/2006/main">
               <a:ext uri="{FF2B5EF4-FFF2-40B4-BE49-F238E27FC236}">
-                <a16:creationId xmlns:a16="http://schemas.microsoft.com/office/drawing/2014/main" id="{A58C775B-6F43-462F-92BD-550A1F3C86A5}"/>
+                <a16:creationId xmlns:a16="http://schemas.microsoft.com/office/drawing/2014/main" id="{D2822B23-59A1-41F9-970B-0551FAEF8833}"/>
               </a:ext>
             </a:extLst>
           </p:cNvPr>
@@ -11961,7 +11976,7 @@
           <p:cNvPr id="4" name="">
             <a:extLst xmlns:a="http://schemas.openxmlformats.org/drawingml/2006/main">
               <a:ext uri="{FF2B5EF4-FFF2-40B4-BE49-F238E27FC236}">
-                <a16:creationId xmlns:a16="http://schemas.microsoft.com/office/drawing/2014/main" id="{170F7586-B66B-4FC6-8598-02E6CD101B9E}"/>
+                <a16:creationId xmlns:a16="http://schemas.microsoft.com/office/drawing/2014/main" id="{7D84D5C7-29B2-4475-A1D2-5089C2080CE4}"/>
               </a:ext>
             </a:extLst>
           </p:cNvPr>
@@ -11971,7 +11986,7 @@
           <p:nvPr/>
         </p:nvPicPr>
         <p:blipFill>
-          <a:blip xmlns:r="http://schemas.openxmlformats.org/officeDocument/2006/relationships" xmlns:a="http://schemas.openxmlformats.org/drawingml/2006/main" r:embed="R6a7b84d509484f9b"/>
+          <a:blip xmlns:r="http://schemas.openxmlformats.org/officeDocument/2006/relationships" xmlns:a="http://schemas.openxmlformats.org/drawingml/2006/main" r:embed="Rcb9c792e71174092"/>
           <a:stretch xmlns:a="http://schemas.openxmlformats.org/drawingml/2006/main"/>
         </p:blipFill>
         <p:spPr>
@@ -12493,7 +12508,7 @@
           <p:cNvPr id="8" name="">
             <a:extLst xmlns:a="http://schemas.openxmlformats.org/drawingml/2006/main">
               <a:ext uri="{FF2B5EF4-FFF2-40B4-BE49-F238E27FC236}">
-                <a16:creationId xmlns:a16="http://schemas.microsoft.com/office/drawing/2014/main" id="{69FC507B-939F-44CA-9B00-503BEBD9B018}"/>
+                <a16:creationId xmlns:a16="http://schemas.microsoft.com/office/drawing/2014/main" id="{1D0DC0C4-95A8-4547-AC4D-A35881A301BD}"/>
               </a:ext>
             </a:extLst>
           </p:cNvPr>
@@ -13579,6 +13594,7 @@
               </a:defRPr>
             </a:defPPr>
             <a:lvl1pPr>
+              <a:buNone/>
               <a:defRPr sz="1875" b="1">
                 <a:solidFill>
                   <a:srgbClr val="20322B"/>
@@ -13589,6 +13605,7 @@
               </a:defRPr>
             </a:lvl1pPr>
             <a:lvl2pPr>
+              <a:buNone/>
               <a:defRPr sz="1875" b="1">
                 <a:solidFill>
                   <a:srgbClr val="20322B"/>
@@ -13599,6 +13616,7 @@
               </a:defRPr>
             </a:lvl2pPr>
             <a:lvl3pPr>
+              <a:buNone/>
               <a:defRPr sz="1875" b="1">
                 <a:solidFill>
                   <a:srgbClr val="20322B"/>
@@ -13609,6 +13627,7 @@
               </a:defRPr>
             </a:lvl3pPr>
             <a:lvl4pPr>
+              <a:buNone/>
               <a:defRPr sz="1875" b="1">
                 <a:solidFill>
                   <a:srgbClr val="20322B"/>
@@ -13619,6 +13638,7 @@
               </a:defRPr>
             </a:lvl4pPr>
             <a:lvl5pPr>
+              <a:buNone/>
               <a:defRPr sz="1875" b="1">
                 <a:solidFill>
                   <a:srgbClr val="20322B"/>
@@ -13629,6 +13649,7 @@
               </a:defRPr>
             </a:lvl5pPr>
             <a:lvl6pPr>
+              <a:buNone/>
               <a:defRPr sz="1875" b="1">
                 <a:solidFill>
                   <a:srgbClr val="20322B"/>
@@ -13639,6 +13660,7 @@
               </a:defRPr>
             </a:lvl6pPr>
             <a:lvl7pPr>
+              <a:buNone/>
               <a:defRPr sz="1875" b="1">
                 <a:solidFill>
                   <a:srgbClr val="20322B"/>
@@ -13649,6 +13671,7 @@
               </a:defRPr>
             </a:lvl7pPr>
             <a:lvl8pPr>
+              <a:buNone/>
               <a:defRPr sz="1875" b="1">
                 <a:solidFill>
                   <a:srgbClr val="20322B"/>
@@ -13659,6 +13682,7 @@
               </a:defRPr>
             </a:lvl8pPr>
             <a:lvl9pPr>
+              <a:buNone/>
               <a:defRPr sz="1875" b="1">
                 <a:solidFill>
                   <a:srgbClr val="20322B"/>
@@ -13671,6 +13695,7 @@
           </a:lstStyle>
           <a:p xmlns:a="http://schemas.openxmlformats.org/drawingml/2006/main">
             <a:pPr>
+              <a:buNone/>
               <a:defRPr sz="1875" b="1">
                 <a:solidFill>
                   <a:srgbClr val="20322B"/>
@@ -13737,6 +13762,7 @@
               </a:defRPr>
             </a:defPPr>
             <a:lvl1pPr>
+              <a:buNone/>
               <a:defRPr sz="1800" b="0">
                 <a:solidFill>
                   <a:srgbClr val="20322B"/>
@@ -13747,6 +13773,7 @@
               </a:defRPr>
             </a:lvl1pPr>
             <a:lvl2pPr>
+              <a:buNone/>
               <a:defRPr sz="1800" b="0">
                 <a:solidFill>
                   <a:srgbClr val="20322B"/>
@@ -13757,6 +13784,7 @@
               </a:defRPr>
             </a:lvl2pPr>
             <a:lvl3pPr>
+              <a:buNone/>
               <a:defRPr sz="1800" b="0">
                 <a:solidFill>
                   <a:srgbClr val="20322B"/>
@@ -13767,6 +13795,7 @@
               </a:defRPr>
             </a:lvl3pPr>
             <a:lvl4pPr>
+              <a:buNone/>
               <a:defRPr sz="1800" b="0">
                 <a:solidFill>
                   <a:srgbClr val="20322B"/>
@@ -13777,6 +13806,7 @@
               </a:defRPr>
             </a:lvl4pPr>
             <a:lvl5pPr>
+              <a:buNone/>
               <a:defRPr sz="1800" b="0">
                 <a:solidFill>
                   <a:srgbClr val="20322B"/>
@@ -13787,6 +13817,7 @@
               </a:defRPr>
             </a:lvl5pPr>
             <a:lvl6pPr>
+              <a:buNone/>
               <a:defRPr sz="1800" b="0">
                 <a:solidFill>
                   <a:srgbClr val="20322B"/>
@@ -13797,6 +13828,7 @@
               </a:defRPr>
             </a:lvl6pPr>
             <a:lvl7pPr>
+              <a:buNone/>
               <a:defRPr sz="1800" b="0">
                 <a:solidFill>
                   <a:srgbClr val="20322B"/>
@@ -13807,6 +13839,7 @@
               </a:defRPr>
             </a:lvl7pPr>
             <a:lvl8pPr>
+              <a:buNone/>
               <a:defRPr sz="1800" b="0">
                 <a:solidFill>
                   <a:srgbClr val="20322B"/>
@@ -13817,6 +13850,7 @@
               </a:defRPr>
             </a:lvl8pPr>
             <a:lvl9pPr>
+              <a:buNone/>
               <a:defRPr sz="1800" b="0">
                 <a:solidFill>
                   <a:srgbClr val="20322B"/>
@@ -13829,6 +13863,7 @@
           </a:lstStyle>
           <a:p xmlns:a="http://schemas.openxmlformats.org/drawingml/2006/main">
             <a:pPr>
+              <a:buNone/>
               <a:defRPr sz="1800" b="0">
                 <a:solidFill>
                   <a:srgbClr val="20322B"/>
@@ -13895,6 +13930,7 @@
               </a:defRPr>
             </a:defPPr>
             <a:lvl1pPr>
+              <a:buNone/>
               <a:defRPr sz="1875" b="1">
                 <a:solidFill>
                   <a:srgbClr val="20322B"/>
@@ -13905,6 +13941,7 @@
               </a:defRPr>
             </a:lvl1pPr>
             <a:lvl2pPr>
+              <a:buNone/>
               <a:defRPr sz="1875" b="1">
                 <a:solidFill>
                   <a:srgbClr val="20322B"/>
@@ -13915,6 +13952,7 @@
               </a:defRPr>
             </a:lvl2pPr>
             <a:lvl3pPr>
+              <a:buNone/>
               <a:defRPr sz="1875" b="1">
                 <a:solidFill>
                   <a:srgbClr val="20322B"/>
@@ -13925,6 +13963,7 @@
               </a:defRPr>
             </a:lvl3pPr>
             <a:lvl4pPr>
+              <a:buNone/>
               <a:defRPr sz="1875" b="1">
                 <a:solidFill>
                   <a:srgbClr val="20322B"/>
@@ -13935,6 +13974,7 @@
               </a:defRPr>
             </a:lvl4pPr>
             <a:lvl5pPr>
+              <a:buNone/>
               <a:defRPr sz="1875" b="1">
                 <a:solidFill>
                   <a:srgbClr val="20322B"/>
@@ -13945,6 +13985,7 @@
               </a:defRPr>
             </a:lvl5pPr>
             <a:lvl6pPr>
+              <a:buNone/>
               <a:defRPr sz="1875" b="1">
                 <a:solidFill>
                   <a:srgbClr val="20322B"/>
@@ -13955,6 +13996,7 @@
               </a:defRPr>
             </a:lvl6pPr>
             <a:lvl7pPr>
+              <a:buNone/>
               <a:defRPr sz="1875" b="1">
                 <a:solidFill>
                   <a:srgbClr val="20322B"/>
@@ -13965,6 +14007,7 @@
               </a:defRPr>
             </a:lvl7pPr>
             <a:lvl8pPr>
+              <a:buNone/>
               <a:defRPr sz="1875" b="1">
                 <a:solidFill>
                   <a:srgbClr val="20322B"/>
@@ -13975,6 +14018,7 @@
               </a:defRPr>
             </a:lvl8pPr>
             <a:lvl9pPr>
+              <a:buNone/>
               <a:defRPr sz="1875" b="1">
                 <a:solidFill>
                   <a:srgbClr val="20322B"/>
@@ -13987,6 +14031,7 @@
           </a:lstStyle>
           <a:p xmlns:a="http://schemas.openxmlformats.org/drawingml/2006/main">
             <a:pPr>
+              <a:buNone/>
               <a:defRPr sz="1875" b="1">
                 <a:solidFill>
                   <a:srgbClr val="20322B"/>
@@ -14053,6 +14098,7 @@
               </a:defRPr>
             </a:defPPr>
             <a:lvl1pPr>
+              <a:buNone/>
               <a:defRPr sz="1800" b="0">
                 <a:solidFill>
                   <a:srgbClr val="20322B"/>
@@ -14063,6 +14109,7 @@
               </a:defRPr>
             </a:lvl1pPr>
             <a:lvl2pPr>
+              <a:buNone/>
               <a:defRPr sz="1800" b="0">
                 <a:solidFill>
                   <a:srgbClr val="20322B"/>
@@ -14073,6 +14120,7 @@
               </a:defRPr>
             </a:lvl2pPr>
             <a:lvl3pPr>
+              <a:buNone/>
               <a:defRPr sz="1800" b="0">
                 <a:solidFill>
                   <a:srgbClr val="20322B"/>
@@ -14083,6 +14131,7 @@
               </a:defRPr>
             </a:lvl3pPr>
             <a:lvl4pPr>
+              <a:buNone/>
               <a:defRPr sz="1800" b="0">
                 <a:solidFill>
                   <a:srgbClr val="20322B"/>
@@ -14093,6 +14142,7 @@
               </a:defRPr>
             </a:lvl4pPr>
             <a:lvl5pPr>
+              <a:buNone/>
               <a:defRPr sz="1800" b="0">
                 <a:solidFill>
                   <a:srgbClr val="20322B"/>
@@ -14103,6 +14153,7 @@
               </a:defRPr>
             </a:lvl5pPr>
             <a:lvl6pPr>
+              <a:buNone/>
               <a:defRPr sz="1800" b="0">
                 <a:solidFill>
                   <a:srgbClr val="20322B"/>
@@ -14113,6 +14164,7 @@
               </a:defRPr>
             </a:lvl6pPr>
             <a:lvl7pPr>
+              <a:buNone/>
               <a:defRPr sz="1800" b="0">
                 <a:solidFill>
                   <a:srgbClr val="20322B"/>
@@ -14123,6 +14175,7 @@
               </a:defRPr>
             </a:lvl7pPr>
             <a:lvl8pPr>
+              <a:buNone/>
               <a:defRPr sz="1800" b="0">
                 <a:solidFill>
                   <a:srgbClr val="20322B"/>
@@ -14133,6 +14186,7 @@
               </a:defRPr>
             </a:lvl8pPr>
             <a:lvl9pPr>
+              <a:buNone/>
               <a:defRPr sz="1800" b="0">
                 <a:solidFill>
                   <a:srgbClr val="20322B"/>
@@ -14145,6 +14199,7 @@
           </a:lstStyle>
           <a:p xmlns:a="http://schemas.openxmlformats.org/drawingml/2006/main">
             <a:pPr>
+              <a:buNone/>
               <a:defRPr sz="1800" b="0">
                 <a:solidFill>
                   <a:srgbClr val="20322B"/>
@@ -14706,7 +14761,7 @@
           <p:cNvPr id="4" name="">
             <a:extLst xmlns:a="http://schemas.openxmlformats.org/drawingml/2006/main">
               <a:ext uri="{FF2B5EF4-FFF2-40B4-BE49-F238E27FC236}">
-                <a16:creationId xmlns:a16="http://schemas.microsoft.com/office/drawing/2014/main" id="{8698DA35-3A59-4919-AE95-905DD52FEFFD}"/>
+                <a16:creationId xmlns:a16="http://schemas.microsoft.com/office/drawing/2014/main" id="{E934265A-0EB1-435D-A1CE-75ED39E3B3DD}"/>
               </a:ext>
             </a:extLst>
           </p:cNvPr>

--- a/A1_Current/UUse_A1_6_Slides.pptx
+++ b/A1_Current/UUse_A1_6_Slides.pptx
@@ -2,18 +2,18 @@
 <file path=ppt/presentation.xml><?xml version="1.0" encoding="utf-8"?>
 <p:presentation xmlns:p="http://schemas.openxmlformats.org/presentationml/2006/main">
   <p:sldMasterIdLst>
-    <p:sldMasterId xmlns:r="http://schemas.openxmlformats.org/officeDocument/2006/relationships" id="2147483648" r:id="Rb1ba777174f64ce8"/>
+    <p:sldMasterId xmlns:r="http://schemas.openxmlformats.org/officeDocument/2006/relationships" id="2147483648" r:id="R3fe365bad1124b51"/>
   </p:sldMasterIdLst>
   <p:notesMasterIdLst>
-    <p:notesMasterId xmlns:r="http://schemas.openxmlformats.org/officeDocument/2006/relationships" r:id="R26afa793b8ee4d22"/>
+    <p:notesMasterId xmlns:r="http://schemas.openxmlformats.org/officeDocument/2006/relationships" r:id="R0202d7acb15f46a2"/>
   </p:notesMasterIdLst>
   <p:sldIdLst>
-    <p:sldId xmlns:r="http://schemas.openxmlformats.org/officeDocument/2006/relationships" id="256" r:id="R5ddc607951834325"/>
-    <p:sldId xmlns:r="http://schemas.openxmlformats.org/officeDocument/2006/relationships" id="257" r:id="Re73bea6826a54e8a"/>
-    <p:sldId xmlns:r="http://schemas.openxmlformats.org/officeDocument/2006/relationships" id="258" r:id="R1830d8f07b3e47ac"/>
-    <p:sldId xmlns:r="http://schemas.openxmlformats.org/officeDocument/2006/relationships" id="259" r:id="Re74f44e84370455d"/>
-    <p:sldId xmlns:r="http://schemas.openxmlformats.org/officeDocument/2006/relationships" id="260" r:id="Rae03b81d8bff474f"/>
-    <p:sldId xmlns:r="http://schemas.openxmlformats.org/officeDocument/2006/relationships" id="261" r:id="Rd6fab8b2ccbe4bb1"/>
+    <p:sldId xmlns:r="http://schemas.openxmlformats.org/officeDocument/2006/relationships" id="256" r:id="R6a06b2674d6b43a5"/>
+    <p:sldId xmlns:r="http://schemas.openxmlformats.org/officeDocument/2006/relationships" id="257" r:id="Rd2656085fc0e4e6e"/>
+    <p:sldId xmlns:r="http://schemas.openxmlformats.org/officeDocument/2006/relationships" id="258" r:id="R624d9159eaa443d1"/>
+    <p:sldId xmlns:r="http://schemas.openxmlformats.org/officeDocument/2006/relationships" id="259" r:id="R774974c74dcc475e"/>
+    <p:sldId xmlns:r="http://schemas.openxmlformats.org/officeDocument/2006/relationships" id="260" r:id="R1d073e70e4ba4de6"/>
+    <p:sldId xmlns:r="http://schemas.openxmlformats.org/officeDocument/2006/relationships" id="261" r:id="Ra081ca10e3b34f0c"/>
   </p:sldIdLst>
   <p:sldSz cx="12192000" cy="6858000"/>
   <p:notesSz cx="6858000" cy="9144000"/>
@@ -647,7 +647,7 @@
           <a:lstStyle xmlns:a="http://schemas.openxmlformats.org/drawingml/2006/main"/>
           <a:p xmlns:a="http://schemas.openxmlformats.org/drawingml/2006/main">
             <a:r>
-              <a:t>TAM is a broad institutional user universe, not an evidenced short-term rental demand estimate or monetised market. XJTLU reports 26,000+ students, updated May 2026. No assumption places all of them at XEC/SIP.</a:t>
+              <a:t>The broad population context is now campus-specific: a Xinhua Daily article republished on the XJTLU website in May 2026 reports more than 4,000 students at XEC (Taicang). This is a dated report, not an October 2026 administrative headcount, a measured number needing this service, or an active-user count. Population alone does not quantify item-access demand. We exclude the university-wide total from the pilot market sizing. SIP remains an interface option, not an additional population silently counted in this XEC-first pilot.</a:t>
             </a:r>
           </a:p>
           <a:p xmlns:a="http://schemas.openxmlformats.org/drawingml/2006/main">
@@ -672,7 +672,7 @@
           </a:p>
           <a:p xmlns:a="http://schemas.openxmlformats.org/drawingml/2006/main">
             <a:r>
-              <a:t>XJTLU Overview &amp; Key Facts. https://www.xjtlu.edu.cn/en/overview . Accessed 15 October 2026. Institutional figure updated May 2026.</a:t>
+              <a:t>S1. Xinhua Daily article republished on XJTLU's official website in May 2026, reporting more than 4,000 enrolled students at XJTLU Entrepreneur College (Taicang). Accessed 19 October 2026 through the indexed university-hosted article. https://www.xjtlu.edu.cn/zh/news/2026/05/xinhuaribao20zhounianxinwen . This is dated media context, not an October enrolment register or measured demand.</a:t>
             </a:r>
           </a:p>
           <a:p xmlns:a="http://schemas.openxmlformats.org/drawingml/2006/main">
@@ -3465,12 +3465,12 @@
   </p:cSld>
   <p:clrMap bg1="lt1" tx1="dk1" bg2="lt2" tx2="dk2" accent1="accent1" accent2="accent2" accent3="accent3" accent4="accent4" accent5="accent5" accent6="accent6" hlink="hlink" folHlink="folHlink"/>
   <p:sldLayoutIdLst>
-    <p:sldLayoutId xmlns:r="http://schemas.openxmlformats.org/officeDocument/2006/relationships" id="2147483649" r:id="R017b26c95430499e"/>
-    <p:sldLayoutId xmlns:r="http://schemas.openxmlformats.org/officeDocument/2006/relationships" id="2147483650" r:id="Rf51d11a8bc404d80"/>
-    <p:sldLayoutId xmlns:r="http://schemas.openxmlformats.org/officeDocument/2006/relationships" id="2147483651" r:id="R475856ee17644972"/>
-    <p:sldLayoutId xmlns:r="http://schemas.openxmlformats.org/officeDocument/2006/relationships" id="2147483652" r:id="R64dd4caccdb745ab"/>
-    <p:sldLayoutId xmlns:r="http://schemas.openxmlformats.org/officeDocument/2006/relationships" id="2147483653" r:id="R4eae135dd2094850"/>
-    <p:sldLayoutId xmlns:r="http://schemas.openxmlformats.org/officeDocument/2006/relationships" id="2147483654" r:id="Rdca1a09d9cee428e"/>
+    <p:sldLayoutId xmlns:r="http://schemas.openxmlformats.org/officeDocument/2006/relationships" id="2147483649" r:id="R36e8eff044fe4a44"/>
+    <p:sldLayoutId xmlns:r="http://schemas.openxmlformats.org/officeDocument/2006/relationships" id="2147483650" r:id="Re3c902fa980447db"/>
+    <p:sldLayoutId xmlns:r="http://schemas.openxmlformats.org/officeDocument/2006/relationships" id="2147483651" r:id="R8f698806249741a4"/>
+    <p:sldLayoutId xmlns:r="http://schemas.openxmlformats.org/officeDocument/2006/relationships" id="2147483652" r:id="R100a79ed7a2e4a0a"/>
+    <p:sldLayoutId xmlns:r="http://schemas.openxmlformats.org/officeDocument/2006/relationships" id="2147483653" r:id="R8b37419a0c2f49f2"/>
+    <p:sldLayoutId xmlns:r="http://schemas.openxmlformats.org/officeDocument/2006/relationships" id="2147483654" r:id="Rd935f3d0e8f74c5f"/>
   </p:sldLayoutIdLst>
   <p:txStyles>
     <p:titleStyle>
@@ -5197,7 +5197,7 @@
           <p:cNvPr id="8" name="">
             <a:extLst xmlns:a="http://schemas.openxmlformats.org/drawingml/2006/main">
               <a:ext uri="{FF2B5EF4-FFF2-40B4-BE49-F238E27FC236}">
-                <a16:creationId xmlns:a16="http://schemas.microsoft.com/office/drawing/2014/main" id="{ABDD1CC1-B46A-4456-A90F-47B2173B3E1D}"/>
+                <a16:creationId xmlns:a16="http://schemas.microsoft.com/office/drawing/2014/main" id="{44253144-7BD0-4625-84E7-65852FA861FB}"/>
               </a:ext>
             </a:extLst>
           </p:cNvPr>
@@ -5207,7 +5207,7 @@
           <p:nvPr/>
         </p:nvPicPr>
         <p:blipFill>
-          <a:blip xmlns:r="http://schemas.openxmlformats.org/officeDocument/2006/relationships" xmlns:a="http://schemas.openxmlformats.org/drawingml/2006/main" r:embed="Rb14a4becf3194beb"/>
+          <a:blip xmlns:r="http://schemas.openxmlformats.org/officeDocument/2006/relationships" xmlns:a="http://schemas.openxmlformats.org/drawingml/2006/main" r:embed="Rbc81d4032da645c7"/>
           <a:stretch xmlns:a="http://schemas.openxmlformats.org/drawingml/2006/main"/>
         </p:blipFill>
         <p:spPr>
@@ -9209,7 +9209,7 @@
                 <a:ea typeface="Arial"/>
                 <a:cs typeface="Arial"/>
               </a:rPr>
-              <a:t>TAM context</a:t>
+              <a:t>TAM context (XEC)</a:t>
             </a:r>
           </a:p>
         </p:txBody>
@@ -9377,7 +9377,7 @@
                 <a:ea typeface="Arial"/>
                 <a:cs typeface="Arial"/>
               </a:rPr>
-              <a:t>26,000+ students</a:t>
+              <a:t>4,000+ students</a:t>
             </a:r>
           </a:p>
         </p:txBody>
@@ -9545,7 +9545,7 @@
                 <a:ea typeface="Arial"/>
                 <a:cs typeface="Arial"/>
               </a:rPr>
-              <a:t>Institution-wide universe. Local demand is unmeasured.</a:t>
+              <a:t>XEC only, May 2026 report. Demand remains unmeasured.</a:t>
             </a:r>
           </a:p>
         </p:txBody>
@@ -10563,7 +10563,7 @@
           <p:cNvPr id="13" name="">
             <a:extLst xmlns:a="http://schemas.openxmlformats.org/drawingml/2006/main">
               <a:ext uri="{FF2B5EF4-FFF2-40B4-BE49-F238E27FC236}">
-                <a16:creationId xmlns:a16="http://schemas.microsoft.com/office/drawing/2014/main" id="{D2822B23-59A1-41F9-970B-0551FAEF8833}"/>
+                <a16:creationId xmlns:a16="http://schemas.microsoft.com/office/drawing/2014/main" id="{EC2D820E-8247-4853-AA92-E4BCA4FBE973}"/>
               </a:ext>
             </a:extLst>
           </p:cNvPr>
@@ -11976,7 +11976,7 @@
           <p:cNvPr id="4" name="">
             <a:extLst xmlns:a="http://schemas.openxmlformats.org/drawingml/2006/main">
               <a:ext uri="{FF2B5EF4-FFF2-40B4-BE49-F238E27FC236}">
-                <a16:creationId xmlns:a16="http://schemas.microsoft.com/office/drawing/2014/main" id="{7D84D5C7-29B2-4475-A1D2-5089C2080CE4}"/>
+                <a16:creationId xmlns:a16="http://schemas.microsoft.com/office/drawing/2014/main" id="{4E22C8C2-5AAD-4167-B04A-5B4F00E7F9A2}"/>
               </a:ext>
             </a:extLst>
           </p:cNvPr>
@@ -11986,7 +11986,7 @@
           <p:nvPr/>
         </p:nvPicPr>
         <p:blipFill>
-          <a:blip xmlns:r="http://schemas.openxmlformats.org/officeDocument/2006/relationships" xmlns:a="http://schemas.openxmlformats.org/drawingml/2006/main" r:embed="Rcb9c792e71174092"/>
+          <a:blip xmlns:r="http://schemas.openxmlformats.org/officeDocument/2006/relationships" xmlns:a="http://schemas.openxmlformats.org/drawingml/2006/main" r:embed="R495e481ab2bf45fa"/>
           <a:stretch xmlns:a="http://schemas.openxmlformats.org/drawingml/2006/main"/>
         </p:blipFill>
         <p:spPr>
@@ -12508,7 +12508,7 @@
           <p:cNvPr id="8" name="">
             <a:extLst xmlns:a="http://schemas.openxmlformats.org/drawingml/2006/main">
               <a:ext uri="{FF2B5EF4-FFF2-40B4-BE49-F238E27FC236}">
-                <a16:creationId xmlns:a16="http://schemas.microsoft.com/office/drawing/2014/main" id="{1D0DC0C4-95A8-4547-AC4D-A35881A301BD}"/>
+                <a16:creationId xmlns:a16="http://schemas.microsoft.com/office/drawing/2014/main" id="{5DDEAB1E-08E0-440B-BDC2-56A1C579979A}"/>
               </a:ext>
             </a:extLst>
           </p:cNvPr>
@@ -14761,7 +14761,7 @@
           <p:cNvPr id="4" name="">
             <a:extLst xmlns:a="http://schemas.openxmlformats.org/drawingml/2006/main">
               <a:ext uri="{FF2B5EF4-FFF2-40B4-BE49-F238E27FC236}">
-                <a16:creationId xmlns:a16="http://schemas.microsoft.com/office/drawing/2014/main" id="{E934265A-0EB1-435D-A1CE-75ED39E3B3DD}"/>
+                <a16:creationId xmlns:a16="http://schemas.microsoft.com/office/drawing/2014/main" id="{53A2B7DA-5BC6-488F-BE44-84B21D54341F}"/>
               </a:ext>
             </a:extLst>
           </p:cNvPr>
